--- a/ppt/SriVenkatBora_X25164414_patient-vitals-monitoring.pptx
+++ b/ppt/SriVenkatBora_X25164414_patient-vitals-monitoring.pptx
@@ -1144,14 +1144,34 @@
       </p:grpSpPr>
       <p:sp>
         <p:nvSpPr>
-          <p:cNvPr id="2" name="Text 0"/>
-          <p:cNvSpPr/>
-          <p:nvPr/>
-        </p:nvSpPr>
-        <p:spPr>
-          <a:xfrm>
-            <a:off x="640080" y="914400"/>
-            <a:ext cx="10972800" cy="1280160"/>
+          <p:cNvPr id="2" name="Shape 0"/>
+          <p:cNvSpPr/>
+          <p:nvPr/>
+        </p:nvSpPr>
+        <p:spPr>
+          <a:xfrm>
+            <a:off x="0" y="0"/>
+            <a:ext cx="4663440" cy="6858000"/>
+          </a:xfrm>
+          <a:prstGeom prst="rect">
+            <a:avLst/>
+          </a:prstGeom>
+          <a:solidFill>
+            <a:srgbClr val="0F6E7E"/>
+          </a:solidFill>
+          <a:ln/>
+        </p:spPr>
+      </p:sp>
+      <p:sp>
+        <p:nvSpPr>
+          <p:cNvPr id="3" name="Text 1"/>
+          <p:cNvSpPr/>
+          <p:nvPr/>
+        </p:nvSpPr>
+        <p:spPr>
+          <a:xfrm>
+            <a:off x="502920" y="1280160"/>
+            <a:ext cx="3749040" cy="2377440"/>
           </a:xfrm>
           <a:prstGeom prst="rect">
             <a:avLst/>
@@ -1163,11 +1183,11 @@
           <a:bodyPr wrap="square" rtlCol="0" anchor="t"/>
           <a:lstStyle/>
           <a:p>
-            <a:pPr algn="l" indent="0" marL="0">
-              <a:buNone/>
-            </a:pPr>
-            <a:r>
-              <a:rPr lang="en-US" sz="4000" b="1" dirty="0">
+            <a:pPr indent="0" marL="0">
+              <a:buNone/>
+            </a:pPr>
+            <a:r>
+              <a:rPr lang="en-US" sz="3400" b="1" dirty="0">
                 <a:solidFill>
                   <a:srgbClr val="FFFFFF"/>
                 </a:solidFill>
@@ -1177,20 +1197,20 @@
               </a:rPr>
               <a:t>Patient Vitals Remote Monitoring</a:t>
             </a:r>
-            <a:endParaRPr lang="en-US" sz="4000" dirty="0"/>
-          </a:p>
-        </p:txBody>
-      </p:sp>
-      <p:sp>
-        <p:nvSpPr>
-          <p:cNvPr id="3" name="Text 1"/>
-          <p:cNvSpPr/>
-          <p:nvPr/>
-        </p:nvSpPr>
-        <p:spPr>
-          <a:xfrm>
-            <a:off x="658368" y="2148840"/>
-            <a:ext cx="10972800" cy="365760"/>
+            <a:endParaRPr lang="en-US" sz="3400" dirty="0"/>
+          </a:p>
+        </p:txBody>
+      </p:sp>
+      <p:sp>
+        <p:nvSpPr>
+          <p:cNvPr id="4" name="Text 2"/>
+          <p:cNvSpPr/>
+          <p:nvPr/>
+        </p:nvSpPr>
+        <p:spPr>
+          <a:xfrm>
+            <a:off x="521208" y="5394960"/>
+            <a:ext cx="3840480" cy="731520"/>
           </a:xfrm>
           <a:prstGeom prst="rect">
             <a:avLst/>
@@ -1206,9 +1226,9 @@
               <a:buNone/>
             </a:pPr>
             <a:r>
-              <a:rPr lang="en-US" sz="1600" dirty="0">
-                <a:solidFill>
-                  <a:srgbClr val="4FA5B3"/>
+              <a:rPr lang="en-US" sz="1500" dirty="0">
+                <a:solidFill>
+                  <a:srgbClr val="CFE6EA"/>
                 </a:solidFill>
                 <a:latin typeface="Calibri" pitchFamily="34" charset="0"/>
                 <a:ea typeface="Calibri" pitchFamily="34" charset="-122"/>
@@ -1216,20 +1236,20 @@
               </a:rPr>
               <a:t>Sri Venkat Bora   ·   X25164414</a:t>
             </a:r>
-            <a:endParaRPr lang="en-US" sz="1600" dirty="0"/>
-          </a:p>
-        </p:txBody>
-      </p:sp>
-      <p:sp>
-        <p:nvSpPr>
-          <p:cNvPr id="4" name="Text 2"/>
-          <p:cNvSpPr/>
-          <p:nvPr/>
-        </p:nvSpPr>
-        <p:spPr>
-          <a:xfrm>
-            <a:off x="658368" y="2697480"/>
-            <a:ext cx="10424160" cy="1371600"/>
+            <a:endParaRPr lang="en-US" sz="1500" dirty="0"/>
+          </a:p>
+        </p:txBody>
+      </p:sp>
+      <p:sp>
+        <p:nvSpPr>
+          <p:cNvPr id="5" name="Text 3"/>
+          <p:cNvSpPr/>
+          <p:nvPr/>
+        </p:nvSpPr>
+        <p:spPr>
+          <a:xfrm>
+            <a:off x="5120640" y="1371600"/>
+            <a:ext cx="6492240" cy="2011680"/>
           </a:xfrm>
           <a:prstGeom prst="rect">
             <a:avLst/>
@@ -1243,7 +1263,7 @@
           <a:p>
             <a:pPr indent="0" marL="0">
               <a:lnSpc>
-                <a:spcPct val="110000"/>
+                <a:spcPct val="112000"/>
               </a:lnSpc>
               <a:buNone/>
             </a:pPr>
@@ -1264,14 +1284,14 @@
       </p:sp>
       <p:sp>
         <p:nvSpPr>
-          <p:cNvPr id="5" name="Shape 3"/>
-          <p:cNvSpPr/>
-          <p:nvPr/>
-        </p:nvSpPr>
-        <p:spPr>
-          <a:xfrm>
-            <a:off x="658368" y="4206240"/>
-            <a:ext cx="2651760" cy="566928"/>
+          <p:cNvPr id="6" name="Shape 4"/>
+          <p:cNvSpPr/>
+          <p:nvPr/>
+        </p:nvSpPr>
+        <p:spPr>
+          <a:xfrm>
+            <a:off x="5120640" y="4023360"/>
+            <a:ext cx="2926080" cy="566928"/>
           </a:xfrm>
           <a:prstGeom prst="roundRect">
             <a:avLst>
@@ -1291,14 +1311,14 @@
       </p:sp>
       <p:sp>
         <p:nvSpPr>
-          <p:cNvPr id="6" name="Text 4"/>
-          <p:cNvSpPr/>
-          <p:nvPr/>
-        </p:nvSpPr>
-        <p:spPr>
-          <a:xfrm>
-            <a:off x="658368" y="4206240"/>
-            <a:ext cx="2651760" cy="566928"/>
+          <p:cNvPr id="7" name="Text 5"/>
+          <p:cNvSpPr/>
+          <p:nvPr/>
+        </p:nvSpPr>
+        <p:spPr>
+          <a:xfrm>
+            <a:off x="5120640" y="4023360"/>
+            <a:ext cx="2926080" cy="566928"/>
           </a:xfrm>
           <a:prstGeom prst="rect">
             <a:avLst/>
@@ -1314,7 +1334,7 @@
               <a:buNone/>
             </a:pPr>
             <a:r>
-              <a:rPr lang="en-US" sz="1400" b="1" dirty="0">
+              <a:rPr lang="en-US" sz="1350" b="1" dirty="0">
                 <a:solidFill>
                   <a:srgbClr val="E5615E"/>
                 </a:solidFill>
@@ -1324,20 +1344,20 @@
               </a:rPr>
               <a:t>SpO₂ &lt; 92% alert</a:t>
             </a:r>
-            <a:endParaRPr lang="en-US" sz="1400" dirty="0"/>
-          </a:p>
-        </p:txBody>
-      </p:sp>
-      <p:sp>
-        <p:nvSpPr>
-          <p:cNvPr id="7" name="Shape 5"/>
-          <p:cNvSpPr/>
-          <p:nvPr/>
-        </p:nvSpPr>
-        <p:spPr>
-          <a:xfrm>
-            <a:off x="3538728" y="4206240"/>
-            <a:ext cx="2651760" cy="566928"/>
+            <a:endParaRPr lang="en-US" sz="1350" dirty="0"/>
+          </a:p>
+        </p:txBody>
+      </p:sp>
+      <p:sp>
+        <p:nvSpPr>
+          <p:cNvPr id="8" name="Shape 6"/>
+          <p:cNvSpPr/>
+          <p:nvPr/>
+        </p:nvSpPr>
+        <p:spPr>
+          <a:xfrm>
+            <a:off x="5120640" y="4709160"/>
+            <a:ext cx="2926080" cy="566928"/>
           </a:xfrm>
           <a:prstGeom prst="roundRect">
             <a:avLst>
@@ -1357,14 +1377,14 @@
       </p:sp>
       <p:sp>
         <p:nvSpPr>
-          <p:cNvPr id="8" name="Text 6"/>
-          <p:cNvSpPr/>
-          <p:nvPr/>
-        </p:nvSpPr>
-        <p:spPr>
-          <a:xfrm>
-            <a:off x="3538728" y="4206240"/>
-            <a:ext cx="2651760" cy="566928"/>
+          <p:cNvPr id="9" name="Text 7"/>
+          <p:cNvSpPr/>
+          <p:nvPr/>
+        </p:nvSpPr>
+        <p:spPr>
+          <a:xfrm>
+            <a:off x="5120640" y="4709160"/>
+            <a:ext cx="2926080" cy="566928"/>
           </a:xfrm>
           <a:prstGeom prst="rect">
             <a:avLst/>
@@ -1380,7 +1400,7 @@
               <a:buNone/>
             </a:pPr>
             <a:r>
-              <a:rPr lang="en-US" sz="1400" b="1" dirty="0">
+              <a:rPr lang="en-US" sz="1350" b="1" dirty="0">
                 <a:solidFill>
                   <a:srgbClr val="E5615E"/>
                 </a:solidFill>
@@ -1390,20 +1410,20 @@
               </a:rPr>
               <a:t>5 vitals · 2 patients</a:t>
             </a:r>
-            <a:endParaRPr lang="en-US" sz="1400" dirty="0"/>
-          </a:p>
-        </p:txBody>
-      </p:sp>
-      <p:sp>
-        <p:nvSpPr>
-          <p:cNvPr id="9" name="Shape 7"/>
-          <p:cNvSpPr/>
-          <p:nvPr/>
-        </p:nvSpPr>
-        <p:spPr>
-          <a:xfrm>
-            <a:off x="6419088" y="4206240"/>
-            <a:ext cx="2651760" cy="566928"/>
+            <a:endParaRPr lang="en-US" sz="1350" dirty="0"/>
+          </a:p>
+        </p:txBody>
+      </p:sp>
+      <p:sp>
+        <p:nvSpPr>
+          <p:cNvPr id="10" name="Shape 8"/>
+          <p:cNvSpPr/>
+          <p:nvPr/>
+        </p:nvSpPr>
+        <p:spPr>
+          <a:xfrm>
+            <a:off x="5120640" y="5394960"/>
+            <a:ext cx="2926080" cy="566928"/>
           </a:xfrm>
           <a:prstGeom prst="roundRect">
             <a:avLst>
@@ -1423,14 +1443,14 @@
       </p:sp>
       <p:sp>
         <p:nvSpPr>
-          <p:cNvPr id="10" name="Text 8"/>
-          <p:cNvSpPr/>
-          <p:nvPr/>
-        </p:nvSpPr>
-        <p:spPr>
-          <a:xfrm>
-            <a:off x="6419088" y="4206240"/>
-            <a:ext cx="2651760" cy="566928"/>
+          <p:cNvPr id="11" name="Text 9"/>
+          <p:cNvSpPr/>
+          <p:nvPr/>
+        </p:nvSpPr>
+        <p:spPr>
+          <a:xfrm>
+            <a:off x="5120640" y="5394960"/>
+            <a:ext cx="2926080" cy="566928"/>
           </a:xfrm>
           <a:prstGeom prst="rect">
             <a:avLst/>
@@ -1446,7 +1466,7 @@
               <a:buNone/>
             </a:pPr>
             <a:r>
-              <a:rPr lang="en-US" sz="1400" b="1" dirty="0">
+              <a:rPr lang="en-US" sz="1350" b="1" dirty="0">
                 <a:solidFill>
                   <a:srgbClr val="E5615E"/>
                 </a:solidFill>
@@ -1456,20 +1476,20 @@
               </a:rPr>
               <a:t>10 s alert window</a:t>
             </a:r>
-            <a:endParaRPr lang="en-US" sz="1400" dirty="0"/>
-          </a:p>
-        </p:txBody>
-      </p:sp>
-      <p:sp>
-        <p:nvSpPr>
-          <p:cNvPr id="11" name="Text 9"/>
-          <p:cNvSpPr/>
-          <p:nvPr/>
-        </p:nvSpPr>
-        <p:spPr>
-          <a:xfrm>
-            <a:off x="658368" y="6126480"/>
-            <a:ext cx="10972800" cy="365760"/>
+            <a:endParaRPr lang="en-US" sz="1350" dirty="0"/>
+          </a:p>
+        </p:txBody>
+      </p:sp>
+      <p:sp>
+        <p:nvSpPr>
+          <p:cNvPr id="12" name="Text 10"/>
+          <p:cNvSpPr/>
+          <p:nvPr/>
+        </p:nvSpPr>
+        <p:spPr>
+          <a:xfrm>
+            <a:off x="5120640" y="6172200"/>
+            <a:ext cx="6400800" cy="365760"/>
           </a:xfrm>
           <a:prstGeom prst="rect">
             <a:avLst/>
@@ -1485,7 +1505,7 @@
               <a:buNone/>
             </a:pPr>
             <a:r>
-              <a:rPr lang="en-US" sz="1300" dirty="0">
+              <a:rPr lang="en-US" sz="1250" dirty="0">
                 <a:solidFill>
                   <a:srgbClr val="5A7178"/>
                 </a:solidFill>
@@ -1495,7 +1515,7 @@
               </a:rPr>
               <a:t>Fog &amp; Edge Computing (H9FECC)   ·   deployed live on AWS</a:t>
             </a:r>
-            <a:endParaRPr lang="en-US" sz="1300" dirty="0"/>
+            <a:endParaRPr lang="en-US" sz="1250" dirty="0"/>
           </a:p>
         </p:txBody>
       </p:sp>
@@ -1605,8 +1625,8 @@
         </p:nvSpPr>
         <p:spPr>
           <a:xfrm>
-            <a:off x="1325880" y="2670048"/>
-            <a:ext cx="201168" cy="201168"/>
+            <a:off x="1335024" y="2633472"/>
+            <a:ext cx="182880" cy="182880"/>
           </a:xfrm>
           <a:prstGeom prst="ellipse">
             <a:avLst/>
@@ -1625,8 +1645,8 @@
         </p:nvSpPr>
         <p:spPr>
           <a:xfrm>
-            <a:off x="594360" y="2926080"/>
-            <a:ext cx="1664208" cy="411480"/>
+            <a:off x="612648" y="2852928"/>
+            <a:ext cx="1627632" cy="365760"/>
           </a:xfrm>
           <a:prstGeom prst="rect">
             <a:avLst/>
@@ -1664,8 +1684,8 @@
         </p:nvSpPr>
         <p:spPr>
           <a:xfrm>
-            <a:off x="621792" y="3310128"/>
-            <a:ext cx="1609344" cy="457200"/>
+            <a:off x="640080" y="3200400"/>
+            <a:ext cx="1572768" cy="411480"/>
           </a:xfrm>
           <a:prstGeom prst="rect">
             <a:avLst/>
@@ -1754,8 +1774,8 @@
         </p:nvSpPr>
         <p:spPr>
           <a:xfrm>
-            <a:off x="3193633" y="2670048"/>
-            <a:ext cx="201168" cy="201168"/>
+            <a:off x="3202777" y="2633472"/>
+            <a:ext cx="182880" cy="182880"/>
           </a:xfrm>
           <a:prstGeom prst="ellipse">
             <a:avLst/>
@@ -1774,8 +1794,8 @@
         </p:nvSpPr>
         <p:spPr>
           <a:xfrm>
-            <a:off x="2462113" y="2926080"/>
-            <a:ext cx="1664208" cy="411480"/>
+            <a:off x="2480401" y="2852928"/>
+            <a:ext cx="1627632" cy="365760"/>
           </a:xfrm>
           <a:prstGeom prst="rect">
             <a:avLst/>
@@ -1813,8 +1833,8 @@
         </p:nvSpPr>
         <p:spPr>
           <a:xfrm>
-            <a:off x="2489545" y="3310128"/>
-            <a:ext cx="1609344" cy="457200"/>
+            <a:off x="2507833" y="3200400"/>
+            <a:ext cx="1572768" cy="411480"/>
           </a:xfrm>
           <a:prstGeom prst="rect">
             <a:avLst/>
@@ -1903,8 +1923,8 @@
         </p:nvSpPr>
         <p:spPr>
           <a:xfrm>
-            <a:off x="5061387" y="2670048"/>
-            <a:ext cx="201168" cy="201168"/>
+            <a:off x="5070531" y="2633472"/>
+            <a:ext cx="182880" cy="182880"/>
           </a:xfrm>
           <a:prstGeom prst="ellipse">
             <a:avLst/>
@@ -1923,8 +1943,8 @@
         </p:nvSpPr>
         <p:spPr>
           <a:xfrm>
-            <a:off x="4329867" y="2926080"/>
-            <a:ext cx="1664208" cy="411480"/>
+            <a:off x="4348155" y="2852928"/>
+            <a:ext cx="1627632" cy="365760"/>
           </a:xfrm>
           <a:prstGeom prst="rect">
             <a:avLst/>
@@ -1962,8 +1982,8 @@
         </p:nvSpPr>
         <p:spPr>
           <a:xfrm>
-            <a:off x="4357299" y="3310128"/>
-            <a:ext cx="1609344" cy="457200"/>
+            <a:off x="4375587" y="3200400"/>
+            <a:ext cx="1572768" cy="411480"/>
           </a:xfrm>
           <a:prstGeom prst="rect">
             <a:avLst/>
@@ -2052,8 +2072,8 @@
         </p:nvSpPr>
         <p:spPr>
           <a:xfrm>
-            <a:off x="6929140" y="2670048"/>
-            <a:ext cx="201168" cy="201168"/>
+            <a:off x="6938284" y="2633472"/>
+            <a:ext cx="182880" cy="182880"/>
           </a:xfrm>
           <a:prstGeom prst="ellipse">
             <a:avLst/>
@@ -2072,8 +2092,8 @@
         </p:nvSpPr>
         <p:spPr>
           <a:xfrm>
-            <a:off x="6197620" y="2926080"/>
-            <a:ext cx="1664208" cy="411480"/>
+            <a:off x="6215908" y="2852928"/>
+            <a:ext cx="1627632" cy="365760"/>
           </a:xfrm>
           <a:prstGeom prst="rect">
             <a:avLst/>
@@ -2111,8 +2131,8 @@
         </p:nvSpPr>
         <p:spPr>
           <a:xfrm>
-            <a:off x="6225052" y="3310128"/>
-            <a:ext cx="1609344" cy="457200"/>
+            <a:off x="6243340" y="3200400"/>
+            <a:ext cx="1572768" cy="411480"/>
           </a:xfrm>
           <a:prstGeom prst="rect">
             <a:avLst/>
@@ -2201,8 +2221,8 @@
         </p:nvSpPr>
         <p:spPr>
           <a:xfrm>
-            <a:off x="8796894" y="2670048"/>
-            <a:ext cx="201168" cy="201168"/>
+            <a:off x="8806038" y="2633472"/>
+            <a:ext cx="182880" cy="182880"/>
           </a:xfrm>
           <a:prstGeom prst="ellipse">
             <a:avLst/>
@@ -2221,8 +2241,8 @@
         </p:nvSpPr>
         <p:spPr>
           <a:xfrm>
-            <a:off x="8065374" y="2926080"/>
-            <a:ext cx="1664208" cy="411480"/>
+            <a:off x="8083662" y="2852928"/>
+            <a:ext cx="1627632" cy="365760"/>
           </a:xfrm>
           <a:prstGeom prst="rect">
             <a:avLst/>
@@ -2260,8 +2280,8 @@
         </p:nvSpPr>
         <p:spPr>
           <a:xfrm>
-            <a:off x="8092806" y="3310128"/>
-            <a:ext cx="1609344" cy="457200"/>
+            <a:off x="8111094" y="3200400"/>
+            <a:ext cx="1572768" cy="411480"/>
           </a:xfrm>
           <a:prstGeom prst="rect">
             <a:avLst/>
@@ -2350,8 +2370,8 @@
         </p:nvSpPr>
         <p:spPr>
           <a:xfrm>
-            <a:off x="10664647" y="2670048"/>
-            <a:ext cx="201168" cy="201168"/>
+            <a:off x="10673791" y="2633472"/>
+            <a:ext cx="182880" cy="182880"/>
           </a:xfrm>
           <a:prstGeom prst="ellipse">
             <a:avLst/>
@@ -2370,8 +2390,8 @@
         </p:nvSpPr>
         <p:spPr>
           <a:xfrm>
-            <a:off x="9933127" y="2926080"/>
-            <a:ext cx="1664208" cy="411480"/>
+            <a:off x="9951415" y="2852928"/>
+            <a:ext cx="1627632" cy="365760"/>
           </a:xfrm>
           <a:prstGeom prst="rect">
             <a:avLst/>
@@ -2409,8 +2429,8 @@
         </p:nvSpPr>
         <p:spPr>
           <a:xfrm>
-            <a:off x="9960559" y="3310128"/>
-            <a:ext cx="1609344" cy="457200"/>
+            <a:off x="9978847" y="3200400"/>
+            <a:ext cx="1572768" cy="411480"/>
           </a:xfrm>
           <a:prstGeom prst="rect">
             <a:avLst/>
@@ -2526,8 +2546,8 @@
         </p:nvSpPr>
         <p:spPr>
           <a:xfrm>
-            <a:off x="640080" y="5212080"/>
-            <a:ext cx="10972800" cy="640080"/>
+            <a:off x="640080" y="5257800"/>
+            <a:ext cx="10972800" cy="731520"/>
           </a:xfrm>
           <a:prstGeom prst="rect">
             <a:avLst/>
@@ -2759,7 +2779,7 @@
                 <a:ea typeface="Calibri" pitchFamily="34" charset="-122"/>
                 <a:cs typeface="Calibri" pitchFamily="34" charset="-120"/>
               </a:rPr>
-              <a:t>Pipeline health, all green</a:t>
+              <a:t>Two patients, five vitals live</a:t>
             </a:r>
             <a:endParaRPr lang="en-US" sz="1800" dirty="0"/>
           </a:p>
@@ -2798,7 +2818,7 @@
                 <a:ea typeface="Calibri" pitchFamily="34" charset="-122"/>
                 <a:cs typeface="Calibri" pitchFamily="34" charset="-120"/>
               </a:rPr>
-              <a:t>Edge gateway online, queue reachable, Lambda deployed and windowed records archived — the whole chain live.</a:t>
+              <a:t>Heart rate, SpO2, respiration, temperature and blood pressure streaming for both beds, each checked against its clinical limit as it lands.</a:t>
             </a:r>
             <a:endParaRPr lang="en-US" sz="1350" dirty="0"/>
           </a:p>
@@ -2896,7 +2916,7 @@
                 <a:ea typeface="Calibri" pitchFamily="34" charset="-122"/>
                 <a:cs typeface="Calibri" pitchFamily="34" charset="-120"/>
               </a:rPr>
-              <a:t>Live ward monitor</a:t>
+              <a:t>A hypoxia alert on real data</a:t>
             </a:r>
             <a:endParaRPr lang="en-US" sz="1800" dirty="0"/>
           </a:p>
@@ -2935,7 +2955,7 @@
                 <a:ea typeface="Calibri" pitchFamily="34" charset="-122"/>
                 <a:cs typeface="Calibri" pitchFamily="34" charset="-120"/>
               </a:rPr>
-              <a:t>Two patients streaming five vitals, with a hypoxia banner firing on real data as SpO₂ crosses the 92% clinical trigger.</a:t>
+              <a:t>The banner raises as Patient-1's SpO2 crosses the 92% trigger — captured live at 89.7% — not a scripted demo value.</a:t>
             </a:r>
             <a:endParaRPr lang="en-US" sz="1350" dirty="0"/>
           </a:p>
@@ -3033,7 +3053,7 @@
                 <a:ea typeface="Calibri" pitchFamily="34" charset="-122"/>
                 <a:cs typeface="Calibri" pitchFamily="34" charset="-120"/>
               </a:rPr>
-              <a:t>Tested end to end</a:t>
+              <a:t>The pipeline is genuinely live</a:t>
             </a:r>
             <a:endParaRPr lang="en-US" sz="1800" dirty="0"/>
           </a:p>
@@ -3072,7 +3092,7 @@
                 <a:ea typeface="Calibri" pitchFamily="34" charset="-122"/>
                 <a:cs typeface="Calibri" pitchFamily="34" charset="-120"/>
               </a:rPr>
-              <a:t>41 automated tests pass across the sensor, fog gateway, processor and dashboard modules.</a:t>
+              <a:t>The stored-record count climbs between refreshes and the freshest reading stays a couple of seconds old, so nothing here is cached.</a:t>
             </a:r>
             <a:endParaRPr lang="en-US" sz="1350" dirty="0"/>
           </a:p>
@@ -3157,24 +3177,24 @@
         </p:nvSpPr>
         <p:spPr>
           <a:xfrm>
-            <a:off x="640080" y="640080"/>
-            <a:ext cx="10972800" cy="640080"/>
-          </a:xfrm>
-          <a:prstGeom prst="rect">
-            <a:avLst/>
-          </a:prstGeom>
-          <a:noFill/>
-          <a:ln/>
-        </p:spPr>
-        <p:txBody>
-          <a:bodyPr wrap="square" rtlCol="0" anchor="ctr"/>
+            <a:off x="640080" y="594360"/>
+            <a:ext cx="10972800" cy="822960"/>
+          </a:xfrm>
+          <a:prstGeom prst="rect">
+            <a:avLst/>
+          </a:prstGeom>
+          <a:noFill/>
+          <a:ln/>
+        </p:spPr>
+        <p:txBody>
+          <a:bodyPr wrap="square" rtlCol="0" anchor="t"/>
           <a:lstStyle/>
           <a:p>
             <a:pPr indent="0" marL="0">
               <a:buNone/>
             </a:pPr>
             <a:r>
-              <a:rPr lang="en-US" sz="3000" b="1" dirty="0">
+              <a:rPr lang="en-US" sz="2800" b="1" dirty="0">
                 <a:solidFill>
                   <a:srgbClr val="FFFFFF"/>
                 </a:solidFill>
@@ -3184,7 +3204,7 @@
               </a:rPr>
               <a:t>Hardest Part — a bug no local test could catch</a:t>
             </a:r>
-            <a:endParaRPr lang="en-US" sz="3000" dirty="0"/>
+            <a:endParaRPr lang="en-US" sz="2800" dirty="0"/>
           </a:p>
         </p:txBody>
       </p:sp>
@@ -3196,12 +3216,12 @@
         </p:nvSpPr>
         <p:spPr>
           <a:xfrm>
-            <a:off x="731520" y="1920240"/>
-            <a:ext cx="10698480" cy="1965960"/>
+            <a:off x="731520" y="1874520"/>
+            <a:ext cx="5212080" cy="4160520"/>
           </a:xfrm>
           <a:prstGeom prst="roundRect">
             <a:avLst>
-              <a:gd name="adj" fmla="val 4651"/>
+              <a:gd name="adj" fmla="val 2198"/>
             </a:avLst>
           </a:prstGeom>
           <a:solidFill>
@@ -3223,7 +3243,7 @@
         </p:nvSpPr>
         <p:spPr>
           <a:xfrm>
-            <a:off x="1005840" y="2103120"/>
+            <a:off x="1051560" y="2103120"/>
             <a:ext cx="3657600" cy="457200"/>
           </a:xfrm>
           <a:prstGeom prst="rect">
@@ -3262,8 +3282,8 @@
         </p:nvSpPr>
         <p:spPr>
           <a:xfrm>
-            <a:off x="1005840" y="2578608"/>
-            <a:ext cx="9966960" cy="1188720"/>
+            <a:off x="1051560" y="2651760"/>
+            <a:ext cx="4572000" cy="3200400"/>
           </a:xfrm>
           <a:prstGeom prst="rect">
             <a:avLst/>
@@ -3277,12 +3297,12 @@
           <a:p>
             <a:pPr indent="0" marL="0">
               <a:lnSpc>
-                <a:spcPct val="105000"/>
+                <a:spcPct val="110000"/>
               </a:lnSpc>
               <a:buNone/>
             </a:pPr>
             <a:r>
-              <a:rPr lang="en-US" sz="1300" dirty="0">
+              <a:rPr lang="en-US" sz="1350" dirty="0">
                 <a:solidFill>
                   <a:srgbClr val="CFE6EA"/>
                 </a:solidFill>
@@ -3292,7 +3312,7 @@
               </a:rPr>
               <a:t>The fog gateway's queue publisher shipped with the emulator's fake access keys hard-coded into every connection. Locally everything worked — the emulator accepts any credentials, so all 41 tests and the end-to-end check stayed green — but on real AWS every send would be rejected the moment it deployed.</a:t>
             </a:r>
-            <a:endParaRPr lang="en-US" sz="1300" dirty="0"/>
+            <a:endParaRPr lang="en-US" sz="1350" dirty="0"/>
           </a:p>
         </p:txBody>
       </p:sp>
@@ -3304,12 +3324,12 @@
         </p:nvSpPr>
         <p:spPr>
           <a:xfrm>
-            <a:off x="731520" y="4041648"/>
-            <a:ext cx="10698480" cy="1965960"/>
+            <a:off x="6263640" y="1874520"/>
+            <a:ext cx="5212080" cy="4160520"/>
           </a:xfrm>
           <a:prstGeom prst="roundRect">
             <a:avLst>
-              <a:gd name="adj" fmla="val 4651"/>
+              <a:gd name="adj" fmla="val 2198"/>
             </a:avLst>
           </a:prstGeom>
           <a:solidFill>
@@ -3331,7 +3351,7 @@
         </p:nvSpPr>
         <p:spPr>
           <a:xfrm>
-            <a:off x="1005840" y="4224528"/>
+            <a:off x="6583680" y="2103120"/>
             <a:ext cx="3657600" cy="457200"/>
           </a:xfrm>
           <a:prstGeom prst="rect">
@@ -3370,8 +3390,8 @@
         </p:nvSpPr>
         <p:spPr>
           <a:xfrm>
-            <a:off x="1005840" y="4700016"/>
-            <a:ext cx="9966960" cy="1188720"/>
+            <a:off x="6583680" y="2651760"/>
+            <a:ext cx="4572000" cy="3200400"/>
           </a:xfrm>
           <a:prstGeom prst="rect">
             <a:avLst/>
@@ -3385,12 +3405,12 @@
           <a:p>
             <a:pPr indent="0" marL="0">
               <a:lnSpc>
-                <a:spcPct val="105000"/>
+                <a:spcPct val="110000"/>
               </a:lnSpc>
               <a:buNone/>
             </a:pPr>
             <a:r>
-              <a:rPr lang="en-US" sz="1300" dirty="0">
+              <a:rPr lang="en-US" sz="1350" dirty="0">
                 <a:solidFill>
                   <a:srgbClr val="CFE6EA"/>
                 </a:solidFill>
@@ -3400,7 +3420,7 @@
               </a:rPr>
               <a:t>Fake keys are now attached only when an emulator endpoint is configured; on real AWS the SDK falls back to its own identity chain. A cloud-readiness audit caught two more emulator-only assumptions the same way, and new regression tests lock all three fixes in.</a:t>
             </a:r>
-            <a:endParaRPr lang="en-US" sz="1300" dirty="0"/>
+            <a:endParaRPr lang="en-US" sz="1350" dirty="0"/>
           </a:p>
         </p:txBody>
       </p:sp>

--- a/ppt/SriVenkatBora_X25164414_patient-vitals-monitoring.pptx
+++ b/ppt/SriVenkatBora_X25164414_patient-vitals-monitoring.pptx
@@ -3151,7 +3151,7 @@
     <p:bg>
       <p:bgPr>
         <a:solidFill>
-          <a:srgbClr val="10303A"/>
+          <a:srgbClr val="FFFFFF"/>
         </a:solidFill>
       </p:bgPr>
     </p:bg>
@@ -3177,7 +3177,7 @@
         </p:nvSpPr>
         <p:spPr>
           <a:xfrm>
-            <a:off x="640080" y="594360"/>
+            <a:off x="640080" y="502920"/>
             <a:ext cx="10972800" cy="822960"/>
           </a:xfrm>
           <a:prstGeom prst="rect">
@@ -3196,7 +3196,7 @@
             <a:r>
               <a:rPr lang="en-US" sz="2800" b="1" dirty="0">
                 <a:solidFill>
-                  <a:srgbClr val="FFFFFF"/>
+                  <a:srgbClr val="12313A"/>
                 </a:solidFill>
                 <a:latin typeface="Century Schoolbook" pitchFamily="34" charset="0"/>
                 <a:ea typeface="Century Schoolbook" pitchFamily="34" charset="-122"/>
@@ -3216,8 +3216,8 @@
         </p:nvSpPr>
         <p:spPr>
           <a:xfrm>
-            <a:off x="731520" y="1874520"/>
-            <a:ext cx="5212080" cy="4160520"/>
+            <a:off x="640080" y="1874520"/>
+            <a:ext cx="4937760" cy="4160520"/>
           </a:xfrm>
           <a:prstGeom prst="roundRect">
             <a:avLst>
@@ -3225,9 +3225,9 @@
             </a:avLst>
           </a:prstGeom>
           <a:solidFill>
-            <a:srgbClr val="163B44"/>
-          </a:solidFill>
-          <a:ln w="15875">
+            <a:srgbClr val="EEF6F7"/>
+          </a:solidFill>
+          <a:ln w="19050">
             <a:solidFill>
               <a:srgbClr val="E5615E"/>
             </a:solidFill>
@@ -3243,7 +3243,7 @@
         </p:nvSpPr>
         <p:spPr>
           <a:xfrm>
-            <a:off x="1051560" y="2103120"/>
+            <a:off x="960120" y="2103120"/>
             <a:ext cx="3657600" cy="457200"/>
           </a:xfrm>
           <a:prstGeom prst="rect">
@@ -3282,8 +3282,8 @@
         </p:nvSpPr>
         <p:spPr>
           <a:xfrm>
-            <a:off x="1051560" y="2651760"/>
-            <a:ext cx="4572000" cy="3200400"/>
+            <a:off x="960120" y="2651760"/>
+            <a:ext cx="4343400" cy="3200400"/>
           </a:xfrm>
           <a:prstGeom prst="rect">
             <a:avLst/>
@@ -3297,14 +3297,14 @@
           <a:p>
             <a:pPr indent="0" marL="0">
               <a:lnSpc>
-                <a:spcPct val="110000"/>
+                <a:spcPct val="112000"/>
               </a:lnSpc>
               <a:buNone/>
             </a:pPr>
             <a:r>
               <a:rPr lang="en-US" sz="1350" dirty="0">
                 <a:solidFill>
-                  <a:srgbClr val="CFE6EA"/>
+                  <a:srgbClr val="12313A"/>
                 </a:solidFill>
                 <a:latin typeface="Calibri" pitchFamily="34" charset="0"/>
                 <a:ea typeface="Calibri" pitchFamily="34" charset="-122"/>
@@ -3324,8 +3324,8 @@
         </p:nvSpPr>
         <p:spPr>
           <a:xfrm>
-            <a:off x="6263640" y="1874520"/>
-            <a:ext cx="5212080" cy="4160520"/>
+            <a:off x="6611112" y="1874520"/>
+            <a:ext cx="4937760" cy="4160520"/>
           </a:xfrm>
           <a:prstGeom prst="roundRect">
             <a:avLst>
@@ -3333,11 +3333,11 @@
             </a:avLst>
           </a:prstGeom>
           <a:solidFill>
-            <a:srgbClr val="163B44"/>
-          </a:solidFill>
-          <a:ln w="15875">
+            <a:srgbClr val="EEF6F7"/>
+          </a:solidFill>
+          <a:ln w="19050">
             <a:solidFill>
-              <a:srgbClr val="4FA5B3"/>
+              <a:srgbClr val="2A8FA3"/>
             </a:solidFill>
             <a:prstDash val="solid"/>
           </a:ln>
@@ -3351,7 +3351,7 @@
         </p:nvSpPr>
         <p:spPr>
           <a:xfrm>
-            <a:off x="6583680" y="2103120"/>
+            <a:off x="6931152" y="2103120"/>
             <a:ext cx="3657600" cy="457200"/>
           </a:xfrm>
           <a:prstGeom prst="rect">
@@ -3370,7 +3370,7 @@
             <a:r>
               <a:rPr lang="en-US" sz="1900" b="1" dirty="0">
                 <a:solidFill>
-                  <a:srgbClr val="4FA5B3"/>
+                  <a:srgbClr val="2A8FA3"/>
                 </a:solidFill>
                 <a:latin typeface="Century Schoolbook" pitchFamily="34" charset="0"/>
                 <a:ea typeface="Century Schoolbook" pitchFamily="34" charset="-122"/>
@@ -3390,8 +3390,8 @@
         </p:nvSpPr>
         <p:spPr>
           <a:xfrm>
-            <a:off x="6583680" y="2651760"/>
-            <a:ext cx="4572000" cy="3200400"/>
+            <a:off x="6931152" y="2651760"/>
+            <a:ext cx="4343400" cy="3200400"/>
           </a:xfrm>
           <a:prstGeom prst="rect">
             <a:avLst/>
@@ -3405,14 +3405,14 @@
           <a:p>
             <a:pPr indent="0" marL="0">
               <a:lnSpc>
-                <a:spcPct val="110000"/>
+                <a:spcPct val="112000"/>
               </a:lnSpc>
               <a:buNone/>
             </a:pPr>
             <a:r>
               <a:rPr lang="en-US" sz="1350" dirty="0">
                 <a:solidFill>
-                  <a:srgbClr val="CFE6EA"/>
+                  <a:srgbClr val="12313A"/>
                 </a:solidFill>
                 <a:latin typeface="Calibri" pitchFamily="34" charset="0"/>
                 <a:ea typeface="Calibri" pitchFamily="34" charset="-122"/>
@@ -3423,6 +3423,26 @@
             <a:endParaRPr lang="en-US" sz="1350" dirty="0"/>
           </a:p>
         </p:txBody>
+      </p:sp>
+      <p:sp>
+        <p:nvSpPr>
+          <p:cNvPr id="9" name="Shape 7"/>
+          <p:cNvSpPr/>
+          <p:nvPr/>
+        </p:nvSpPr>
+        <p:spPr>
+          <a:xfrm>
+            <a:off x="5669280" y="3703320"/>
+            <a:ext cx="841248" cy="512064"/>
+          </a:xfrm>
+          <a:prstGeom prst="rightArrow">
+            <a:avLst/>
+          </a:prstGeom>
+          <a:solidFill>
+            <a:srgbClr val="0F6E7E"/>
+          </a:solidFill>
+          <a:ln/>
+        </p:spPr>
       </p:sp>
     </p:spTree>
   </p:cSld>

--- a/ppt/SriVenkatBora_X25164414_patient-vitals-monitoring.pptx
+++ b/ppt/SriVenkatBora_X25164414_patient-vitals-monitoring.pptx
@@ -1598,18 +1598,18 @@
         </p:nvSpPr>
         <p:spPr>
           <a:xfrm>
-            <a:off x="640080" y="2468880"/>
-            <a:ext cx="1572768" cy="1371600"/>
+            <a:off x="3992728" y="1234440"/>
+            <a:ext cx="4206240" cy="658368"/>
           </a:xfrm>
           <a:prstGeom prst="roundRect">
             <a:avLst>
-              <a:gd name="adj" fmla="val 6667"/>
+              <a:gd name="adj" fmla="val 11111"/>
             </a:avLst>
           </a:prstGeom>
           <a:solidFill>
             <a:srgbClr val="EEF6F7"/>
           </a:solidFill>
-          <a:ln w="19050">
+          <a:ln w="17780">
             <a:solidFill>
               <a:srgbClr val="4FA5B3"/>
             </a:solidFill>
@@ -1625,8 +1625,8 @@
         </p:nvSpPr>
         <p:spPr>
           <a:xfrm>
-            <a:off x="1335024" y="2633472"/>
-            <a:ext cx="182880" cy="182880"/>
+            <a:off x="4193896" y="1481328"/>
+            <a:ext cx="164592" cy="164592"/>
           </a:xfrm>
           <a:prstGeom prst="ellipse">
             <a:avLst/>
@@ -1645,8 +1645,8 @@
         </p:nvSpPr>
         <p:spPr>
           <a:xfrm>
-            <a:off x="612648" y="2852928"/>
-            <a:ext cx="1627632" cy="365760"/>
+            <a:off x="4495648" y="1234440"/>
+            <a:ext cx="2194560" cy="658368"/>
           </a:xfrm>
           <a:prstGeom prst="rect">
             <a:avLst/>
@@ -1658,11 +1658,11 @@
           <a:bodyPr wrap="square" lIns="0" tIns="0" rIns="0" bIns="0" rtlCol="0" anchor="ctr"/>
           <a:lstStyle/>
           <a:p>
-            <a:pPr algn="ctr" indent="0" marL="0">
-              <a:buNone/>
-            </a:pPr>
-            <a:r>
-              <a:rPr lang="en-US" sz="1450" b="1" dirty="0">
+            <a:pPr indent="0" marL="0">
+              <a:buNone/>
+            </a:pPr>
+            <a:r>
+              <a:rPr lang="en-US" sz="1350" b="1" dirty="0">
                 <a:solidFill>
                   <a:srgbClr val="12313A"/>
                 </a:solidFill>
@@ -1672,7 +1672,7 @@
               </a:rPr>
               <a:t>Bedside sensors</a:t>
             </a:r>
-            <a:endParaRPr lang="en-US" sz="1450" dirty="0"/>
+            <a:endParaRPr lang="en-US" sz="1350" dirty="0"/>
           </a:p>
         </p:txBody>
       </p:sp>
@@ -1684,24 +1684,24 @@
         </p:nvSpPr>
         <p:spPr>
           <a:xfrm>
-            <a:off x="640080" y="3200400"/>
-            <a:ext cx="1572768" cy="411480"/>
-          </a:xfrm>
-          <a:prstGeom prst="rect">
-            <a:avLst/>
-          </a:prstGeom>
-          <a:noFill/>
-          <a:ln/>
-        </p:spPr>
-        <p:txBody>
-          <a:bodyPr wrap="square" lIns="0" tIns="0" rIns="0" bIns="0" rtlCol="0" anchor="t"/>
-          <a:lstStyle/>
-          <a:p>
-            <a:pPr algn="ctr" indent="0" marL="0">
-              <a:buNone/>
-            </a:pPr>
-            <a:r>
-              <a:rPr lang="en-US" sz="1050" dirty="0">
+            <a:off x="6644488" y="1234440"/>
+            <a:ext cx="1463040" cy="658368"/>
+          </a:xfrm>
+          <a:prstGeom prst="rect">
+            <a:avLst/>
+          </a:prstGeom>
+          <a:noFill/>
+          <a:ln/>
+        </p:spPr>
+        <p:txBody>
+          <a:bodyPr wrap="square" lIns="0" tIns="0" rIns="0" bIns="0" rtlCol="0" anchor="ctr"/>
+          <a:lstStyle/>
+          <a:p>
+            <a:pPr algn="r" indent="0" marL="0">
+              <a:buNone/>
+            </a:pPr>
+            <a:r>
+              <a:rPr lang="en-US" sz="950" dirty="0">
                 <a:solidFill>
                   <a:srgbClr val="5A7178"/>
                 </a:solidFill>
@@ -1711,7 +1711,7 @@
               </a:rPr>
               <a:t>10 streams · 2 patients</a:t>
             </a:r>
-            <a:endParaRPr lang="en-US" sz="1050" dirty="0"/>
+            <a:endParaRPr lang="en-US" sz="950" dirty="0"/>
           </a:p>
         </p:txBody>
       </p:sp>
@@ -1723,8 +1723,8 @@
         </p:nvSpPr>
         <p:spPr>
           <a:xfrm>
-            <a:off x="2231136" y="3154680"/>
-            <a:ext cx="258409" cy="0"/>
+            <a:off x="6095848" y="1892808"/>
+            <a:ext cx="0" cy="219456"/>
           </a:xfrm>
           <a:prstGeom prst="line">
             <a:avLst/>
@@ -1747,18 +1747,18 @@
         </p:nvSpPr>
         <p:spPr>
           <a:xfrm>
-            <a:off x="2507833" y="2468880"/>
-            <a:ext cx="1572768" cy="1371600"/>
+            <a:off x="3992728" y="2112264"/>
+            <a:ext cx="4206240" cy="658368"/>
           </a:xfrm>
           <a:prstGeom prst="roundRect">
             <a:avLst>
-              <a:gd name="adj" fmla="val 6667"/>
+              <a:gd name="adj" fmla="val 11111"/>
             </a:avLst>
           </a:prstGeom>
           <a:solidFill>
             <a:srgbClr val="EEF6F7"/>
           </a:solidFill>
-          <a:ln w="19050">
+          <a:ln w="17780">
             <a:solidFill>
               <a:srgbClr val="4FA5B3"/>
             </a:solidFill>
@@ -1774,8 +1774,8 @@
         </p:nvSpPr>
         <p:spPr>
           <a:xfrm>
-            <a:off x="3202777" y="2633472"/>
-            <a:ext cx="182880" cy="182880"/>
+            <a:off x="4193896" y="2359152"/>
+            <a:ext cx="164592" cy="164592"/>
           </a:xfrm>
           <a:prstGeom prst="ellipse">
             <a:avLst/>
@@ -1794,8 +1794,8 @@
         </p:nvSpPr>
         <p:spPr>
           <a:xfrm>
-            <a:off x="2480401" y="2852928"/>
-            <a:ext cx="1627632" cy="365760"/>
+            <a:off x="4495648" y="2112264"/>
+            <a:ext cx="2194560" cy="658368"/>
           </a:xfrm>
           <a:prstGeom prst="rect">
             <a:avLst/>
@@ -1807,11 +1807,11 @@
           <a:bodyPr wrap="square" lIns="0" tIns="0" rIns="0" bIns="0" rtlCol="0" anchor="ctr"/>
           <a:lstStyle/>
           <a:p>
-            <a:pPr algn="ctr" indent="0" marL="0">
-              <a:buNone/>
-            </a:pPr>
-            <a:r>
-              <a:rPr lang="en-US" sz="1450" b="1" dirty="0">
+            <a:pPr indent="0" marL="0">
+              <a:buNone/>
+            </a:pPr>
+            <a:r>
+              <a:rPr lang="en-US" sz="1350" b="1" dirty="0">
                 <a:solidFill>
                   <a:srgbClr val="12313A"/>
                 </a:solidFill>
@@ -1821,7 +1821,7 @@
               </a:rPr>
               <a:t>Fog gateway</a:t>
             </a:r>
-            <a:endParaRPr lang="en-US" sz="1450" dirty="0"/>
+            <a:endParaRPr lang="en-US" sz="1350" dirty="0"/>
           </a:p>
         </p:txBody>
       </p:sp>
@@ -1833,24 +1833,24 @@
         </p:nvSpPr>
         <p:spPr>
           <a:xfrm>
-            <a:off x="2507833" y="3200400"/>
-            <a:ext cx="1572768" cy="411480"/>
-          </a:xfrm>
-          <a:prstGeom prst="rect">
-            <a:avLst/>
-          </a:prstGeom>
-          <a:noFill/>
-          <a:ln/>
-        </p:spPr>
-        <p:txBody>
-          <a:bodyPr wrap="square" lIns="0" tIns="0" rIns="0" bIns="0" rtlCol="0" anchor="t"/>
-          <a:lstStyle/>
-          <a:p>
-            <a:pPr algn="ctr" indent="0" marL="0">
-              <a:buNone/>
-            </a:pPr>
-            <a:r>
-              <a:rPr lang="en-US" sz="1050" dirty="0">
+            <a:off x="6644488" y="2112264"/>
+            <a:ext cx="1463040" cy="658368"/>
+          </a:xfrm>
+          <a:prstGeom prst="rect">
+            <a:avLst/>
+          </a:prstGeom>
+          <a:noFill/>
+          <a:ln/>
+        </p:spPr>
+        <p:txBody>
+          <a:bodyPr wrap="square" lIns="0" tIns="0" rIns="0" bIns="0" rtlCol="0" anchor="ctr"/>
+          <a:lstStyle/>
+          <a:p>
+            <a:pPr algn="r" indent="0" marL="0">
+              <a:buNone/>
+            </a:pPr>
+            <a:r>
+              <a:rPr lang="en-US" sz="950" dirty="0">
                 <a:solidFill>
                   <a:srgbClr val="5A7178"/>
                 </a:solidFill>
@@ -1860,7 +1860,7 @@
               </a:rPr>
               <a:t>10 s windows · clinical rules</a:t>
             </a:r>
-            <a:endParaRPr lang="en-US" sz="1050" dirty="0"/>
+            <a:endParaRPr lang="en-US" sz="950" dirty="0"/>
           </a:p>
         </p:txBody>
       </p:sp>
@@ -1872,8 +1872,8 @@
         </p:nvSpPr>
         <p:spPr>
           <a:xfrm>
-            <a:off x="4098889" y="3154680"/>
-            <a:ext cx="258409" cy="0"/>
+            <a:off x="6095848" y="2770632"/>
+            <a:ext cx="0" cy="219456"/>
           </a:xfrm>
           <a:prstGeom prst="line">
             <a:avLst/>
@@ -1896,18 +1896,18 @@
         </p:nvSpPr>
         <p:spPr>
           <a:xfrm>
-            <a:off x="4375587" y="2468880"/>
-            <a:ext cx="1572768" cy="1371600"/>
+            <a:off x="3992728" y="2990088"/>
+            <a:ext cx="4206240" cy="658368"/>
           </a:xfrm>
           <a:prstGeom prst="roundRect">
             <a:avLst>
-              <a:gd name="adj" fmla="val 6667"/>
+              <a:gd name="adj" fmla="val 11111"/>
             </a:avLst>
           </a:prstGeom>
           <a:solidFill>
             <a:srgbClr val="EEF6F7"/>
           </a:solidFill>
-          <a:ln w="19050">
+          <a:ln w="17780">
             <a:solidFill>
               <a:srgbClr val="0F6E7E"/>
             </a:solidFill>
@@ -1923,8 +1923,8 @@
         </p:nvSpPr>
         <p:spPr>
           <a:xfrm>
-            <a:off x="5070531" y="2633472"/>
-            <a:ext cx="182880" cy="182880"/>
+            <a:off x="4193896" y="3236976"/>
+            <a:ext cx="164592" cy="164592"/>
           </a:xfrm>
           <a:prstGeom prst="ellipse">
             <a:avLst/>
@@ -1943,8 +1943,8 @@
         </p:nvSpPr>
         <p:spPr>
           <a:xfrm>
-            <a:off x="4348155" y="2852928"/>
-            <a:ext cx="1627632" cy="365760"/>
+            <a:off x="4495648" y="2990088"/>
+            <a:ext cx="2194560" cy="658368"/>
           </a:xfrm>
           <a:prstGeom prst="rect">
             <a:avLst/>
@@ -1956,11 +1956,11 @@
           <a:bodyPr wrap="square" lIns="0" tIns="0" rIns="0" bIns="0" rtlCol="0" anchor="ctr"/>
           <a:lstStyle/>
           <a:p>
-            <a:pPr algn="ctr" indent="0" marL="0">
-              <a:buNone/>
-            </a:pPr>
-            <a:r>
-              <a:rPr lang="en-US" sz="1450" b="1" dirty="0">
+            <a:pPr indent="0" marL="0">
+              <a:buNone/>
+            </a:pPr>
+            <a:r>
+              <a:rPr lang="en-US" sz="1350" b="1" dirty="0">
                 <a:solidFill>
                   <a:srgbClr val="12313A"/>
                 </a:solidFill>
@@ -1970,7 +1970,7 @@
               </a:rPr>
               <a:t>Amazon SQS</a:t>
             </a:r>
-            <a:endParaRPr lang="en-US" sz="1450" dirty="0"/>
+            <a:endParaRPr lang="en-US" sz="1350" dirty="0"/>
           </a:p>
         </p:txBody>
       </p:sp>
@@ -1982,24 +1982,24 @@
         </p:nvSpPr>
         <p:spPr>
           <a:xfrm>
-            <a:off x="4375587" y="3200400"/>
-            <a:ext cx="1572768" cy="411480"/>
-          </a:xfrm>
-          <a:prstGeom prst="rect">
-            <a:avLst/>
-          </a:prstGeom>
-          <a:noFill/>
-          <a:ln/>
-        </p:spPr>
-        <p:txBody>
-          <a:bodyPr wrap="square" lIns="0" tIns="0" rIns="0" bIns="0" rtlCol="0" anchor="t"/>
-          <a:lstStyle/>
-          <a:p>
-            <a:pPr algn="ctr" indent="0" marL="0">
-              <a:buNone/>
-            </a:pPr>
-            <a:r>
-              <a:rPr lang="en-US" sz="1050" dirty="0">
+            <a:off x="6644488" y="2990088"/>
+            <a:ext cx="1463040" cy="658368"/>
+          </a:xfrm>
+          <a:prstGeom prst="rect">
+            <a:avLst/>
+          </a:prstGeom>
+          <a:noFill/>
+          <a:ln/>
+        </p:spPr>
+        <p:txBody>
+          <a:bodyPr wrap="square" lIns="0" tIns="0" rIns="0" bIns="0" rtlCol="0" anchor="ctr"/>
+          <a:lstStyle/>
+          <a:p>
+            <a:pPr algn="r" indent="0" marL="0">
+              <a:buNone/>
+            </a:pPr>
+            <a:r>
+              <a:rPr lang="en-US" sz="950" dirty="0">
                 <a:solidFill>
                   <a:srgbClr val="5A7178"/>
                 </a:solidFill>
@@ -2009,7 +2009,7 @@
               </a:rPr>
               <a:t>batched aggregates</a:t>
             </a:r>
-            <a:endParaRPr lang="en-US" sz="1050" dirty="0"/>
+            <a:endParaRPr lang="en-US" sz="950" dirty="0"/>
           </a:p>
         </p:txBody>
       </p:sp>
@@ -2021,8 +2021,8 @@
         </p:nvSpPr>
         <p:spPr>
           <a:xfrm>
-            <a:off x="5966643" y="3154680"/>
-            <a:ext cx="258409" cy="0"/>
+            <a:off x="6095848" y="3648456"/>
+            <a:ext cx="0" cy="219456"/>
           </a:xfrm>
           <a:prstGeom prst="line">
             <a:avLst/>
@@ -2045,18 +2045,18 @@
         </p:nvSpPr>
         <p:spPr>
           <a:xfrm>
-            <a:off x="6243340" y="2468880"/>
-            <a:ext cx="1572768" cy="1371600"/>
+            <a:off x="3992728" y="3867912"/>
+            <a:ext cx="4206240" cy="658368"/>
           </a:xfrm>
           <a:prstGeom prst="roundRect">
             <a:avLst>
-              <a:gd name="adj" fmla="val 6667"/>
+              <a:gd name="adj" fmla="val 11111"/>
             </a:avLst>
           </a:prstGeom>
           <a:solidFill>
             <a:srgbClr val="EEF6F7"/>
           </a:solidFill>
-          <a:ln w="19050">
+          <a:ln w="17780">
             <a:solidFill>
               <a:srgbClr val="0F6E7E"/>
             </a:solidFill>
@@ -2072,8 +2072,8 @@
         </p:nvSpPr>
         <p:spPr>
           <a:xfrm>
-            <a:off x="6938284" y="2633472"/>
-            <a:ext cx="182880" cy="182880"/>
+            <a:off x="4193896" y="4114800"/>
+            <a:ext cx="164592" cy="164592"/>
           </a:xfrm>
           <a:prstGeom prst="ellipse">
             <a:avLst/>
@@ -2092,8 +2092,8 @@
         </p:nvSpPr>
         <p:spPr>
           <a:xfrm>
-            <a:off x="6215908" y="2852928"/>
-            <a:ext cx="1627632" cy="365760"/>
+            <a:off x="4495648" y="3867912"/>
+            <a:ext cx="2194560" cy="658368"/>
           </a:xfrm>
           <a:prstGeom prst="rect">
             <a:avLst/>
@@ -2105,11 +2105,11 @@
           <a:bodyPr wrap="square" lIns="0" tIns="0" rIns="0" bIns="0" rtlCol="0" anchor="ctr"/>
           <a:lstStyle/>
           <a:p>
-            <a:pPr algn="ctr" indent="0" marL="0">
-              <a:buNone/>
-            </a:pPr>
-            <a:r>
-              <a:rPr lang="en-US" sz="1450" b="1" dirty="0">
+            <a:pPr indent="0" marL="0">
+              <a:buNone/>
+            </a:pPr>
+            <a:r>
+              <a:rPr lang="en-US" sz="1350" b="1" dirty="0">
                 <a:solidFill>
                   <a:srgbClr val="12313A"/>
                 </a:solidFill>
@@ -2119,7 +2119,7 @@
               </a:rPr>
               <a:t>AWS Lambda</a:t>
             </a:r>
-            <a:endParaRPr lang="en-US" sz="1450" dirty="0"/>
+            <a:endParaRPr lang="en-US" sz="1350" dirty="0"/>
           </a:p>
         </p:txBody>
       </p:sp>
@@ -2131,24 +2131,24 @@
         </p:nvSpPr>
         <p:spPr>
           <a:xfrm>
-            <a:off x="6243340" y="3200400"/>
-            <a:ext cx="1572768" cy="411480"/>
-          </a:xfrm>
-          <a:prstGeom prst="rect">
-            <a:avLst/>
-          </a:prstGeom>
-          <a:noFill/>
-          <a:ln/>
-        </p:spPr>
-        <p:txBody>
-          <a:bodyPr wrap="square" lIns="0" tIns="0" rIns="0" bIns="0" rtlCol="0" anchor="t"/>
-          <a:lstStyle/>
-          <a:p>
-            <a:pPr algn="ctr" indent="0" marL="0">
-              <a:buNone/>
-            </a:pPr>
-            <a:r>
-              <a:rPr lang="en-US" sz="1050" dirty="0">
+            <a:off x="6644488" y="3867912"/>
+            <a:ext cx="1463040" cy="658368"/>
+          </a:xfrm>
+          <a:prstGeom prst="rect">
+            <a:avLst/>
+          </a:prstGeom>
+          <a:noFill/>
+          <a:ln/>
+        </p:spPr>
+        <p:txBody>
+          <a:bodyPr wrap="square" lIns="0" tIns="0" rIns="0" bIns="0" rtlCol="0" anchor="ctr"/>
+          <a:lstStyle/>
+          <a:p>
+            <a:pPr algn="r" indent="0" marL="0">
+              <a:buNone/>
+            </a:pPr>
+            <a:r>
+              <a:rPr lang="en-US" sz="950" dirty="0">
                 <a:solidFill>
                   <a:srgbClr val="5A7178"/>
                 </a:solidFill>
@@ -2158,7 +2158,7 @@
               </a:rPr>
               <a:t>nodejs20 ingest</a:t>
             </a:r>
-            <a:endParaRPr lang="en-US" sz="1050" dirty="0"/>
+            <a:endParaRPr lang="en-US" sz="950" dirty="0"/>
           </a:p>
         </p:txBody>
       </p:sp>
@@ -2170,8 +2170,8 @@
         </p:nvSpPr>
         <p:spPr>
           <a:xfrm>
-            <a:off x="7834396" y="3154680"/>
-            <a:ext cx="258409" cy="0"/>
+            <a:off x="6095848" y="4526280"/>
+            <a:ext cx="0" cy="219456"/>
           </a:xfrm>
           <a:prstGeom prst="line">
             <a:avLst/>
@@ -2194,18 +2194,18 @@
         </p:nvSpPr>
         <p:spPr>
           <a:xfrm>
-            <a:off x="8111094" y="2468880"/>
-            <a:ext cx="1572768" cy="1371600"/>
+            <a:off x="3992728" y="4745736"/>
+            <a:ext cx="4206240" cy="658368"/>
           </a:xfrm>
           <a:prstGeom prst="roundRect">
             <a:avLst>
-              <a:gd name="adj" fmla="val 6667"/>
+              <a:gd name="adj" fmla="val 11111"/>
             </a:avLst>
           </a:prstGeom>
           <a:solidFill>
             <a:srgbClr val="EEF6F7"/>
           </a:solidFill>
-          <a:ln w="19050">
+          <a:ln w="17780">
             <a:solidFill>
               <a:srgbClr val="0F6E7E"/>
             </a:solidFill>
@@ -2221,8 +2221,8 @@
         </p:nvSpPr>
         <p:spPr>
           <a:xfrm>
-            <a:off x="8806038" y="2633472"/>
-            <a:ext cx="182880" cy="182880"/>
+            <a:off x="4193896" y="4992624"/>
+            <a:ext cx="164592" cy="164592"/>
           </a:xfrm>
           <a:prstGeom prst="ellipse">
             <a:avLst/>
@@ -2241,8 +2241,8 @@
         </p:nvSpPr>
         <p:spPr>
           <a:xfrm>
-            <a:off x="8083662" y="2852928"/>
-            <a:ext cx="1627632" cy="365760"/>
+            <a:off x="4495648" y="4745736"/>
+            <a:ext cx="2194560" cy="658368"/>
           </a:xfrm>
           <a:prstGeom prst="rect">
             <a:avLst/>
@@ -2254,11 +2254,11 @@
           <a:bodyPr wrap="square" lIns="0" tIns="0" rIns="0" bIns="0" rtlCol="0" anchor="ctr"/>
           <a:lstStyle/>
           <a:p>
-            <a:pPr algn="ctr" indent="0" marL="0">
-              <a:buNone/>
-            </a:pPr>
-            <a:r>
-              <a:rPr lang="en-US" sz="1450" b="1" dirty="0">
+            <a:pPr indent="0" marL="0">
+              <a:buNone/>
+            </a:pPr>
+            <a:r>
+              <a:rPr lang="en-US" sz="1350" b="1" dirty="0">
                 <a:solidFill>
                   <a:srgbClr val="12313A"/>
                 </a:solidFill>
@@ -2268,7 +2268,7 @@
               </a:rPr>
               <a:t>DynamoDB</a:t>
             </a:r>
-            <a:endParaRPr lang="en-US" sz="1450" dirty="0"/>
+            <a:endParaRPr lang="en-US" sz="1350" dirty="0"/>
           </a:p>
         </p:txBody>
       </p:sp>
@@ -2280,24 +2280,24 @@
         </p:nvSpPr>
         <p:spPr>
           <a:xfrm>
-            <a:off x="8111094" y="3200400"/>
-            <a:ext cx="1572768" cy="411480"/>
-          </a:xfrm>
-          <a:prstGeom prst="rect">
-            <a:avLst/>
-          </a:prstGeom>
-          <a:noFill/>
-          <a:ln/>
-        </p:spPr>
-        <p:txBody>
-          <a:bodyPr wrap="square" lIns="0" tIns="0" rIns="0" bIns="0" rtlCol="0" anchor="t"/>
-          <a:lstStyle/>
-          <a:p>
-            <a:pPr algn="ctr" indent="0" marL="0">
-              <a:buNone/>
-            </a:pPr>
-            <a:r>
-              <a:rPr lang="en-US" sz="1050" dirty="0">
+            <a:off x="6644488" y="4745736"/>
+            <a:ext cx="1463040" cy="658368"/>
+          </a:xfrm>
+          <a:prstGeom prst="rect">
+            <a:avLst/>
+          </a:prstGeom>
+          <a:noFill/>
+          <a:ln/>
+        </p:spPr>
+        <p:txBody>
+          <a:bodyPr wrap="square" lIns="0" tIns="0" rIns="0" bIns="0" rtlCol="0" anchor="ctr"/>
+          <a:lstStyle/>
+          <a:p>
+            <a:pPr algn="r" indent="0" marL="0">
+              <a:buNone/>
+            </a:pPr>
+            <a:r>
+              <a:rPr lang="en-US" sz="950" dirty="0">
                 <a:solidFill>
                   <a:srgbClr val="5A7178"/>
                 </a:solidFill>
@@ -2307,7 +2307,7 @@
               </a:rPr>
               <a:t>windowed records</a:t>
             </a:r>
-            <a:endParaRPr lang="en-US" sz="1050" dirty="0"/>
+            <a:endParaRPr lang="en-US" sz="950" dirty="0"/>
           </a:p>
         </p:txBody>
       </p:sp>
@@ -2319,8 +2319,8 @@
         </p:nvSpPr>
         <p:spPr>
           <a:xfrm>
-            <a:off x="9702150" y="3154680"/>
-            <a:ext cx="258409" cy="0"/>
+            <a:off x="6095848" y="5404104"/>
+            <a:ext cx="0" cy="219456"/>
           </a:xfrm>
           <a:prstGeom prst="line">
             <a:avLst/>
@@ -2343,18 +2343,18 @@
         </p:nvSpPr>
         <p:spPr>
           <a:xfrm>
-            <a:off x="9978847" y="2468880"/>
-            <a:ext cx="1572768" cy="1371600"/>
+            <a:off x="3992728" y="5623560"/>
+            <a:ext cx="4206240" cy="658368"/>
           </a:xfrm>
           <a:prstGeom prst="roundRect">
             <a:avLst>
-              <a:gd name="adj" fmla="val 6667"/>
+              <a:gd name="adj" fmla="val 11111"/>
             </a:avLst>
           </a:prstGeom>
           <a:solidFill>
             <a:srgbClr val="EEF6F7"/>
           </a:solidFill>
-          <a:ln w="19050">
+          <a:ln w="17780">
             <a:solidFill>
               <a:srgbClr val="2A8FA3"/>
             </a:solidFill>
@@ -2370,8 +2370,8 @@
         </p:nvSpPr>
         <p:spPr>
           <a:xfrm>
-            <a:off x="10673791" y="2633472"/>
-            <a:ext cx="182880" cy="182880"/>
+            <a:off x="4193896" y="5870448"/>
+            <a:ext cx="164592" cy="164592"/>
           </a:xfrm>
           <a:prstGeom prst="ellipse">
             <a:avLst/>
@@ -2390,8 +2390,8 @@
         </p:nvSpPr>
         <p:spPr>
           <a:xfrm>
-            <a:off x="9951415" y="2852928"/>
-            <a:ext cx="1627632" cy="365760"/>
+            <a:off x="4495648" y="5623560"/>
+            <a:ext cx="2194560" cy="658368"/>
           </a:xfrm>
           <a:prstGeom prst="rect">
             <a:avLst/>
@@ -2403,11 +2403,11 @@
           <a:bodyPr wrap="square" lIns="0" tIns="0" rIns="0" bIns="0" rtlCol="0" anchor="ctr"/>
           <a:lstStyle/>
           <a:p>
-            <a:pPr algn="ctr" indent="0" marL="0">
-              <a:buNone/>
-            </a:pPr>
-            <a:r>
-              <a:rPr lang="en-US" sz="1450" b="1" dirty="0">
+            <a:pPr indent="0" marL="0">
+              <a:buNone/>
+            </a:pPr>
+            <a:r>
+              <a:rPr lang="en-US" sz="1350" b="1" dirty="0">
                 <a:solidFill>
                   <a:srgbClr val="12313A"/>
                 </a:solidFill>
@@ -2417,7 +2417,7 @@
               </a:rPr>
               <a:t>API GW + S3</a:t>
             </a:r>
-            <a:endParaRPr lang="en-US" sz="1450" dirty="0"/>
+            <a:endParaRPr lang="en-US" sz="1350" dirty="0"/>
           </a:p>
         </p:txBody>
       </p:sp>
@@ -2429,24 +2429,24 @@
         </p:nvSpPr>
         <p:spPr>
           <a:xfrm>
-            <a:off x="9978847" y="3200400"/>
-            <a:ext cx="1572768" cy="411480"/>
-          </a:xfrm>
-          <a:prstGeom prst="rect">
-            <a:avLst/>
-          </a:prstGeom>
-          <a:noFill/>
-          <a:ln/>
-        </p:spPr>
-        <p:txBody>
-          <a:bodyPr wrap="square" lIns="0" tIns="0" rIns="0" bIns="0" rtlCol="0" anchor="t"/>
-          <a:lstStyle/>
-          <a:p>
-            <a:pPr algn="ctr" indent="0" marL="0">
-              <a:buNone/>
-            </a:pPr>
-            <a:r>
-              <a:rPr lang="en-US" sz="1050" dirty="0">
+            <a:off x="6644488" y="5623560"/>
+            <a:ext cx="1463040" cy="658368"/>
+          </a:xfrm>
+          <a:prstGeom prst="rect">
+            <a:avLst/>
+          </a:prstGeom>
+          <a:noFill/>
+          <a:ln/>
+        </p:spPr>
+        <p:txBody>
+          <a:bodyPr wrap="square" lIns="0" tIns="0" rIns="0" bIns="0" rtlCol="0" anchor="ctr"/>
+          <a:lstStyle/>
+          <a:p>
+            <a:pPr algn="r" indent="0" marL="0">
+              <a:buNone/>
+            </a:pPr>
+            <a:r>
+              <a:rPr lang="en-US" sz="950" dirty="0">
                 <a:solidFill>
                   <a:srgbClr val="5A7178"/>
                 </a:solidFill>
@@ -2456,7 +2456,7 @@
               </a:rPr>
               <a:t>ward dashboard</a:t>
             </a:r>
-            <a:endParaRPr lang="en-US" sz="1050" dirty="0"/>
+            <a:endParaRPr lang="en-US" sz="950" dirty="0"/>
           </a:p>
         </p:txBody>
       </p:sp>
@@ -2468,8 +2468,8 @@
         </p:nvSpPr>
         <p:spPr>
           <a:xfrm>
-            <a:off x="640080" y="3977640"/>
-            <a:ext cx="3440521" cy="274320"/>
+            <a:off x="2438248" y="1234440"/>
+            <a:ext cx="1371600" cy="365760"/>
           </a:xfrm>
           <a:prstGeom prst="rect">
             <a:avLst/>
@@ -2481,7 +2481,7 @@
           <a:bodyPr wrap="square" rtlCol="0" anchor="ctr"/>
           <a:lstStyle/>
           <a:p>
-            <a:pPr algn="ctr" indent="0" marL="0">
+            <a:pPr algn="r" indent="0" marL="0">
               <a:buNone/>
             </a:pPr>
             <a:r>
@@ -2507,8 +2507,8 @@
         </p:nvSpPr>
         <p:spPr>
           <a:xfrm>
-            <a:off x="4375587" y="3977640"/>
-            <a:ext cx="7176028" cy="274320"/>
+            <a:off x="2438248" y="2990088"/>
+            <a:ext cx="1371600" cy="365760"/>
           </a:xfrm>
           <a:prstGeom prst="rect">
             <a:avLst/>
@@ -2520,7 +2520,7 @@
           <a:bodyPr wrap="square" rtlCol="0" anchor="ctr"/>
           <a:lstStyle/>
           <a:p>
-            <a:pPr algn="ctr" indent="0" marL="0">
+            <a:pPr algn="r" indent="0" marL="0">
               <a:buNone/>
             </a:pPr>
             <a:r>
@@ -2546,8 +2546,8 @@
         </p:nvSpPr>
         <p:spPr>
           <a:xfrm>
-            <a:off x="640080" y="5257800"/>
-            <a:ext cx="10972800" cy="731520"/>
+            <a:off x="8656168" y="2743200"/>
+            <a:ext cx="3291840" cy="2194560"/>
           </a:xfrm>
           <a:prstGeom prst="rect">
             <a:avLst/>
@@ -2559,7 +2559,7 @@
           <a:bodyPr wrap="square" rtlCol="0" anchor="ctr"/>
           <a:lstStyle/>
           <a:p>
-            <a:pPr algn="ctr" indent="0" marL="0">
+            <a:pPr indent="0" marL="0">
               <a:buNone/>
             </a:pPr>
             <a:r>
@@ -3216,12 +3216,12 @@
         </p:nvSpPr>
         <p:spPr>
           <a:xfrm>
-            <a:off x="640080" y="1874520"/>
-            <a:ext cx="4937760" cy="4160520"/>
+            <a:off x="731520" y="1920240"/>
+            <a:ext cx="10698480" cy="1965960"/>
           </a:xfrm>
           <a:prstGeom prst="roundRect">
             <a:avLst>
-              <a:gd name="adj" fmla="val 2198"/>
+              <a:gd name="adj" fmla="val 4651"/>
             </a:avLst>
           </a:prstGeom>
           <a:solidFill>
@@ -3243,7 +3243,7 @@
         </p:nvSpPr>
         <p:spPr>
           <a:xfrm>
-            <a:off x="960120" y="2103120"/>
+            <a:off x="1005840" y="2103120"/>
             <a:ext cx="3657600" cy="457200"/>
           </a:xfrm>
           <a:prstGeom prst="rect">
@@ -3282,8 +3282,8 @@
         </p:nvSpPr>
         <p:spPr>
           <a:xfrm>
-            <a:off x="960120" y="2651760"/>
-            <a:ext cx="4343400" cy="3200400"/>
+            <a:off x="1005840" y="2578608"/>
+            <a:ext cx="9966960" cy="1188720"/>
           </a:xfrm>
           <a:prstGeom prst="rect">
             <a:avLst/>
@@ -3297,12 +3297,12 @@
           <a:p>
             <a:pPr indent="0" marL="0">
               <a:lnSpc>
-                <a:spcPct val="112000"/>
+                <a:spcPct val="105000"/>
               </a:lnSpc>
               <a:buNone/>
             </a:pPr>
             <a:r>
-              <a:rPr lang="en-US" sz="1350" dirty="0">
+              <a:rPr lang="en-US" sz="1300" dirty="0">
                 <a:solidFill>
                   <a:srgbClr val="12313A"/>
                 </a:solidFill>
@@ -3312,7 +3312,7 @@
               </a:rPr>
               <a:t>The fog gateway's queue publisher shipped with the emulator's fake access keys hard-coded into every connection. Locally everything worked — the emulator accepts any credentials, so all 41 tests and the end-to-end check stayed green — but on real AWS every send would be rejected the moment it deployed.</a:t>
             </a:r>
-            <a:endParaRPr lang="en-US" sz="1350" dirty="0"/>
+            <a:endParaRPr lang="en-US" sz="1300" dirty="0"/>
           </a:p>
         </p:txBody>
       </p:sp>
@@ -3324,12 +3324,12 @@
         </p:nvSpPr>
         <p:spPr>
           <a:xfrm>
-            <a:off x="6611112" y="1874520"/>
-            <a:ext cx="4937760" cy="4160520"/>
+            <a:off x="731520" y="4041648"/>
+            <a:ext cx="10698480" cy="1965960"/>
           </a:xfrm>
           <a:prstGeom prst="roundRect">
             <a:avLst>
-              <a:gd name="adj" fmla="val 2198"/>
+              <a:gd name="adj" fmla="val 4651"/>
             </a:avLst>
           </a:prstGeom>
           <a:solidFill>
@@ -3351,7 +3351,7 @@
         </p:nvSpPr>
         <p:spPr>
           <a:xfrm>
-            <a:off x="6931152" y="2103120"/>
+            <a:off x="1005840" y="4224528"/>
             <a:ext cx="3657600" cy="457200"/>
           </a:xfrm>
           <a:prstGeom prst="rect">
@@ -3390,8 +3390,8 @@
         </p:nvSpPr>
         <p:spPr>
           <a:xfrm>
-            <a:off x="6931152" y="2651760"/>
-            <a:ext cx="4343400" cy="3200400"/>
+            <a:off x="1005840" y="4700016"/>
+            <a:ext cx="9966960" cy="1188720"/>
           </a:xfrm>
           <a:prstGeom prst="rect">
             <a:avLst/>
@@ -3405,12 +3405,12 @@
           <a:p>
             <a:pPr indent="0" marL="0">
               <a:lnSpc>
-                <a:spcPct val="112000"/>
+                <a:spcPct val="105000"/>
               </a:lnSpc>
               <a:buNone/>
             </a:pPr>
             <a:r>
-              <a:rPr lang="en-US" sz="1350" dirty="0">
+              <a:rPr lang="en-US" sz="1300" dirty="0">
                 <a:solidFill>
                   <a:srgbClr val="12313A"/>
                 </a:solidFill>
@@ -3420,29 +3420,9 @@
               </a:rPr>
               <a:t>Fake keys are now attached only when an emulator endpoint is configured; on real AWS the SDK falls back to its own identity chain. A cloud-readiness audit caught two more emulator-only assumptions the same way, and new regression tests lock all three fixes in.</a:t>
             </a:r>
-            <a:endParaRPr lang="en-US" sz="1350" dirty="0"/>
-          </a:p>
-        </p:txBody>
-      </p:sp>
-      <p:sp>
-        <p:nvSpPr>
-          <p:cNvPr id="9" name="Shape 7"/>
-          <p:cNvSpPr/>
-          <p:nvPr/>
-        </p:nvSpPr>
-        <p:spPr>
-          <a:xfrm>
-            <a:off x="5669280" y="3703320"/>
-            <a:ext cx="841248" cy="512064"/>
-          </a:xfrm>
-          <a:prstGeom prst="rightArrow">
-            <a:avLst/>
-          </a:prstGeom>
-          <a:solidFill>
-            <a:srgbClr val="0F6E7E"/>
-          </a:solidFill>
-          <a:ln/>
-        </p:spPr>
+            <a:endParaRPr lang="en-US" sz="1300" dirty="0"/>
+          </a:p>
+        </p:txBody>
       </p:sp>
     </p:spTree>
   </p:cSld>

--- a/ppt/SriVenkatBora_X25164414_patient-vitals-monitoring.pptx
+++ b/ppt/SriVenkatBora_X25164414_patient-vitals-monitoring.pptx
@@ -2695,8 +2695,35 @@
         </p:nvSpPr>
         <p:spPr>
           <a:xfrm>
-            <a:off x="731520" y="1965960"/>
-            <a:ext cx="685800" cy="685800"/>
+            <a:off x="640080" y="1874520"/>
+            <a:ext cx="3502152" cy="3977640"/>
+          </a:xfrm>
+          <a:prstGeom prst="roundRect">
+            <a:avLst>
+              <a:gd name="adj" fmla="val 2611"/>
+            </a:avLst>
+          </a:prstGeom>
+          <a:solidFill>
+            <a:srgbClr val="EEF6F7"/>
+          </a:solidFill>
+          <a:ln w="15240">
+            <a:solidFill>
+              <a:srgbClr val="2A8FA3"/>
+            </a:solidFill>
+            <a:prstDash val="solid"/>
+          </a:ln>
+        </p:spPr>
+      </p:sp>
+      <p:sp>
+        <p:nvSpPr>
+          <p:cNvPr id="5" name="Shape 3"/>
+          <p:cNvSpPr/>
+          <p:nvPr/>
+        </p:nvSpPr>
+        <p:spPr>
+          <a:xfrm>
+            <a:off x="914400" y="2148840"/>
+            <a:ext cx="603504" cy="603504"/>
           </a:xfrm>
           <a:prstGeom prst="ellipse">
             <a:avLst/>
@@ -2709,14 +2736,14 @@
       </p:sp>
       <p:sp>
         <p:nvSpPr>
-          <p:cNvPr id="5" name="Text 3"/>
-          <p:cNvSpPr/>
-          <p:nvPr/>
-        </p:nvSpPr>
-        <p:spPr>
-          <a:xfrm>
-            <a:off x="731520" y="1965960"/>
-            <a:ext cx="685800" cy="685800"/>
+          <p:cNvPr id="6" name="Text 4"/>
+          <p:cNvSpPr/>
+          <p:nvPr/>
+        </p:nvSpPr>
+        <p:spPr>
+          <a:xfrm>
+            <a:off x="914400" y="2148840"/>
+            <a:ext cx="603504" cy="603504"/>
           </a:xfrm>
           <a:prstGeom prst="rect">
             <a:avLst/>
@@ -2732,7 +2759,7 @@
               <a:buNone/>
             </a:pPr>
             <a:r>
-              <a:rPr lang="en-US" sz="2600" b="1" dirty="0">
+              <a:rPr lang="en-US" sz="2200" b="1" dirty="0">
                 <a:solidFill>
                   <a:srgbClr val="FFFFFF"/>
                 </a:solidFill>
@@ -2742,20 +2769,20 @@
               </a:rPr>
               <a:t>1</a:t>
             </a:r>
-            <a:endParaRPr lang="en-US" sz="2600" dirty="0"/>
-          </a:p>
-        </p:txBody>
-      </p:sp>
-      <p:sp>
-        <p:nvSpPr>
-          <p:cNvPr id="6" name="Text 4"/>
-          <p:cNvSpPr/>
-          <p:nvPr/>
-        </p:nvSpPr>
-        <p:spPr>
-          <a:xfrm>
-            <a:off x="1691640" y="1920240"/>
-            <a:ext cx="9875520" cy="411480"/>
+            <a:endParaRPr lang="en-US" sz="2200" dirty="0"/>
+          </a:p>
+        </p:txBody>
+      </p:sp>
+      <p:sp>
+        <p:nvSpPr>
+          <p:cNvPr id="7" name="Text 5"/>
+          <p:cNvSpPr/>
+          <p:nvPr/>
+        </p:nvSpPr>
+        <p:spPr>
+          <a:xfrm>
+            <a:off x="914400" y="2898648"/>
+            <a:ext cx="2953512" cy="777240"/>
           </a:xfrm>
           <a:prstGeom prst="rect">
             <a:avLst/>
@@ -2771,7 +2798,7 @@
               <a:buNone/>
             </a:pPr>
             <a:r>
-              <a:rPr lang="en-US" sz="1800" b="1" dirty="0">
+              <a:rPr lang="en-US" sz="1600" b="1" dirty="0">
                 <a:solidFill>
                   <a:srgbClr val="12313A"/>
                 </a:solidFill>
@@ -2781,20 +2808,20 @@
               </a:rPr>
               <a:t>Two patients, five vitals live</a:t>
             </a:r>
-            <a:endParaRPr lang="en-US" sz="1800" dirty="0"/>
-          </a:p>
-        </p:txBody>
-      </p:sp>
-      <p:sp>
-        <p:nvSpPr>
-          <p:cNvPr id="7" name="Text 5"/>
-          <p:cNvSpPr/>
-          <p:nvPr/>
-        </p:nvSpPr>
-        <p:spPr>
-          <a:xfrm>
-            <a:off x="1691640" y="2340864"/>
-            <a:ext cx="9875520" cy="640080"/>
+            <a:endParaRPr lang="en-US" sz="1600" dirty="0"/>
+          </a:p>
+        </p:txBody>
+      </p:sp>
+      <p:sp>
+        <p:nvSpPr>
+          <p:cNvPr id="8" name="Text 6"/>
+          <p:cNvSpPr/>
+          <p:nvPr/>
+        </p:nvSpPr>
+        <p:spPr>
+          <a:xfrm>
+            <a:off x="914400" y="3657600"/>
+            <a:ext cx="2953512" cy="2011680"/>
           </a:xfrm>
           <a:prstGeom prst="rect">
             <a:avLst/>
@@ -2807,10 +2834,13 @@
           <a:lstStyle/>
           <a:p>
             <a:pPr indent="0" marL="0">
-              <a:buNone/>
-            </a:pPr>
-            <a:r>
-              <a:rPr lang="en-US" sz="1350" dirty="0">
+              <a:lnSpc>
+                <a:spcPct val="106000"/>
+              </a:lnSpc>
+              <a:buNone/>
+            </a:pPr>
+            <a:r>
+              <a:rPr lang="en-US" sz="1250" dirty="0">
                 <a:solidFill>
                   <a:srgbClr val="5A7178"/>
                 </a:solidFill>
@@ -2820,20 +2850,47 @@
               </a:rPr>
               <a:t>Heart rate, SpO2, respiration, temperature and blood pressure streaming for both beds, each checked against its clinical limit as it lands.</a:t>
             </a:r>
-            <a:endParaRPr lang="en-US" sz="1350" dirty="0"/>
-          </a:p>
-        </p:txBody>
-      </p:sp>
-      <p:sp>
-        <p:nvSpPr>
-          <p:cNvPr id="8" name="Shape 6"/>
-          <p:cNvSpPr/>
-          <p:nvPr/>
-        </p:nvSpPr>
-        <p:spPr>
-          <a:xfrm>
-            <a:off x="731520" y="3383280"/>
-            <a:ext cx="685800" cy="685800"/>
+            <a:endParaRPr lang="en-US" sz="1250" dirty="0"/>
+          </a:p>
+        </p:txBody>
+      </p:sp>
+      <p:sp>
+        <p:nvSpPr>
+          <p:cNvPr id="9" name="Shape 7"/>
+          <p:cNvSpPr/>
+          <p:nvPr/>
+        </p:nvSpPr>
+        <p:spPr>
+          <a:xfrm>
+            <a:off x="4416552" y="1874520"/>
+            <a:ext cx="3502152" cy="3977640"/>
+          </a:xfrm>
+          <a:prstGeom prst="roundRect">
+            <a:avLst>
+              <a:gd name="adj" fmla="val 2611"/>
+            </a:avLst>
+          </a:prstGeom>
+          <a:solidFill>
+            <a:srgbClr val="EEF6F7"/>
+          </a:solidFill>
+          <a:ln w="15240">
+            <a:solidFill>
+              <a:srgbClr val="2A8FA3"/>
+            </a:solidFill>
+            <a:prstDash val="solid"/>
+          </a:ln>
+        </p:spPr>
+      </p:sp>
+      <p:sp>
+        <p:nvSpPr>
+          <p:cNvPr id="10" name="Shape 8"/>
+          <p:cNvSpPr/>
+          <p:nvPr/>
+        </p:nvSpPr>
+        <p:spPr>
+          <a:xfrm>
+            <a:off x="4690872" y="2148840"/>
+            <a:ext cx="603504" cy="603504"/>
           </a:xfrm>
           <a:prstGeom prst="ellipse">
             <a:avLst/>
@@ -2846,14 +2903,14 @@
       </p:sp>
       <p:sp>
         <p:nvSpPr>
-          <p:cNvPr id="9" name="Text 7"/>
-          <p:cNvSpPr/>
-          <p:nvPr/>
-        </p:nvSpPr>
-        <p:spPr>
-          <a:xfrm>
-            <a:off x="731520" y="3383280"/>
-            <a:ext cx="685800" cy="685800"/>
+          <p:cNvPr id="11" name="Text 9"/>
+          <p:cNvSpPr/>
+          <p:nvPr/>
+        </p:nvSpPr>
+        <p:spPr>
+          <a:xfrm>
+            <a:off x="4690872" y="2148840"/>
+            <a:ext cx="603504" cy="603504"/>
           </a:xfrm>
           <a:prstGeom prst="rect">
             <a:avLst/>
@@ -2869,7 +2926,7 @@
               <a:buNone/>
             </a:pPr>
             <a:r>
-              <a:rPr lang="en-US" sz="2600" b="1" dirty="0">
+              <a:rPr lang="en-US" sz="2200" b="1" dirty="0">
                 <a:solidFill>
                   <a:srgbClr val="FFFFFF"/>
                 </a:solidFill>
@@ -2879,20 +2936,20 @@
               </a:rPr>
               <a:t>2</a:t>
             </a:r>
-            <a:endParaRPr lang="en-US" sz="2600" dirty="0"/>
-          </a:p>
-        </p:txBody>
-      </p:sp>
-      <p:sp>
-        <p:nvSpPr>
-          <p:cNvPr id="10" name="Text 8"/>
-          <p:cNvSpPr/>
-          <p:nvPr/>
-        </p:nvSpPr>
-        <p:spPr>
-          <a:xfrm>
-            <a:off x="1691640" y="3337560"/>
-            <a:ext cx="9875520" cy="411480"/>
+            <a:endParaRPr lang="en-US" sz="2200" dirty="0"/>
+          </a:p>
+        </p:txBody>
+      </p:sp>
+      <p:sp>
+        <p:nvSpPr>
+          <p:cNvPr id="12" name="Text 10"/>
+          <p:cNvSpPr/>
+          <p:nvPr/>
+        </p:nvSpPr>
+        <p:spPr>
+          <a:xfrm>
+            <a:off x="4690872" y="2898648"/>
+            <a:ext cx="2953512" cy="777240"/>
           </a:xfrm>
           <a:prstGeom prst="rect">
             <a:avLst/>
@@ -2908,7 +2965,7 @@
               <a:buNone/>
             </a:pPr>
             <a:r>
-              <a:rPr lang="en-US" sz="1800" b="1" dirty="0">
+              <a:rPr lang="en-US" sz="1600" b="1" dirty="0">
                 <a:solidFill>
                   <a:srgbClr val="12313A"/>
                 </a:solidFill>
@@ -2918,20 +2975,20 @@
               </a:rPr>
               <a:t>A hypoxia alert on real data</a:t>
             </a:r>
-            <a:endParaRPr lang="en-US" sz="1800" dirty="0"/>
-          </a:p>
-        </p:txBody>
-      </p:sp>
-      <p:sp>
-        <p:nvSpPr>
-          <p:cNvPr id="11" name="Text 9"/>
-          <p:cNvSpPr/>
-          <p:nvPr/>
-        </p:nvSpPr>
-        <p:spPr>
-          <a:xfrm>
-            <a:off x="1691640" y="3758184"/>
-            <a:ext cx="9875520" cy="640080"/>
+            <a:endParaRPr lang="en-US" sz="1600" dirty="0"/>
+          </a:p>
+        </p:txBody>
+      </p:sp>
+      <p:sp>
+        <p:nvSpPr>
+          <p:cNvPr id="13" name="Text 11"/>
+          <p:cNvSpPr/>
+          <p:nvPr/>
+        </p:nvSpPr>
+        <p:spPr>
+          <a:xfrm>
+            <a:off x="4690872" y="3657600"/>
+            <a:ext cx="2953512" cy="2011680"/>
           </a:xfrm>
           <a:prstGeom prst="rect">
             <a:avLst/>
@@ -2944,10 +3001,13 @@
           <a:lstStyle/>
           <a:p>
             <a:pPr indent="0" marL="0">
-              <a:buNone/>
-            </a:pPr>
-            <a:r>
-              <a:rPr lang="en-US" sz="1350" dirty="0">
+              <a:lnSpc>
+                <a:spcPct val="106000"/>
+              </a:lnSpc>
+              <a:buNone/>
+            </a:pPr>
+            <a:r>
+              <a:rPr lang="en-US" sz="1250" dirty="0">
                 <a:solidFill>
                   <a:srgbClr val="5A7178"/>
                 </a:solidFill>
@@ -2957,20 +3017,47 @@
               </a:rPr>
               <a:t>The banner raises as Patient-1's SpO2 crosses the 92% trigger — captured live at 89.7% — not a scripted demo value.</a:t>
             </a:r>
-            <a:endParaRPr lang="en-US" sz="1350" dirty="0"/>
-          </a:p>
-        </p:txBody>
-      </p:sp>
-      <p:sp>
-        <p:nvSpPr>
-          <p:cNvPr id="12" name="Shape 10"/>
-          <p:cNvSpPr/>
-          <p:nvPr/>
-        </p:nvSpPr>
-        <p:spPr>
-          <a:xfrm>
-            <a:off x="731520" y="4800600"/>
-            <a:ext cx="685800" cy="685800"/>
+            <a:endParaRPr lang="en-US" sz="1250" dirty="0"/>
+          </a:p>
+        </p:txBody>
+      </p:sp>
+      <p:sp>
+        <p:nvSpPr>
+          <p:cNvPr id="14" name="Shape 12"/>
+          <p:cNvSpPr/>
+          <p:nvPr/>
+        </p:nvSpPr>
+        <p:spPr>
+          <a:xfrm>
+            <a:off x="8193024" y="1874520"/>
+            <a:ext cx="3502152" cy="3977640"/>
+          </a:xfrm>
+          <a:prstGeom prst="roundRect">
+            <a:avLst>
+              <a:gd name="adj" fmla="val 2611"/>
+            </a:avLst>
+          </a:prstGeom>
+          <a:solidFill>
+            <a:srgbClr val="EEF6F7"/>
+          </a:solidFill>
+          <a:ln w="15240">
+            <a:solidFill>
+              <a:srgbClr val="2A8FA3"/>
+            </a:solidFill>
+            <a:prstDash val="solid"/>
+          </a:ln>
+        </p:spPr>
+      </p:sp>
+      <p:sp>
+        <p:nvSpPr>
+          <p:cNvPr id="15" name="Shape 13"/>
+          <p:cNvSpPr/>
+          <p:nvPr/>
+        </p:nvSpPr>
+        <p:spPr>
+          <a:xfrm>
+            <a:off x="8467344" y="2148840"/>
+            <a:ext cx="603504" cy="603504"/>
           </a:xfrm>
           <a:prstGeom prst="ellipse">
             <a:avLst/>
@@ -2983,14 +3070,14 @@
       </p:sp>
       <p:sp>
         <p:nvSpPr>
-          <p:cNvPr id="13" name="Text 11"/>
-          <p:cNvSpPr/>
-          <p:nvPr/>
-        </p:nvSpPr>
-        <p:spPr>
-          <a:xfrm>
-            <a:off x="731520" y="4800600"/>
-            <a:ext cx="685800" cy="685800"/>
+          <p:cNvPr id="16" name="Text 14"/>
+          <p:cNvSpPr/>
+          <p:nvPr/>
+        </p:nvSpPr>
+        <p:spPr>
+          <a:xfrm>
+            <a:off x="8467344" y="2148840"/>
+            <a:ext cx="603504" cy="603504"/>
           </a:xfrm>
           <a:prstGeom prst="rect">
             <a:avLst/>
@@ -3006,7 +3093,7 @@
               <a:buNone/>
             </a:pPr>
             <a:r>
-              <a:rPr lang="en-US" sz="2600" b="1" dirty="0">
+              <a:rPr lang="en-US" sz="2200" b="1" dirty="0">
                 <a:solidFill>
                   <a:srgbClr val="FFFFFF"/>
                 </a:solidFill>
@@ -3016,20 +3103,20 @@
               </a:rPr>
               <a:t>3</a:t>
             </a:r>
-            <a:endParaRPr lang="en-US" sz="2600" dirty="0"/>
-          </a:p>
-        </p:txBody>
-      </p:sp>
-      <p:sp>
-        <p:nvSpPr>
-          <p:cNvPr id="14" name="Text 12"/>
-          <p:cNvSpPr/>
-          <p:nvPr/>
-        </p:nvSpPr>
-        <p:spPr>
-          <a:xfrm>
-            <a:off x="1691640" y="4754880"/>
-            <a:ext cx="9875520" cy="411480"/>
+            <a:endParaRPr lang="en-US" sz="2200" dirty="0"/>
+          </a:p>
+        </p:txBody>
+      </p:sp>
+      <p:sp>
+        <p:nvSpPr>
+          <p:cNvPr id="17" name="Text 15"/>
+          <p:cNvSpPr/>
+          <p:nvPr/>
+        </p:nvSpPr>
+        <p:spPr>
+          <a:xfrm>
+            <a:off x="8467344" y="2898648"/>
+            <a:ext cx="2953512" cy="777240"/>
           </a:xfrm>
           <a:prstGeom prst="rect">
             <a:avLst/>
@@ -3045,7 +3132,7 @@
               <a:buNone/>
             </a:pPr>
             <a:r>
-              <a:rPr lang="en-US" sz="1800" b="1" dirty="0">
+              <a:rPr lang="en-US" sz="1600" b="1" dirty="0">
                 <a:solidFill>
                   <a:srgbClr val="12313A"/>
                 </a:solidFill>
@@ -3055,20 +3142,20 @@
               </a:rPr>
               <a:t>The pipeline is genuinely live</a:t>
             </a:r>
-            <a:endParaRPr lang="en-US" sz="1800" dirty="0"/>
-          </a:p>
-        </p:txBody>
-      </p:sp>
-      <p:sp>
-        <p:nvSpPr>
-          <p:cNvPr id="15" name="Text 13"/>
-          <p:cNvSpPr/>
-          <p:nvPr/>
-        </p:nvSpPr>
-        <p:spPr>
-          <a:xfrm>
-            <a:off x="1691640" y="5175504"/>
-            <a:ext cx="9875520" cy="640080"/>
+            <a:endParaRPr lang="en-US" sz="1600" dirty="0"/>
+          </a:p>
+        </p:txBody>
+      </p:sp>
+      <p:sp>
+        <p:nvSpPr>
+          <p:cNvPr id="18" name="Text 16"/>
+          <p:cNvSpPr/>
+          <p:nvPr/>
+        </p:nvSpPr>
+        <p:spPr>
+          <a:xfrm>
+            <a:off x="8467344" y="3657600"/>
+            <a:ext cx="2953512" cy="2011680"/>
           </a:xfrm>
           <a:prstGeom prst="rect">
             <a:avLst/>
@@ -3081,10 +3168,13 @@
           <a:lstStyle/>
           <a:p>
             <a:pPr indent="0" marL="0">
-              <a:buNone/>
-            </a:pPr>
-            <a:r>
-              <a:rPr lang="en-US" sz="1350" dirty="0">
+              <a:lnSpc>
+                <a:spcPct val="106000"/>
+              </a:lnSpc>
+              <a:buNone/>
+            </a:pPr>
+            <a:r>
+              <a:rPr lang="en-US" sz="1250" dirty="0">
                 <a:solidFill>
                   <a:srgbClr val="5A7178"/>
                 </a:solidFill>
@@ -3094,46 +3184,7 @@
               </a:rPr>
               <a:t>The stored-record count climbs between refreshes and the freshest reading stays a couple of seconds old, so nothing here is cached.</a:t>
             </a:r>
-            <a:endParaRPr lang="en-US" sz="1350" dirty="0"/>
-          </a:p>
-        </p:txBody>
-      </p:sp>
-      <p:sp>
-        <p:nvSpPr>
-          <p:cNvPr id="16" name="Text 14"/>
-          <p:cNvSpPr/>
-          <p:nvPr/>
-        </p:nvSpPr>
-        <p:spPr>
-          <a:xfrm>
-            <a:off x="640080" y="6263640"/>
-            <a:ext cx="10972800" cy="365760"/>
-          </a:xfrm>
-          <a:prstGeom prst="rect">
-            <a:avLst/>
-          </a:prstGeom>
-          <a:noFill/>
-          <a:ln/>
-        </p:spPr>
-        <p:txBody>
-          <a:bodyPr wrap="square" rtlCol="0" anchor="ctr"/>
-          <a:lstStyle/>
-          <a:p>
-            <a:pPr indent="0" marL="0">
-              <a:buNone/>
-            </a:pPr>
-            <a:r>
-              <a:rPr lang="en-US" sz="1300" i="1" dirty="0">
-                <a:solidFill>
-                  <a:srgbClr val="4FA5B3"/>
-                </a:solidFill>
-                <a:latin typeface="Calibri" pitchFamily="34" charset="0"/>
-                <a:ea typeface="Calibri" pitchFamily="34" charset="-122"/>
-                <a:cs typeface="Calibri" pitchFamily="34" charset="-120"/>
-              </a:rPr>
-              <a:t>Switch to the live dashboard here — backup video ready.</a:t>
-            </a:r>
-            <a:endParaRPr lang="en-US" sz="1300" dirty="0"/>
+            <a:endParaRPr lang="en-US" sz="1250" dirty="0"/>
           </a:p>
         </p:txBody>
       </p:sp>

--- a/ppt/SriVenkatBora_X25164414_patient-vitals-monitoring.pptx
+++ b/ppt/SriVenkatBora_X25164414_patient-vitals-monitoring.pptx
@@ -1284,41 +1284,14 @@
       </p:sp>
       <p:sp>
         <p:nvSpPr>
-          <p:cNvPr id="6" name="Shape 4"/>
+          <p:cNvPr id="6" name="Text 4"/>
           <p:cNvSpPr/>
           <p:nvPr/>
         </p:nvSpPr>
         <p:spPr>
           <a:xfrm>
             <a:off x="5120640" y="4023360"/>
-            <a:ext cx="2926080" cy="566928"/>
-          </a:xfrm>
-          <a:prstGeom prst="roundRect">
-            <a:avLst>
-              <a:gd name="adj" fmla="val 50000"/>
-            </a:avLst>
-          </a:prstGeom>
-          <a:solidFill>
-            <a:srgbClr val="163B44"/>
-          </a:solidFill>
-          <a:ln w="12700">
-            <a:solidFill>
-              <a:srgbClr val="E5615E"/>
-            </a:solidFill>
-            <a:prstDash val="solid"/>
-          </a:ln>
-        </p:spPr>
-      </p:sp>
-      <p:sp>
-        <p:nvSpPr>
-          <p:cNvPr id="7" name="Text 5"/>
-          <p:cNvSpPr/>
-          <p:nvPr/>
-        </p:nvSpPr>
-        <p:spPr>
-          <a:xfrm>
-            <a:off x="5120640" y="4023360"/>
-            <a:ext cx="2926080" cy="566928"/>
+            <a:ext cx="3474720" cy="411480"/>
           </a:xfrm>
           <a:prstGeom prst="rect">
             <a:avLst/>
@@ -1330,11 +1303,11 @@
           <a:bodyPr wrap="square" lIns="0" tIns="0" rIns="0" bIns="0" rtlCol="0" anchor="ctr"/>
           <a:lstStyle/>
           <a:p>
-            <a:pPr algn="ctr" indent="0" marL="0">
-              <a:buNone/>
-            </a:pPr>
-            <a:r>
-              <a:rPr lang="en-US" sz="1350" b="1" dirty="0">
+            <a:pPr indent="0" marL="0">
+              <a:buNone/>
+            </a:pPr>
+            <a:r>
+              <a:rPr lang="en-US" sz="1500" b="1" dirty="0">
                 <a:solidFill>
                   <a:srgbClr val="E5615E"/>
                 </a:solidFill>
@@ -1344,47 +1317,20 @@
               </a:rPr>
               <a:t>SpO₂ &lt; 92% alert</a:t>
             </a:r>
-            <a:endParaRPr lang="en-US" sz="1350" dirty="0"/>
-          </a:p>
-        </p:txBody>
-      </p:sp>
-      <p:sp>
-        <p:nvSpPr>
-          <p:cNvPr id="8" name="Shape 6"/>
-          <p:cNvSpPr/>
-          <p:nvPr/>
-        </p:nvSpPr>
-        <p:spPr>
-          <a:xfrm>
-            <a:off x="5120640" y="4709160"/>
-            <a:ext cx="2926080" cy="566928"/>
-          </a:xfrm>
-          <a:prstGeom prst="roundRect">
-            <a:avLst>
-              <a:gd name="adj" fmla="val 50000"/>
-            </a:avLst>
-          </a:prstGeom>
-          <a:solidFill>
-            <a:srgbClr val="163B44"/>
-          </a:solidFill>
-          <a:ln w="12700">
-            <a:solidFill>
-              <a:srgbClr val="E5615E"/>
-            </a:solidFill>
-            <a:prstDash val="solid"/>
-          </a:ln>
-        </p:spPr>
-      </p:sp>
-      <p:sp>
-        <p:nvSpPr>
-          <p:cNvPr id="9" name="Text 7"/>
-          <p:cNvSpPr/>
-          <p:nvPr/>
-        </p:nvSpPr>
-        <p:spPr>
-          <a:xfrm>
-            <a:off x="5120640" y="4709160"/>
-            <a:ext cx="2926080" cy="566928"/>
+            <a:endParaRPr lang="en-US" sz="1500" dirty="0"/>
+          </a:p>
+        </p:txBody>
+      </p:sp>
+      <p:sp>
+        <p:nvSpPr>
+          <p:cNvPr id="7" name="Text 5"/>
+          <p:cNvSpPr/>
+          <p:nvPr/>
+        </p:nvSpPr>
+        <p:spPr>
+          <a:xfrm>
+            <a:off x="5120640" y="4526280"/>
+            <a:ext cx="3474720" cy="411480"/>
           </a:xfrm>
           <a:prstGeom prst="rect">
             <a:avLst/>
@@ -1396,11 +1342,11 @@
           <a:bodyPr wrap="square" lIns="0" tIns="0" rIns="0" bIns="0" rtlCol="0" anchor="ctr"/>
           <a:lstStyle/>
           <a:p>
-            <a:pPr algn="ctr" indent="0" marL="0">
-              <a:buNone/>
-            </a:pPr>
-            <a:r>
-              <a:rPr lang="en-US" sz="1350" b="1" dirty="0">
+            <a:pPr indent="0" marL="0">
+              <a:buNone/>
+            </a:pPr>
+            <a:r>
+              <a:rPr lang="en-US" sz="1500" b="1" dirty="0">
                 <a:solidFill>
                   <a:srgbClr val="E5615E"/>
                 </a:solidFill>
@@ -1410,47 +1356,20 @@
               </a:rPr>
               <a:t>5 vitals · 2 patients</a:t>
             </a:r>
-            <a:endParaRPr lang="en-US" sz="1350" dirty="0"/>
-          </a:p>
-        </p:txBody>
-      </p:sp>
-      <p:sp>
-        <p:nvSpPr>
-          <p:cNvPr id="10" name="Shape 8"/>
-          <p:cNvSpPr/>
-          <p:nvPr/>
-        </p:nvSpPr>
-        <p:spPr>
-          <a:xfrm>
-            <a:off x="5120640" y="5394960"/>
-            <a:ext cx="2926080" cy="566928"/>
-          </a:xfrm>
-          <a:prstGeom prst="roundRect">
-            <a:avLst>
-              <a:gd name="adj" fmla="val 50000"/>
-            </a:avLst>
-          </a:prstGeom>
-          <a:solidFill>
-            <a:srgbClr val="163B44"/>
-          </a:solidFill>
-          <a:ln w="12700">
-            <a:solidFill>
-              <a:srgbClr val="E5615E"/>
-            </a:solidFill>
-            <a:prstDash val="solid"/>
-          </a:ln>
-        </p:spPr>
-      </p:sp>
-      <p:sp>
-        <p:nvSpPr>
-          <p:cNvPr id="11" name="Text 9"/>
-          <p:cNvSpPr/>
-          <p:nvPr/>
-        </p:nvSpPr>
-        <p:spPr>
-          <a:xfrm>
-            <a:off x="5120640" y="5394960"/>
-            <a:ext cx="2926080" cy="566928"/>
+            <a:endParaRPr lang="en-US" sz="1500" dirty="0"/>
+          </a:p>
+        </p:txBody>
+      </p:sp>
+      <p:sp>
+        <p:nvSpPr>
+          <p:cNvPr id="8" name="Text 6"/>
+          <p:cNvSpPr/>
+          <p:nvPr/>
+        </p:nvSpPr>
+        <p:spPr>
+          <a:xfrm>
+            <a:off x="5120640" y="5029200"/>
+            <a:ext cx="3474720" cy="411480"/>
           </a:xfrm>
           <a:prstGeom prst="rect">
             <a:avLst/>
@@ -1462,11 +1381,11 @@
           <a:bodyPr wrap="square" lIns="0" tIns="0" rIns="0" bIns="0" rtlCol="0" anchor="ctr"/>
           <a:lstStyle/>
           <a:p>
-            <a:pPr algn="ctr" indent="0" marL="0">
-              <a:buNone/>
-            </a:pPr>
-            <a:r>
-              <a:rPr lang="en-US" sz="1350" b="1" dirty="0">
+            <a:pPr indent="0" marL="0">
+              <a:buNone/>
+            </a:pPr>
+            <a:r>
+              <a:rPr lang="en-US" sz="1500" b="1" dirty="0">
                 <a:solidFill>
                   <a:srgbClr val="E5615E"/>
                 </a:solidFill>
@@ -1476,13 +1395,13 @@
               </a:rPr>
               <a:t>10 s alert window</a:t>
             </a:r>
-            <a:endParaRPr lang="en-US" sz="1350" dirty="0"/>
-          </a:p>
-        </p:txBody>
-      </p:sp>
-      <p:sp>
-        <p:nvSpPr>
-          <p:cNvPr id="12" name="Text 10"/>
+            <a:endParaRPr lang="en-US" sz="1500" dirty="0"/>
+          </a:p>
+        </p:txBody>
+      </p:sp>
+      <p:sp>
+        <p:nvSpPr>
+          <p:cNvPr id="9" name="Text 7"/>
           <p:cNvSpPr/>
           <p:nvPr/>
         </p:nvSpPr>
@@ -1504,17 +1423,6 @@
             <a:pPr indent="0" marL="0">
               <a:buNone/>
             </a:pPr>
-            <a:r>
-              <a:rPr lang="en-US" sz="1250" dirty="0">
-                <a:solidFill>
-                  <a:srgbClr val="5A7178"/>
-                </a:solidFill>
-                <a:latin typeface="Calibri" pitchFamily="34" charset="0"/>
-                <a:ea typeface="Calibri" pitchFamily="34" charset="-122"/>
-                <a:cs typeface="Calibri" pitchFamily="34" charset="-120"/>
-              </a:rPr>
-              <a:t>Fog &amp; Edge Computing (H9FECC)   ·   deployed live on AWS</a:t>
-            </a:r>
             <a:endParaRPr lang="en-US" sz="1250" dirty="0"/>
           </a:p>
         </p:txBody>

--- a/ppt/SriVenkatBora_X25164414_patient-vitals-monitoring.pptx
+++ b/ppt/SriVenkatBora_X25164414_patient-vitals-monitoring.pptx
@@ -1124,7 +1124,7 @@
     <p:bg>
       <p:bgPr>
         <a:solidFill>
-          <a:srgbClr val="10303A"/>
+          <a:srgbClr val="22333B"/>
         </a:solidFill>
       </p:bgPr>
     </p:bg>
@@ -1149,29 +1149,49 @@
           <p:nvPr/>
         </p:nvSpPr>
         <p:spPr>
-          <a:xfrm>
-            <a:off x="0" y="0"/>
-            <a:ext cx="4663440" cy="6858000"/>
-          </a:xfrm>
-          <a:prstGeom prst="rect">
-            <a:avLst/>
-          </a:prstGeom>
-          <a:solidFill>
-            <a:srgbClr val="0F6E7E"/>
-          </a:solidFill>
-          <a:ln/>
-        </p:spPr>
-      </p:sp>
-      <p:sp>
-        <p:nvSpPr>
-          <p:cNvPr id="3" name="Text 1"/>
-          <p:cNvSpPr/>
-          <p:nvPr/>
-        </p:nvSpPr>
-        <p:spPr>
-          <a:xfrm>
-            <a:off x="502920" y="1280160"/>
-            <a:ext cx="3749040" cy="2377440"/>
+          <a:xfrm flipH="1" rot="10800000">
+            <a:off x="9905695" y="4572000"/>
+            <a:ext cx="2286000" cy="2286000"/>
+          </a:xfrm>
+          <a:prstGeom prst="rtTriangle">
+            <a:avLst/>
+          </a:prstGeom>
+          <a:solidFill>
+            <a:srgbClr val="0F7A8C"/>
+          </a:solidFill>
+          <a:ln/>
+        </p:spPr>
+      </p:sp>
+      <p:sp>
+        <p:nvSpPr>
+          <p:cNvPr id="3" name="Shape 1"/>
+          <p:cNvSpPr/>
+          <p:nvPr/>
+        </p:nvSpPr>
+        <p:spPr>
+          <a:xfrm flipH="1" rot="10800000">
+            <a:off x="10820095" y="5486400"/>
+            <a:ext cx="1371600" cy="1371600"/>
+          </a:xfrm>
+          <a:prstGeom prst="rtTriangle">
+            <a:avLst/>
+          </a:prstGeom>
+          <a:solidFill>
+            <a:srgbClr val="005264"/>
+          </a:solidFill>
+          <a:ln/>
+        </p:spPr>
+      </p:sp>
+      <p:sp>
+        <p:nvSpPr>
+          <p:cNvPr id="4" name="Text 2"/>
+          <p:cNvSpPr/>
+          <p:nvPr/>
+        </p:nvSpPr>
+        <p:spPr>
+          <a:xfrm>
+            <a:off x="758952" y="1645920"/>
+            <a:ext cx="10637215" cy="1645920"/>
           </a:xfrm>
           <a:prstGeom prst="rect">
             <a:avLst/>
@@ -1184,33 +1204,36 @@
           <a:lstStyle/>
           <a:p>
             <a:pPr indent="0" marL="0">
-              <a:buNone/>
-            </a:pPr>
-            <a:r>
-              <a:rPr lang="en-US" sz="3400" b="1" dirty="0">
-                <a:solidFill>
-                  <a:srgbClr val="FFFFFF"/>
-                </a:solidFill>
-                <a:latin typeface="Century Schoolbook" pitchFamily="34" charset="0"/>
-                <a:ea typeface="Century Schoolbook" pitchFamily="34" charset="-122"/>
-                <a:cs typeface="Century Schoolbook" pitchFamily="34" charset="-120"/>
+              <a:lnSpc>
+                <a:spcPct val="98000"/>
+              </a:lnSpc>
+              <a:buNone/>
+            </a:pPr>
+            <a:r>
+              <a:rPr lang="en-US" sz="3800" b="1" dirty="0">
+                <a:solidFill>
+                  <a:srgbClr val="EEF2F6"/>
+                </a:solidFill>
+                <a:latin typeface="Cambria" pitchFamily="34" charset="0"/>
+                <a:ea typeface="Cambria" pitchFamily="34" charset="-122"/>
+                <a:cs typeface="Cambria" pitchFamily="34" charset="-120"/>
               </a:rPr>
               <a:t>Patient Vitals Remote Monitoring</a:t>
             </a:r>
-            <a:endParaRPr lang="en-US" sz="3400" dirty="0"/>
-          </a:p>
-        </p:txBody>
-      </p:sp>
-      <p:sp>
-        <p:nvSpPr>
-          <p:cNvPr id="4" name="Text 2"/>
-          <p:cNvSpPr/>
-          <p:nvPr/>
-        </p:nvSpPr>
-        <p:spPr>
-          <a:xfrm>
-            <a:off x="521208" y="5394960"/>
-            <a:ext cx="3840480" cy="731520"/>
+            <a:endParaRPr lang="en-US" sz="3800" dirty="0"/>
+          </a:p>
+        </p:txBody>
+      </p:sp>
+      <p:sp>
+        <p:nvSpPr>
+          <p:cNvPr id="5" name="Text 3"/>
+          <p:cNvSpPr/>
+          <p:nvPr/>
+        </p:nvSpPr>
+        <p:spPr>
+          <a:xfrm>
+            <a:off x="777240" y="3337560"/>
+            <a:ext cx="10637215" cy="365760"/>
           </a:xfrm>
           <a:prstGeom prst="rect">
             <a:avLst/>
@@ -1226,9 +1249,9 @@
               <a:buNone/>
             </a:pPr>
             <a:r>
-              <a:rPr lang="en-US" sz="1500" dirty="0">
-                <a:solidFill>
-                  <a:srgbClr val="CFE6EA"/>
+              <a:rPr lang="en-US" sz="1450" dirty="0">
+                <a:solidFill>
+                  <a:srgbClr val="8B98A6"/>
                 </a:solidFill>
                 <a:latin typeface="Calibri" pitchFamily="34" charset="0"/>
                 <a:ea typeface="Calibri" pitchFamily="34" charset="-122"/>
@@ -1236,41 +1259,41 @@
               </a:rPr>
               <a:t>Sri Venkat Bora   ·   X25164414</a:t>
             </a:r>
-            <a:endParaRPr lang="en-US" sz="1500" dirty="0"/>
-          </a:p>
-        </p:txBody>
-      </p:sp>
-      <p:sp>
-        <p:nvSpPr>
-          <p:cNvPr id="5" name="Text 3"/>
-          <p:cNvSpPr/>
-          <p:nvPr/>
-        </p:nvSpPr>
-        <p:spPr>
-          <a:xfrm>
-            <a:off x="5120640" y="1371600"/>
-            <a:ext cx="6492240" cy="2011680"/>
-          </a:xfrm>
-          <a:prstGeom prst="rect">
-            <a:avLst/>
-          </a:prstGeom>
-          <a:noFill/>
-          <a:ln/>
-        </p:spPr>
-        <p:txBody>
-          <a:bodyPr wrap="square" rtlCol="0" anchor="ctr"/>
+            <a:endParaRPr lang="en-US" sz="1450" dirty="0"/>
+          </a:p>
+        </p:txBody>
+      </p:sp>
+      <p:sp>
+        <p:nvSpPr>
+          <p:cNvPr id="6" name="Text 4"/>
+          <p:cNvSpPr/>
+          <p:nvPr/>
+        </p:nvSpPr>
+        <p:spPr>
+          <a:xfrm>
+            <a:off x="777240" y="3931920"/>
+            <a:ext cx="8138160" cy="1325880"/>
+          </a:xfrm>
+          <a:prstGeom prst="rect">
+            <a:avLst/>
+          </a:prstGeom>
+          <a:noFill/>
+          <a:ln/>
+        </p:spPr>
+        <p:txBody>
+          <a:bodyPr wrap="square" rtlCol="0" anchor="t"/>
           <a:lstStyle/>
           <a:p>
             <a:pPr indent="0" marL="0">
               <a:lnSpc>
-                <a:spcPct val="112000"/>
+                <a:spcPct val="130000"/>
               </a:lnSpc>
               <a:buNone/>
             </a:pPr>
             <a:r>
-              <a:rPr lang="en-US" sz="2000" dirty="0">
-                <a:solidFill>
-                  <a:srgbClr val="CFE6EA"/>
+              <a:rPr lang="en-US" sz="1400" dirty="0">
+                <a:solidFill>
+                  <a:srgbClr val="EEF2F6"/>
                 </a:solidFill>
                 <a:latin typeface="Calibri" pitchFamily="34" charset="0"/>
                 <a:ea typeface="Calibri" pitchFamily="34" charset="-122"/>
@@ -1278,152 +1301,7 @@
               </a:rPr>
               <a:t>Ward rounds are periodic, but deterioration is a trend — falling oxygen or a climbing heart rate develops over minutes, so a single reading in isolation can still look normal.</a:t>
             </a:r>
-            <a:endParaRPr lang="en-US" sz="2000" dirty="0"/>
-          </a:p>
-        </p:txBody>
-      </p:sp>
-      <p:sp>
-        <p:nvSpPr>
-          <p:cNvPr id="6" name="Text 4"/>
-          <p:cNvSpPr/>
-          <p:nvPr/>
-        </p:nvSpPr>
-        <p:spPr>
-          <a:xfrm>
-            <a:off x="5120640" y="4023360"/>
-            <a:ext cx="3474720" cy="411480"/>
-          </a:xfrm>
-          <a:prstGeom prst="rect">
-            <a:avLst/>
-          </a:prstGeom>
-          <a:noFill/>
-          <a:ln/>
-        </p:spPr>
-        <p:txBody>
-          <a:bodyPr wrap="square" lIns="0" tIns="0" rIns="0" bIns="0" rtlCol="0" anchor="ctr"/>
-          <a:lstStyle/>
-          <a:p>
-            <a:pPr indent="0" marL="0">
-              <a:buNone/>
-            </a:pPr>
-            <a:r>
-              <a:rPr lang="en-US" sz="1500" b="1" dirty="0">
-                <a:solidFill>
-                  <a:srgbClr val="E5615E"/>
-                </a:solidFill>
-                <a:latin typeface="Calibri" pitchFamily="34" charset="0"/>
-                <a:ea typeface="Calibri" pitchFamily="34" charset="-122"/>
-                <a:cs typeface="Calibri" pitchFamily="34" charset="-120"/>
-              </a:rPr>
-              <a:t>SpO₂ &lt; 92% alert</a:t>
-            </a:r>
-            <a:endParaRPr lang="en-US" sz="1500" dirty="0"/>
-          </a:p>
-        </p:txBody>
-      </p:sp>
-      <p:sp>
-        <p:nvSpPr>
-          <p:cNvPr id="7" name="Text 5"/>
-          <p:cNvSpPr/>
-          <p:nvPr/>
-        </p:nvSpPr>
-        <p:spPr>
-          <a:xfrm>
-            <a:off x="5120640" y="4526280"/>
-            <a:ext cx="3474720" cy="411480"/>
-          </a:xfrm>
-          <a:prstGeom prst="rect">
-            <a:avLst/>
-          </a:prstGeom>
-          <a:noFill/>
-          <a:ln/>
-        </p:spPr>
-        <p:txBody>
-          <a:bodyPr wrap="square" lIns="0" tIns="0" rIns="0" bIns="0" rtlCol="0" anchor="ctr"/>
-          <a:lstStyle/>
-          <a:p>
-            <a:pPr indent="0" marL="0">
-              <a:buNone/>
-            </a:pPr>
-            <a:r>
-              <a:rPr lang="en-US" sz="1500" b="1" dirty="0">
-                <a:solidFill>
-                  <a:srgbClr val="E5615E"/>
-                </a:solidFill>
-                <a:latin typeface="Calibri" pitchFamily="34" charset="0"/>
-                <a:ea typeface="Calibri" pitchFamily="34" charset="-122"/>
-                <a:cs typeface="Calibri" pitchFamily="34" charset="-120"/>
-              </a:rPr>
-              <a:t>5 vitals · 2 patients</a:t>
-            </a:r>
-            <a:endParaRPr lang="en-US" sz="1500" dirty="0"/>
-          </a:p>
-        </p:txBody>
-      </p:sp>
-      <p:sp>
-        <p:nvSpPr>
-          <p:cNvPr id="8" name="Text 6"/>
-          <p:cNvSpPr/>
-          <p:nvPr/>
-        </p:nvSpPr>
-        <p:spPr>
-          <a:xfrm>
-            <a:off x="5120640" y="5029200"/>
-            <a:ext cx="3474720" cy="411480"/>
-          </a:xfrm>
-          <a:prstGeom prst="rect">
-            <a:avLst/>
-          </a:prstGeom>
-          <a:noFill/>
-          <a:ln/>
-        </p:spPr>
-        <p:txBody>
-          <a:bodyPr wrap="square" lIns="0" tIns="0" rIns="0" bIns="0" rtlCol="0" anchor="ctr"/>
-          <a:lstStyle/>
-          <a:p>
-            <a:pPr indent="0" marL="0">
-              <a:buNone/>
-            </a:pPr>
-            <a:r>
-              <a:rPr lang="en-US" sz="1500" b="1" dirty="0">
-                <a:solidFill>
-                  <a:srgbClr val="E5615E"/>
-                </a:solidFill>
-                <a:latin typeface="Calibri" pitchFamily="34" charset="0"/>
-                <a:ea typeface="Calibri" pitchFamily="34" charset="-122"/>
-                <a:cs typeface="Calibri" pitchFamily="34" charset="-120"/>
-              </a:rPr>
-              <a:t>10 s alert window</a:t>
-            </a:r>
-            <a:endParaRPr lang="en-US" sz="1500" dirty="0"/>
-          </a:p>
-        </p:txBody>
-      </p:sp>
-      <p:sp>
-        <p:nvSpPr>
-          <p:cNvPr id="9" name="Text 7"/>
-          <p:cNvSpPr/>
-          <p:nvPr/>
-        </p:nvSpPr>
-        <p:spPr>
-          <a:xfrm>
-            <a:off x="5120640" y="6172200"/>
-            <a:ext cx="6400800" cy="365760"/>
-          </a:xfrm>
-          <a:prstGeom prst="rect">
-            <a:avLst/>
-          </a:prstGeom>
-          <a:noFill/>
-          <a:ln/>
-        </p:spPr>
-        <p:txBody>
-          <a:bodyPr wrap="square" rtlCol="0" anchor="ctr"/>
-          <a:lstStyle/>
-          <a:p>
-            <a:pPr indent="0" marL="0">
-              <a:buNone/>
-            </a:pPr>
-            <a:endParaRPr lang="en-US" sz="1250" dirty="0"/>
+            <a:endParaRPr lang="en-US" sz="1400" dirty="0"/>
           </a:p>
         </p:txBody>
       </p:sp>
@@ -1441,7 +1319,7 @@
     <p:bg>
       <p:bgPr>
         <a:solidFill>
-          <a:srgbClr val="FFFFFF"/>
+          <a:srgbClr val="22333B"/>
         </a:solidFill>
       </p:bgPr>
     </p:bg>
@@ -1461,23 +1339,63 @@
       </p:grpSpPr>
       <p:sp>
         <p:nvSpPr>
-          <p:cNvPr id="2" name="Text 0"/>
-          <p:cNvSpPr/>
-          <p:nvPr/>
-        </p:nvSpPr>
-        <p:spPr>
-          <a:xfrm>
-            <a:off x="640080" y="457200"/>
-            <a:ext cx="10972800" cy="640080"/>
-          </a:xfrm>
-          <a:prstGeom prst="rect">
-            <a:avLst/>
-          </a:prstGeom>
-          <a:noFill/>
-          <a:ln/>
-        </p:spPr>
-        <p:txBody>
-          <a:bodyPr wrap="square" rtlCol="0" anchor="ctr"/>
+          <p:cNvPr id="2" name="Shape 0"/>
+          <p:cNvSpPr/>
+          <p:nvPr/>
+        </p:nvSpPr>
+        <p:spPr>
+          <a:xfrm flipH="1" rot="10800000">
+            <a:off x="9905695" y="4572000"/>
+            <a:ext cx="2286000" cy="2286000"/>
+          </a:xfrm>
+          <a:prstGeom prst="rtTriangle">
+            <a:avLst/>
+          </a:prstGeom>
+          <a:solidFill>
+            <a:srgbClr val="0F7A8C"/>
+          </a:solidFill>
+          <a:ln/>
+        </p:spPr>
+      </p:sp>
+      <p:sp>
+        <p:nvSpPr>
+          <p:cNvPr id="3" name="Shape 1"/>
+          <p:cNvSpPr/>
+          <p:nvPr/>
+        </p:nvSpPr>
+        <p:spPr>
+          <a:xfrm flipH="1" rot="10800000">
+            <a:off x="10820095" y="5486400"/>
+            <a:ext cx="1371600" cy="1371600"/>
+          </a:xfrm>
+          <a:prstGeom prst="rtTriangle">
+            <a:avLst/>
+          </a:prstGeom>
+          <a:solidFill>
+            <a:srgbClr val="005264"/>
+          </a:solidFill>
+          <a:ln/>
+        </p:spPr>
+      </p:sp>
+      <p:sp>
+        <p:nvSpPr>
+          <p:cNvPr id="4" name="Text 2"/>
+          <p:cNvSpPr/>
+          <p:nvPr/>
+        </p:nvSpPr>
+        <p:spPr>
+          <a:xfrm>
+            <a:off x="777240" y="731520"/>
+            <a:ext cx="914400" cy="640080"/>
+          </a:xfrm>
+          <a:prstGeom prst="rect">
+            <a:avLst/>
+          </a:prstGeom>
+          <a:noFill/>
+          <a:ln/>
+        </p:spPr>
+        <p:txBody>
+          <a:bodyPr wrap="square" lIns="0" tIns="0" rIns="0" bIns="0" rtlCol="0" anchor="ctr"/>
           <a:lstStyle/>
           <a:p>
             <a:pPr indent="0" marL="0">
@@ -1486,40 +1404,118 @@
             <a:r>
               <a:rPr lang="en-US" sz="3000" b="1" dirty="0">
                 <a:solidFill>
-                  <a:srgbClr val="12313A"/>
-                </a:solidFill>
-                <a:latin typeface="Century Schoolbook" pitchFamily="34" charset="0"/>
-                <a:ea typeface="Century Schoolbook" pitchFamily="34" charset="-122"/>
-                <a:cs typeface="Century Schoolbook" pitchFamily="34" charset="-120"/>
+                  <a:srgbClr val="0F7A8C"/>
+                </a:solidFill>
+                <a:latin typeface="Cambria" pitchFamily="34" charset="0"/>
+                <a:ea typeface="Cambria" pitchFamily="34" charset="-122"/>
+                <a:cs typeface="Cambria" pitchFamily="34" charset="-120"/>
+              </a:rPr>
+              <a:t>01</a:t>
+            </a:r>
+            <a:endParaRPr lang="en-US" sz="3000" dirty="0"/>
+          </a:p>
+        </p:txBody>
+      </p:sp>
+      <p:sp>
+        <p:nvSpPr>
+          <p:cNvPr id="5" name="Text 3"/>
+          <p:cNvSpPr/>
+          <p:nvPr/>
+        </p:nvSpPr>
+        <p:spPr>
+          <a:xfrm>
+            <a:off x="1645920" y="905256"/>
+            <a:ext cx="9768535" cy="274320"/>
+          </a:xfrm>
+          <a:prstGeom prst="rect">
+            <a:avLst/>
+          </a:prstGeom>
+          <a:noFill/>
+          <a:ln/>
+        </p:spPr>
+        <p:txBody>
+          <a:bodyPr wrap="square" lIns="0" tIns="0" rIns="0" bIns="0" rtlCol="0" anchor="ctr"/>
+          <a:lstStyle/>
+          <a:p>
+            <a:pPr indent="0" marL="0">
+              <a:buNone/>
+            </a:pPr>
+            <a:r>
+              <a:rPr lang="en-US" sz="1100" b="1" spc="200" kern="0" dirty="0">
+                <a:solidFill>
+                  <a:srgbClr val="8B98A6"/>
+                </a:solidFill>
+                <a:latin typeface="Calibri" pitchFamily="34" charset="0"/>
+                <a:ea typeface="Calibri" pitchFamily="34" charset="-122"/>
+                <a:cs typeface="Calibri" pitchFamily="34" charset="-120"/>
+              </a:rPr>
+              <a:t>ARCHITECTURE</a:t>
+            </a:r>
+            <a:endParaRPr lang="en-US" sz="1100" dirty="0"/>
+          </a:p>
+        </p:txBody>
+      </p:sp>
+      <p:sp>
+        <p:nvSpPr>
+          <p:cNvPr id="6" name="Text 4"/>
+          <p:cNvSpPr/>
+          <p:nvPr/>
+        </p:nvSpPr>
+        <p:spPr>
+          <a:xfrm>
+            <a:off x="777240" y="1380744"/>
+            <a:ext cx="10637215" cy="640080"/>
+          </a:xfrm>
+          <a:prstGeom prst="rect">
+            <a:avLst/>
+          </a:prstGeom>
+          <a:noFill/>
+          <a:ln/>
+        </p:spPr>
+        <p:txBody>
+          <a:bodyPr wrap="square" lIns="0" tIns="0" rIns="0" bIns="0" rtlCol="0" anchor="ctr"/>
+          <a:lstStyle/>
+          <a:p>
+            <a:pPr indent="0" marL="0">
+              <a:buNone/>
+            </a:pPr>
+            <a:r>
+              <a:rPr lang="en-US" sz="2300" b="1" dirty="0">
+                <a:solidFill>
+                  <a:srgbClr val="EEF2F6"/>
+                </a:solidFill>
+                <a:latin typeface="Cambria" pitchFamily="34" charset="0"/>
+                <a:ea typeface="Cambria" pitchFamily="34" charset="-122"/>
+                <a:cs typeface="Cambria" pitchFamily="34" charset="-120"/>
               </a:rPr>
               <a:t>What I Built — Bedside to Cloud</a:t>
             </a:r>
-            <a:endParaRPr lang="en-US" sz="3000" dirty="0"/>
-          </a:p>
-        </p:txBody>
-      </p:sp>
-      <p:sp>
-        <p:nvSpPr>
-          <p:cNvPr id="3" name="Shape 1"/>
-          <p:cNvSpPr/>
-          <p:nvPr/>
-        </p:nvSpPr>
-        <p:spPr>
-          <a:xfrm>
-            <a:off x="3992728" y="1234440"/>
-            <a:ext cx="4206240" cy="658368"/>
+            <a:endParaRPr lang="en-US" sz="2300" dirty="0"/>
+          </a:p>
+        </p:txBody>
+      </p:sp>
+      <p:sp>
+        <p:nvSpPr>
+          <p:cNvPr id="7" name="Shape 5"/>
+          <p:cNvSpPr/>
+          <p:nvPr/>
+        </p:nvSpPr>
+        <p:spPr>
+          <a:xfrm>
+            <a:off x="777240" y="2971800"/>
+            <a:ext cx="1391869" cy="1965960"/>
           </a:xfrm>
           <a:prstGeom prst="roundRect">
             <a:avLst>
-              <a:gd name="adj" fmla="val 11111"/>
+              <a:gd name="adj" fmla="val 2628"/>
             </a:avLst>
           </a:prstGeom>
           <a:solidFill>
-            <a:srgbClr val="EEF6F7"/>
-          </a:solidFill>
-          <a:ln w="17780">
+            <a:srgbClr val="0F7A8C"/>
+          </a:solidFill>
+          <a:ln w="12700">
             <a:solidFill>
-              <a:srgbClr val="4FA5B3"/>
+              <a:srgbClr val="0F7A8C"/>
             </a:solidFill>
             <a:prstDash val="solid"/>
           </a:ln>
@@ -1527,34 +1523,14 @@
       </p:sp>
       <p:sp>
         <p:nvSpPr>
-          <p:cNvPr id="4" name="Shape 2"/>
-          <p:cNvSpPr/>
-          <p:nvPr/>
-        </p:nvSpPr>
-        <p:spPr>
-          <a:xfrm>
-            <a:off x="4193896" y="1481328"/>
-            <a:ext cx="164592" cy="164592"/>
-          </a:xfrm>
-          <a:prstGeom prst="ellipse">
-            <a:avLst/>
-          </a:prstGeom>
-          <a:solidFill>
-            <a:srgbClr val="4FA5B3"/>
-          </a:solidFill>
-          <a:ln/>
-        </p:spPr>
-      </p:sp>
-      <p:sp>
-        <p:nvSpPr>
-          <p:cNvPr id="5" name="Text 3"/>
-          <p:cNvSpPr/>
-          <p:nvPr/>
-        </p:nvSpPr>
-        <p:spPr>
-          <a:xfrm>
-            <a:off x="4495648" y="1234440"/>
-            <a:ext cx="2194560" cy="658368"/>
+          <p:cNvPr id="8" name="Text 6"/>
+          <p:cNvSpPr/>
+          <p:nvPr/>
+        </p:nvSpPr>
+        <p:spPr>
+          <a:xfrm>
+            <a:off x="923544" y="3154680"/>
+            <a:ext cx="1099261" cy="320040"/>
           </a:xfrm>
           <a:prstGeom prst="rect">
             <a:avLst/>
@@ -1570,30 +1546,158 @@
               <a:buNone/>
             </a:pPr>
             <a:r>
-              <a:rPr lang="en-US" sz="1350" b="1" dirty="0">
-                <a:solidFill>
-                  <a:srgbClr val="12313A"/>
+              <a:rPr lang="en-US" sz="1100" dirty="0">
+                <a:solidFill>
+                  <a:srgbClr val="FFFFFF"/>
+                </a:solidFill>
+                <a:latin typeface="Consolas" pitchFamily="34" charset="0"/>
+                <a:ea typeface="Consolas" pitchFamily="34" charset="-122"/>
+                <a:cs typeface="Consolas" pitchFamily="34" charset="-120"/>
+              </a:rPr>
+              <a:t>01</a:t>
+            </a:r>
+            <a:endParaRPr lang="en-US" sz="1100" dirty="0"/>
+          </a:p>
+        </p:txBody>
+      </p:sp>
+      <p:sp>
+        <p:nvSpPr>
+          <p:cNvPr id="9" name="Text 7"/>
+          <p:cNvSpPr/>
+          <p:nvPr/>
+        </p:nvSpPr>
+        <p:spPr>
+          <a:xfrm>
+            <a:off x="923544" y="3593592"/>
+            <a:ext cx="1099261" cy="868680"/>
+          </a:xfrm>
+          <a:prstGeom prst="rect">
+            <a:avLst/>
+          </a:prstGeom>
+          <a:noFill/>
+          <a:ln/>
+        </p:spPr>
+        <p:txBody>
+          <a:bodyPr wrap="square" lIns="0" tIns="0" rIns="0" bIns="0" rtlCol="0" anchor="t"/>
+          <a:lstStyle/>
+          <a:p>
+            <a:pPr indent="0" marL="0">
+              <a:lnSpc>
+                <a:spcPct val="96000"/>
+              </a:lnSpc>
+              <a:buNone/>
+            </a:pPr>
+            <a:r>
+              <a:rPr lang="en-US" sz="1300" b="1" dirty="0">
+                <a:solidFill>
+                  <a:srgbClr val="FFFFFF"/>
+                </a:solidFill>
+                <a:latin typeface="Cambria" pitchFamily="34" charset="0"/>
+                <a:ea typeface="Cambria" pitchFamily="34" charset="-122"/>
+                <a:cs typeface="Cambria" pitchFamily="34" charset="-120"/>
+              </a:rPr>
+              <a:t>Bedside sensors</a:t>
+            </a:r>
+            <a:endParaRPr lang="en-US" sz="1300" dirty="0"/>
+          </a:p>
+        </p:txBody>
+      </p:sp>
+      <p:sp>
+        <p:nvSpPr>
+          <p:cNvPr id="10" name="Text 8"/>
+          <p:cNvSpPr/>
+          <p:nvPr/>
+        </p:nvSpPr>
+        <p:spPr>
+          <a:xfrm>
+            <a:off x="923544" y="4453128"/>
+            <a:ext cx="1099261" cy="365760"/>
+          </a:xfrm>
+          <a:prstGeom prst="rect">
+            <a:avLst/>
+          </a:prstGeom>
+          <a:noFill/>
+          <a:ln/>
+        </p:spPr>
+        <p:txBody>
+          <a:bodyPr wrap="square" lIns="0" tIns="0" rIns="0" bIns="0" rtlCol="0" anchor="ctr"/>
+          <a:lstStyle/>
+          <a:p>
+            <a:pPr indent="0" marL="0">
+              <a:buNone/>
+            </a:pPr>
+            <a:r>
+              <a:rPr lang="en-US" sz="900" dirty="0">
+                <a:solidFill>
+                  <a:srgbClr val="FFFFFF"/>
                 </a:solidFill>
                 <a:latin typeface="Calibri" pitchFamily="34" charset="0"/>
                 <a:ea typeface="Calibri" pitchFamily="34" charset="-122"/>
                 <a:cs typeface="Calibri" pitchFamily="34" charset="-120"/>
               </a:rPr>
-              <a:t>Bedside sensors</a:t>
-            </a:r>
-            <a:endParaRPr lang="en-US" sz="1350" dirty="0"/>
-          </a:p>
-        </p:txBody>
-      </p:sp>
-      <p:sp>
-        <p:nvSpPr>
-          <p:cNvPr id="6" name="Text 4"/>
-          <p:cNvSpPr/>
-          <p:nvPr/>
-        </p:nvSpPr>
-        <p:spPr>
-          <a:xfrm>
-            <a:off x="6644488" y="1234440"/>
-            <a:ext cx="1463040" cy="658368"/>
+              <a:t>10 streams · 2 patients</a:t>
+            </a:r>
+            <a:endParaRPr lang="en-US" sz="900" dirty="0"/>
+          </a:p>
+        </p:txBody>
+      </p:sp>
+      <p:sp>
+        <p:nvSpPr>
+          <p:cNvPr id="11" name="Shape 9"/>
+          <p:cNvSpPr/>
+          <p:nvPr/>
+        </p:nvSpPr>
+        <p:spPr>
+          <a:xfrm>
+            <a:off x="2242261" y="3845052"/>
+            <a:ext cx="310896" cy="219456"/>
+          </a:xfrm>
+          <a:prstGeom prst="rightArrow">
+            <a:avLst/>
+          </a:prstGeom>
+          <a:solidFill>
+            <a:srgbClr val="8B98A6"/>
+          </a:solidFill>
+          <a:ln/>
+        </p:spPr>
+      </p:sp>
+      <p:sp>
+        <p:nvSpPr>
+          <p:cNvPr id="12" name="Shape 10"/>
+          <p:cNvSpPr/>
+          <p:nvPr/>
+        </p:nvSpPr>
+        <p:spPr>
+          <a:xfrm>
+            <a:off x="2626309" y="2971800"/>
+            <a:ext cx="1391869" cy="1965960"/>
+          </a:xfrm>
+          <a:prstGeom prst="roundRect">
+            <a:avLst>
+              <a:gd name="adj" fmla="val 2628"/>
+            </a:avLst>
+          </a:prstGeom>
+          <a:solidFill>
+            <a:srgbClr val="0F7A8C"/>
+          </a:solidFill>
+          <a:ln w="12700">
+            <a:solidFill>
+              <a:srgbClr val="0F7A8C"/>
+            </a:solidFill>
+            <a:prstDash val="solid"/>
+          </a:ln>
+        </p:spPr>
+      </p:sp>
+      <p:sp>
+        <p:nvSpPr>
+          <p:cNvPr id="13" name="Text 11"/>
+          <p:cNvSpPr/>
+          <p:nvPr/>
+        </p:nvSpPr>
+        <p:spPr>
+          <a:xfrm>
+            <a:off x="2772613" y="3154680"/>
+            <a:ext cx="1099261" cy="320040"/>
           </a:xfrm>
           <a:prstGeom prst="rect">
             <a:avLst/>
@@ -1605,70 +1709,147 @@
           <a:bodyPr wrap="square" lIns="0" tIns="0" rIns="0" bIns="0" rtlCol="0" anchor="ctr"/>
           <a:lstStyle/>
           <a:p>
-            <a:pPr algn="r" indent="0" marL="0">
-              <a:buNone/>
-            </a:pPr>
-            <a:r>
-              <a:rPr lang="en-US" sz="950" dirty="0">
-                <a:solidFill>
-                  <a:srgbClr val="5A7178"/>
+            <a:pPr indent="0" marL="0">
+              <a:buNone/>
+            </a:pPr>
+            <a:r>
+              <a:rPr lang="en-US" sz="1100" dirty="0">
+                <a:solidFill>
+                  <a:srgbClr val="FFFFFF"/>
+                </a:solidFill>
+                <a:latin typeface="Consolas" pitchFamily="34" charset="0"/>
+                <a:ea typeface="Consolas" pitchFamily="34" charset="-122"/>
+                <a:cs typeface="Consolas" pitchFamily="34" charset="-120"/>
+              </a:rPr>
+              <a:t>02</a:t>
+            </a:r>
+            <a:endParaRPr lang="en-US" sz="1100" dirty="0"/>
+          </a:p>
+        </p:txBody>
+      </p:sp>
+      <p:sp>
+        <p:nvSpPr>
+          <p:cNvPr id="14" name="Text 12"/>
+          <p:cNvSpPr/>
+          <p:nvPr/>
+        </p:nvSpPr>
+        <p:spPr>
+          <a:xfrm>
+            <a:off x="2772613" y="3593592"/>
+            <a:ext cx="1099261" cy="868680"/>
+          </a:xfrm>
+          <a:prstGeom prst="rect">
+            <a:avLst/>
+          </a:prstGeom>
+          <a:noFill/>
+          <a:ln/>
+        </p:spPr>
+        <p:txBody>
+          <a:bodyPr wrap="square" lIns="0" tIns="0" rIns="0" bIns="0" rtlCol="0" anchor="t"/>
+          <a:lstStyle/>
+          <a:p>
+            <a:pPr indent="0" marL="0">
+              <a:lnSpc>
+                <a:spcPct val="96000"/>
+              </a:lnSpc>
+              <a:buNone/>
+            </a:pPr>
+            <a:r>
+              <a:rPr lang="en-US" sz="1300" b="1" dirty="0">
+                <a:solidFill>
+                  <a:srgbClr val="FFFFFF"/>
+                </a:solidFill>
+                <a:latin typeface="Cambria" pitchFamily="34" charset="0"/>
+                <a:ea typeface="Cambria" pitchFamily="34" charset="-122"/>
+                <a:cs typeface="Cambria" pitchFamily="34" charset="-120"/>
+              </a:rPr>
+              <a:t>Fog gateway</a:t>
+            </a:r>
+            <a:endParaRPr lang="en-US" sz="1300" dirty="0"/>
+          </a:p>
+        </p:txBody>
+      </p:sp>
+      <p:sp>
+        <p:nvSpPr>
+          <p:cNvPr id="15" name="Text 13"/>
+          <p:cNvSpPr/>
+          <p:nvPr/>
+        </p:nvSpPr>
+        <p:spPr>
+          <a:xfrm>
+            <a:off x="2772613" y="4453128"/>
+            <a:ext cx="1099261" cy="365760"/>
+          </a:xfrm>
+          <a:prstGeom prst="rect">
+            <a:avLst/>
+          </a:prstGeom>
+          <a:noFill/>
+          <a:ln/>
+        </p:spPr>
+        <p:txBody>
+          <a:bodyPr wrap="square" lIns="0" tIns="0" rIns="0" bIns="0" rtlCol="0" anchor="ctr"/>
+          <a:lstStyle/>
+          <a:p>
+            <a:pPr indent="0" marL="0">
+              <a:buNone/>
+            </a:pPr>
+            <a:r>
+              <a:rPr lang="en-US" sz="900" dirty="0">
+                <a:solidFill>
+                  <a:srgbClr val="FFFFFF"/>
                 </a:solidFill>
                 <a:latin typeface="Calibri" pitchFamily="34" charset="0"/>
                 <a:ea typeface="Calibri" pitchFamily="34" charset="-122"/>
                 <a:cs typeface="Calibri" pitchFamily="34" charset="-120"/>
               </a:rPr>
-              <a:t>10 streams · 2 patients</a:t>
-            </a:r>
-            <a:endParaRPr lang="en-US" sz="950" dirty="0"/>
-          </a:p>
-        </p:txBody>
-      </p:sp>
-      <p:sp>
-        <p:nvSpPr>
-          <p:cNvPr id="7" name="Shape 5"/>
-          <p:cNvSpPr/>
-          <p:nvPr/>
-        </p:nvSpPr>
-        <p:spPr>
-          <a:xfrm>
-            <a:off x="6095848" y="1892808"/>
-            <a:ext cx="0" cy="219456"/>
-          </a:xfrm>
-          <a:prstGeom prst="line">
-            <a:avLst/>
-          </a:prstGeom>
-          <a:noFill/>
-          <a:ln w="25400">
-            <a:solidFill>
-              <a:srgbClr val="4FA5B3"/>
-            </a:solidFill>
-            <a:prstDash val="solid"/>
-            <a:tailEnd type="triangle"/>
-          </a:ln>
-        </p:spPr>
-      </p:sp>
-      <p:sp>
-        <p:nvSpPr>
-          <p:cNvPr id="8" name="Shape 6"/>
-          <p:cNvSpPr/>
-          <p:nvPr/>
-        </p:nvSpPr>
-        <p:spPr>
-          <a:xfrm>
-            <a:off x="3992728" y="2112264"/>
-            <a:ext cx="4206240" cy="658368"/>
+              <a:t>10 s windows · clinical rules</a:t>
+            </a:r>
+            <a:endParaRPr lang="en-US" sz="900" dirty="0"/>
+          </a:p>
+        </p:txBody>
+      </p:sp>
+      <p:sp>
+        <p:nvSpPr>
+          <p:cNvPr id="16" name="Shape 14"/>
+          <p:cNvSpPr/>
+          <p:nvPr/>
+        </p:nvSpPr>
+        <p:spPr>
+          <a:xfrm>
+            <a:off x="4091330" y="3845052"/>
+            <a:ext cx="310896" cy="219456"/>
+          </a:xfrm>
+          <a:prstGeom prst="rightArrow">
+            <a:avLst/>
+          </a:prstGeom>
+          <a:solidFill>
+            <a:srgbClr val="8B98A6"/>
+          </a:solidFill>
+          <a:ln/>
+        </p:spPr>
+      </p:sp>
+      <p:sp>
+        <p:nvSpPr>
+          <p:cNvPr id="17" name="Shape 15"/>
+          <p:cNvSpPr/>
+          <p:nvPr/>
+        </p:nvSpPr>
+        <p:spPr>
+          <a:xfrm>
+            <a:off x="4475378" y="2971800"/>
+            <a:ext cx="1391869" cy="1965960"/>
           </a:xfrm>
           <a:prstGeom prst="roundRect">
             <a:avLst>
-              <a:gd name="adj" fmla="val 11111"/>
+              <a:gd name="adj" fmla="val 2628"/>
             </a:avLst>
           </a:prstGeom>
           <a:solidFill>
-            <a:srgbClr val="EEF6F7"/>
-          </a:solidFill>
-          <a:ln w="17780">
+            <a:srgbClr val="2A3F47"/>
+          </a:solidFill>
+          <a:ln w="12700">
             <a:solidFill>
-              <a:srgbClr val="4FA5B3"/>
+              <a:srgbClr val="3E535B"/>
             </a:solidFill>
             <a:prstDash val="solid"/>
           </a:ln>
@@ -1676,34 +1857,14 @@
       </p:sp>
       <p:sp>
         <p:nvSpPr>
-          <p:cNvPr id="9" name="Shape 7"/>
-          <p:cNvSpPr/>
-          <p:nvPr/>
-        </p:nvSpPr>
-        <p:spPr>
-          <a:xfrm>
-            <a:off x="4193896" y="2359152"/>
-            <a:ext cx="164592" cy="164592"/>
-          </a:xfrm>
-          <a:prstGeom prst="ellipse">
-            <a:avLst/>
-          </a:prstGeom>
-          <a:solidFill>
-            <a:srgbClr val="4FA5B3"/>
-          </a:solidFill>
-          <a:ln/>
-        </p:spPr>
-      </p:sp>
-      <p:sp>
-        <p:nvSpPr>
-          <p:cNvPr id="10" name="Text 8"/>
-          <p:cNvSpPr/>
-          <p:nvPr/>
-        </p:nvSpPr>
-        <p:spPr>
-          <a:xfrm>
-            <a:off x="4495648" y="2112264"/>
-            <a:ext cx="2194560" cy="658368"/>
+          <p:cNvPr id="18" name="Text 16"/>
+          <p:cNvSpPr/>
+          <p:nvPr/>
+        </p:nvSpPr>
+        <p:spPr>
+          <a:xfrm>
+            <a:off x="4621682" y="3154680"/>
+            <a:ext cx="1099261" cy="320040"/>
           </a:xfrm>
           <a:prstGeom prst="rect">
             <a:avLst/>
@@ -1719,30 +1880,158 @@
               <a:buNone/>
             </a:pPr>
             <a:r>
-              <a:rPr lang="en-US" sz="1350" b="1" dirty="0">
-                <a:solidFill>
-                  <a:srgbClr val="12313A"/>
+              <a:rPr lang="en-US" sz="1100" dirty="0">
+                <a:solidFill>
+                  <a:srgbClr val="0F7A8C"/>
+                </a:solidFill>
+                <a:latin typeface="Consolas" pitchFamily="34" charset="0"/>
+                <a:ea typeface="Consolas" pitchFamily="34" charset="-122"/>
+                <a:cs typeface="Consolas" pitchFamily="34" charset="-120"/>
+              </a:rPr>
+              <a:t>03</a:t>
+            </a:r>
+            <a:endParaRPr lang="en-US" sz="1100" dirty="0"/>
+          </a:p>
+        </p:txBody>
+      </p:sp>
+      <p:sp>
+        <p:nvSpPr>
+          <p:cNvPr id="19" name="Text 17"/>
+          <p:cNvSpPr/>
+          <p:nvPr/>
+        </p:nvSpPr>
+        <p:spPr>
+          <a:xfrm>
+            <a:off x="4621682" y="3593592"/>
+            <a:ext cx="1099261" cy="868680"/>
+          </a:xfrm>
+          <a:prstGeom prst="rect">
+            <a:avLst/>
+          </a:prstGeom>
+          <a:noFill/>
+          <a:ln/>
+        </p:spPr>
+        <p:txBody>
+          <a:bodyPr wrap="square" lIns="0" tIns="0" rIns="0" bIns="0" rtlCol="0" anchor="t"/>
+          <a:lstStyle/>
+          <a:p>
+            <a:pPr indent="0" marL="0">
+              <a:lnSpc>
+                <a:spcPct val="96000"/>
+              </a:lnSpc>
+              <a:buNone/>
+            </a:pPr>
+            <a:r>
+              <a:rPr lang="en-US" sz="1300" b="1" dirty="0">
+                <a:solidFill>
+                  <a:srgbClr val="EEF2F6"/>
+                </a:solidFill>
+                <a:latin typeface="Cambria" pitchFamily="34" charset="0"/>
+                <a:ea typeface="Cambria" pitchFamily="34" charset="-122"/>
+                <a:cs typeface="Cambria" pitchFamily="34" charset="-120"/>
+              </a:rPr>
+              <a:t>Amazon SQS</a:t>
+            </a:r>
+            <a:endParaRPr lang="en-US" sz="1300" dirty="0"/>
+          </a:p>
+        </p:txBody>
+      </p:sp>
+      <p:sp>
+        <p:nvSpPr>
+          <p:cNvPr id="20" name="Text 18"/>
+          <p:cNvSpPr/>
+          <p:nvPr/>
+        </p:nvSpPr>
+        <p:spPr>
+          <a:xfrm>
+            <a:off x="4621682" y="4453128"/>
+            <a:ext cx="1099261" cy="365760"/>
+          </a:xfrm>
+          <a:prstGeom prst="rect">
+            <a:avLst/>
+          </a:prstGeom>
+          <a:noFill/>
+          <a:ln/>
+        </p:spPr>
+        <p:txBody>
+          <a:bodyPr wrap="square" lIns="0" tIns="0" rIns="0" bIns="0" rtlCol="0" anchor="ctr"/>
+          <a:lstStyle/>
+          <a:p>
+            <a:pPr indent="0" marL="0">
+              <a:buNone/>
+            </a:pPr>
+            <a:r>
+              <a:rPr lang="en-US" sz="900" dirty="0">
+                <a:solidFill>
+                  <a:srgbClr val="8B98A6"/>
                 </a:solidFill>
                 <a:latin typeface="Calibri" pitchFamily="34" charset="0"/>
                 <a:ea typeface="Calibri" pitchFamily="34" charset="-122"/>
                 <a:cs typeface="Calibri" pitchFamily="34" charset="-120"/>
               </a:rPr>
-              <a:t>Fog gateway</a:t>
-            </a:r>
-            <a:endParaRPr lang="en-US" sz="1350" dirty="0"/>
-          </a:p>
-        </p:txBody>
-      </p:sp>
-      <p:sp>
-        <p:nvSpPr>
-          <p:cNvPr id="11" name="Text 9"/>
-          <p:cNvSpPr/>
-          <p:nvPr/>
-        </p:nvSpPr>
-        <p:spPr>
-          <a:xfrm>
-            <a:off x="6644488" y="2112264"/>
-            <a:ext cx="1463040" cy="658368"/>
+              <a:t>batched aggregates</a:t>
+            </a:r>
+            <a:endParaRPr lang="en-US" sz="900" dirty="0"/>
+          </a:p>
+        </p:txBody>
+      </p:sp>
+      <p:sp>
+        <p:nvSpPr>
+          <p:cNvPr id="21" name="Shape 19"/>
+          <p:cNvSpPr/>
+          <p:nvPr/>
+        </p:nvSpPr>
+        <p:spPr>
+          <a:xfrm>
+            <a:off x="5940400" y="3845052"/>
+            <a:ext cx="310896" cy="219456"/>
+          </a:xfrm>
+          <a:prstGeom prst="rightArrow">
+            <a:avLst/>
+          </a:prstGeom>
+          <a:solidFill>
+            <a:srgbClr val="8B98A6"/>
+          </a:solidFill>
+          <a:ln/>
+        </p:spPr>
+      </p:sp>
+      <p:sp>
+        <p:nvSpPr>
+          <p:cNvPr id="22" name="Shape 20"/>
+          <p:cNvSpPr/>
+          <p:nvPr/>
+        </p:nvSpPr>
+        <p:spPr>
+          <a:xfrm>
+            <a:off x="6324448" y="2971800"/>
+            <a:ext cx="1391869" cy="1965960"/>
+          </a:xfrm>
+          <a:prstGeom prst="roundRect">
+            <a:avLst>
+              <a:gd name="adj" fmla="val 2628"/>
+            </a:avLst>
+          </a:prstGeom>
+          <a:solidFill>
+            <a:srgbClr val="2A3F47"/>
+          </a:solidFill>
+          <a:ln w="12700">
+            <a:solidFill>
+              <a:srgbClr val="3E535B"/>
+            </a:solidFill>
+            <a:prstDash val="solid"/>
+          </a:ln>
+        </p:spPr>
+      </p:sp>
+      <p:sp>
+        <p:nvSpPr>
+          <p:cNvPr id="23" name="Text 21"/>
+          <p:cNvSpPr/>
+          <p:nvPr/>
+        </p:nvSpPr>
+        <p:spPr>
+          <a:xfrm>
+            <a:off x="6470752" y="3154680"/>
+            <a:ext cx="1099261" cy="320040"/>
           </a:xfrm>
           <a:prstGeom prst="rect">
             <a:avLst/>
@@ -1754,70 +2043,147 @@
           <a:bodyPr wrap="square" lIns="0" tIns="0" rIns="0" bIns="0" rtlCol="0" anchor="ctr"/>
           <a:lstStyle/>
           <a:p>
-            <a:pPr algn="r" indent="0" marL="0">
-              <a:buNone/>
-            </a:pPr>
-            <a:r>
-              <a:rPr lang="en-US" sz="950" dirty="0">
-                <a:solidFill>
-                  <a:srgbClr val="5A7178"/>
+            <a:pPr indent="0" marL="0">
+              <a:buNone/>
+            </a:pPr>
+            <a:r>
+              <a:rPr lang="en-US" sz="1100" dirty="0">
+                <a:solidFill>
+                  <a:srgbClr val="0F7A8C"/>
+                </a:solidFill>
+                <a:latin typeface="Consolas" pitchFamily="34" charset="0"/>
+                <a:ea typeface="Consolas" pitchFamily="34" charset="-122"/>
+                <a:cs typeface="Consolas" pitchFamily="34" charset="-120"/>
+              </a:rPr>
+              <a:t>04</a:t>
+            </a:r>
+            <a:endParaRPr lang="en-US" sz="1100" dirty="0"/>
+          </a:p>
+        </p:txBody>
+      </p:sp>
+      <p:sp>
+        <p:nvSpPr>
+          <p:cNvPr id="24" name="Text 22"/>
+          <p:cNvSpPr/>
+          <p:nvPr/>
+        </p:nvSpPr>
+        <p:spPr>
+          <a:xfrm>
+            <a:off x="6470752" y="3593592"/>
+            <a:ext cx="1099261" cy="868680"/>
+          </a:xfrm>
+          <a:prstGeom prst="rect">
+            <a:avLst/>
+          </a:prstGeom>
+          <a:noFill/>
+          <a:ln/>
+        </p:spPr>
+        <p:txBody>
+          <a:bodyPr wrap="square" lIns="0" tIns="0" rIns="0" bIns="0" rtlCol="0" anchor="t"/>
+          <a:lstStyle/>
+          <a:p>
+            <a:pPr indent="0" marL="0">
+              <a:lnSpc>
+                <a:spcPct val="96000"/>
+              </a:lnSpc>
+              <a:buNone/>
+            </a:pPr>
+            <a:r>
+              <a:rPr lang="en-US" sz="1300" b="1" dirty="0">
+                <a:solidFill>
+                  <a:srgbClr val="EEF2F6"/>
+                </a:solidFill>
+                <a:latin typeface="Cambria" pitchFamily="34" charset="0"/>
+                <a:ea typeface="Cambria" pitchFamily="34" charset="-122"/>
+                <a:cs typeface="Cambria" pitchFamily="34" charset="-120"/>
+              </a:rPr>
+              <a:t>AWS Lambda</a:t>
+            </a:r>
+            <a:endParaRPr lang="en-US" sz="1300" dirty="0"/>
+          </a:p>
+        </p:txBody>
+      </p:sp>
+      <p:sp>
+        <p:nvSpPr>
+          <p:cNvPr id="25" name="Text 23"/>
+          <p:cNvSpPr/>
+          <p:nvPr/>
+        </p:nvSpPr>
+        <p:spPr>
+          <a:xfrm>
+            <a:off x="6470752" y="4453128"/>
+            <a:ext cx="1099261" cy="365760"/>
+          </a:xfrm>
+          <a:prstGeom prst="rect">
+            <a:avLst/>
+          </a:prstGeom>
+          <a:noFill/>
+          <a:ln/>
+        </p:spPr>
+        <p:txBody>
+          <a:bodyPr wrap="square" lIns="0" tIns="0" rIns="0" bIns="0" rtlCol="0" anchor="ctr"/>
+          <a:lstStyle/>
+          <a:p>
+            <a:pPr indent="0" marL="0">
+              <a:buNone/>
+            </a:pPr>
+            <a:r>
+              <a:rPr lang="en-US" sz="900" dirty="0">
+                <a:solidFill>
+                  <a:srgbClr val="8B98A6"/>
                 </a:solidFill>
                 <a:latin typeface="Calibri" pitchFamily="34" charset="0"/>
                 <a:ea typeface="Calibri" pitchFamily="34" charset="-122"/>
                 <a:cs typeface="Calibri" pitchFamily="34" charset="-120"/>
               </a:rPr>
-              <a:t>10 s windows · clinical rules</a:t>
-            </a:r>
-            <a:endParaRPr lang="en-US" sz="950" dirty="0"/>
-          </a:p>
-        </p:txBody>
-      </p:sp>
-      <p:sp>
-        <p:nvSpPr>
-          <p:cNvPr id="12" name="Shape 10"/>
-          <p:cNvSpPr/>
-          <p:nvPr/>
-        </p:nvSpPr>
-        <p:spPr>
-          <a:xfrm>
-            <a:off x="6095848" y="2770632"/>
-            <a:ext cx="0" cy="219456"/>
-          </a:xfrm>
-          <a:prstGeom prst="line">
-            <a:avLst/>
-          </a:prstGeom>
-          <a:noFill/>
-          <a:ln w="25400">
-            <a:solidFill>
-              <a:srgbClr val="4FA5B3"/>
-            </a:solidFill>
-            <a:prstDash val="solid"/>
-            <a:tailEnd type="triangle"/>
-          </a:ln>
-        </p:spPr>
-      </p:sp>
-      <p:sp>
-        <p:nvSpPr>
-          <p:cNvPr id="13" name="Shape 11"/>
-          <p:cNvSpPr/>
-          <p:nvPr/>
-        </p:nvSpPr>
-        <p:spPr>
-          <a:xfrm>
-            <a:off x="3992728" y="2990088"/>
-            <a:ext cx="4206240" cy="658368"/>
+              <a:t>nodejs20 ingest</a:t>
+            </a:r>
+            <a:endParaRPr lang="en-US" sz="900" dirty="0"/>
+          </a:p>
+        </p:txBody>
+      </p:sp>
+      <p:sp>
+        <p:nvSpPr>
+          <p:cNvPr id="26" name="Shape 24"/>
+          <p:cNvSpPr/>
+          <p:nvPr/>
+        </p:nvSpPr>
+        <p:spPr>
+          <a:xfrm>
+            <a:off x="7789469" y="3845052"/>
+            <a:ext cx="310896" cy="219456"/>
+          </a:xfrm>
+          <a:prstGeom prst="rightArrow">
+            <a:avLst/>
+          </a:prstGeom>
+          <a:solidFill>
+            <a:srgbClr val="8B98A6"/>
+          </a:solidFill>
+          <a:ln/>
+        </p:spPr>
+      </p:sp>
+      <p:sp>
+        <p:nvSpPr>
+          <p:cNvPr id="27" name="Shape 25"/>
+          <p:cNvSpPr/>
+          <p:nvPr/>
+        </p:nvSpPr>
+        <p:spPr>
+          <a:xfrm>
+            <a:off x="8173517" y="2971800"/>
+            <a:ext cx="1391869" cy="1965960"/>
           </a:xfrm>
           <a:prstGeom prst="roundRect">
             <a:avLst>
-              <a:gd name="adj" fmla="val 11111"/>
+              <a:gd name="adj" fmla="val 2628"/>
             </a:avLst>
           </a:prstGeom>
           <a:solidFill>
-            <a:srgbClr val="EEF6F7"/>
-          </a:solidFill>
-          <a:ln w="17780">
+            <a:srgbClr val="2A3F47"/>
+          </a:solidFill>
+          <a:ln w="12700">
             <a:solidFill>
-              <a:srgbClr val="0F6E7E"/>
+              <a:srgbClr val="3E535B"/>
             </a:solidFill>
             <a:prstDash val="solid"/>
           </a:ln>
@@ -1825,34 +2191,14 @@
       </p:sp>
       <p:sp>
         <p:nvSpPr>
-          <p:cNvPr id="14" name="Shape 12"/>
-          <p:cNvSpPr/>
-          <p:nvPr/>
-        </p:nvSpPr>
-        <p:spPr>
-          <a:xfrm>
-            <a:off x="4193896" y="3236976"/>
-            <a:ext cx="164592" cy="164592"/>
-          </a:xfrm>
-          <a:prstGeom prst="ellipse">
-            <a:avLst/>
-          </a:prstGeom>
-          <a:solidFill>
-            <a:srgbClr val="0F6E7E"/>
-          </a:solidFill>
-          <a:ln/>
-        </p:spPr>
-      </p:sp>
-      <p:sp>
-        <p:nvSpPr>
-          <p:cNvPr id="15" name="Text 13"/>
-          <p:cNvSpPr/>
-          <p:nvPr/>
-        </p:nvSpPr>
-        <p:spPr>
-          <a:xfrm>
-            <a:off x="4495648" y="2990088"/>
-            <a:ext cx="2194560" cy="658368"/>
+          <p:cNvPr id="28" name="Text 26"/>
+          <p:cNvSpPr/>
+          <p:nvPr/>
+        </p:nvSpPr>
+        <p:spPr>
+          <a:xfrm>
+            <a:off x="8319821" y="3154680"/>
+            <a:ext cx="1099261" cy="320040"/>
           </a:xfrm>
           <a:prstGeom prst="rect">
             <a:avLst/>
@@ -1868,30 +2214,158 @@
               <a:buNone/>
             </a:pPr>
             <a:r>
-              <a:rPr lang="en-US" sz="1350" b="1" dirty="0">
-                <a:solidFill>
-                  <a:srgbClr val="12313A"/>
+              <a:rPr lang="en-US" sz="1100" dirty="0">
+                <a:solidFill>
+                  <a:srgbClr val="0F7A8C"/>
+                </a:solidFill>
+                <a:latin typeface="Consolas" pitchFamily="34" charset="0"/>
+                <a:ea typeface="Consolas" pitchFamily="34" charset="-122"/>
+                <a:cs typeface="Consolas" pitchFamily="34" charset="-120"/>
+              </a:rPr>
+              <a:t>05</a:t>
+            </a:r>
+            <a:endParaRPr lang="en-US" sz="1100" dirty="0"/>
+          </a:p>
+        </p:txBody>
+      </p:sp>
+      <p:sp>
+        <p:nvSpPr>
+          <p:cNvPr id="29" name="Text 27"/>
+          <p:cNvSpPr/>
+          <p:nvPr/>
+        </p:nvSpPr>
+        <p:spPr>
+          <a:xfrm>
+            <a:off x="8319821" y="3593592"/>
+            <a:ext cx="1099261" cy="868680"/>
+          </a:xfrm>
+          <a:prstGeom prst="rect">
+            <a:avLst/>
+          </a:prstGeom>
+          <a:noFill/>
+          <a:ln/>
+        </p:spPr>
+        <p:txBody>
+          <a:bodyPr wrap="square" lIns="0" tIns="0" rIns="0" bIns="0" rtlCol="0" anchor="t"/>
+          <a:lstStyle/>
+          <a:p>
+            <a:pPr indent="0" marL="0">
+              <a:lnSpc>
+                <a:spcPct val="96000"/>
+              </a:lnSpc>
+              <a:buNone/>
+            </a:pPr>
+            <a:r>
+              <a:rPr lang="en-US" sz="1300" b="1" dirty="0">
+                <a:solidFill>
+                  <a:srgbClr val="EEF2F6"/>
+                </a:solidFill>
+                <a:latin typeface="Cambria" pitchFamily="34" charset="0"/>
+                <a:ea typeface="Cambria" pitchFamily="34" charset="-122"/>
+                <a:cs typeface="Cambria" pitchFamily="34" charset="-120"/>
+              </a:rPr>
+              <a:t>DynamoDB</a:t>
+            </a:r>
+            <a:endParaRPr lang="en-US" sz="1300" dirty="0"/>
+          </a:p>
+        </p:txBody>
+      </p:sp>
+      <p:sp>
+        <p:nvSpPr>
+          <p:cNvPr id="30" name="Text 28"/>
+          <p:cNvSpPr/>
+          <p:nvPr/>
+        </p:nvSpPr>
+        <p:spPr>
+          <a:xfrm>
+            <a:off x="8319821" y="4453128"/>
+            <a:ext cx="1099261" cy="365760"/>
+          </a:xfrm>
+          <a:prstGeom prst="rect">
+            <a:avLst/>
+          </a:prstGeom>
+          <a:noFill/>
+          <a:ln/>
+        </p:spPr>
+        <p:txBody>
+          <a:bodyPr wrap="square" lIns="0" tIns="0" rIns="0" bIns="0" rtlCol="0" anchor="ctr"/>
+          <a:lstStyle/>
+          <a:p>
+            <a:pPr indent="0" marL="0">
+              <a:buNone/>
+            </a:pPr>
+            <a:r>
+              <a:rPr lang="en-US" sz="900" dirty="0">
+                <a:solidFill>
+                  <a:srgbClr val="8B98A6"/>
                 </a:solidFill>
                 <a:latin typeface="Calibri" pitchFamily="34" charset="0"/>
                 <a:ea typeface="Calibri" pitchFamily="34" charset="-122"/>
                 <a:cs typeface="Calibri" pitchFamily="34" charset="-120"/>
               </a:rPr>
-              <a:t>Amazon SQS</a:t>
-            </a:r>
-            <a:endParaRPr lang="en-US" sz="1350" dirty="0"/>
-          </a:p>
-        </p:txBody>
-      </p:sp>
-      <p:sp>
-        <p:nvSpPr>
-          <p:cNvPr id="16" name="Text 14"/>
-          <p:cNvSpPr/>
-          <p:nvPr/>
-        </p:nvSpPr>
-        <p:spPr>
-          <a:xfrm>
-            <a:off x="6644488" y="2990088"/>
-            <a:ext cx="1463040" cy="658368"/>
+              <a:t>windowed records</a:t>
+            </a:r>
+            <a:endParaRPr lang="en-US" sz="900" dirty="0"/>
+          </a:p>
+        </p:txBody>
+      </p:sp>
+      <p:sp>
+        <p:nvSpPr>
+          <p:cNvPr id="31" name="Shape 29"/>
+          <p:cNvSpPr/>
+          <p:nvPr/>
+        </p:nvSpPr>
+        <p:spPr>
+          <a:xfrm>
+            <a:off x="9638538" y="3845052"/>
+            <a:ext cx="310896" cy="219456"/>
+          </a:xfrm>
+          <a:prstGeom prst="rightArrow">
+            <a:avLst/>
+          </a:prstGeom>
+          <a:solidFill>
+            <a:srgbClr val="8B98A6"/>
+          </a:solidFill>
+          <a:ln/>
+        </p:spPr>
+      </p:sp>
+      <p:sp>
+        <p:nvSpPr>
+          <p:cNvPr id="32" name="Shape 30"/>
+          <p:cNvSpPr/>
+          <p:nvPr/>
+        </p:nvSpPr>
+        <p:spPr>
+          <a:xfrm>
+            <a:off x="10022586" y="2971800"/>
+            <a:ext cx="1391869" cy="1965960"/>
+          </a:xfrm>
+          <a:prstGeom prst="roundRect">
+            <a:avLst>
+              <a:gd name="adj" fmla="val 2628"/>
+            </a:avLst>
+          </a:prstGeom>
+          <a:solidFill>
+            <a:srgbClr val="2A3F47"/>
+          </a:solidFill>
+          <a:ln w="12700">
+            <a:solidFill>
+              <a:srgbClr val="3E535B"/>
+            </a:solidFill>
+            <a:prstDash val="solid"/>
+          </a:ln>
+        </p:spPr>
+      </p:sp>
+      <p:sp>
+        <p:nvSpPr>
+          <p:cNvPr id="33" name="Text 31"/>
+          <p:cNvSpPr/>
+          <p:nvPr/>
+        </p:nvSpPr>
+        <p:spPr>
+          <a:xfrm>
+            <a:off x="10168890" y="3154680"/>
+            <a:ext cx="1099261" cy="320040"/>
           </a:xfrm>
           <a:prstGeom prst="rect">
             <a:avLst/>
@@ -1903,585 +2377,102 @@
           <a:bodyPr wrap="square" lIns="0" tIns="0" rIns="0" bIns="0" rtlCol="0" anchor="ctr"/>
           <a:lstStyle/>
           <a:p>
-            <a:pPr algn="r" indent="0" marL="0">
-              <a:buNone/>
-            </a:pPr>
-            <a:r>
-              <a:rPr lang="en-US" sz="950" dirty="0">
-                <a:solidFill>
-                  <a:srgbClr val="5A7178"/>
+            <a:pPr indent="0" marL="0">
+              <a:buNone/>
+            </a:pPr>
+            <a:r>
+              <a:rPr lang="en-US" sz="1100" dirty="0">
+                <a:solidFill>
+                  <a:srgbClr val="0F7A8C"/>
+                </a:solidFill>
+                <a:latin typeface="Consolas" pitchFamily="34" charset="0"/>
+                <a:ea typeface="Consolas" pitchFamily="34" charset="-122"/>
+                <a:cs typeface="Consolas" pitchFamily="34" charset="-120"/>
+              </a:rPr>
+              <a:t>06</a:t>
+            </a:r>
+            <a:endParaRPr lang="en-US" sz="1100" dirty="0"/>
+          </a:p>
+        </p:txBody>
+      </p:sp>
+      <p:sp>
+        <p:nvSpPr>
+          <p:cNvPr id="34" name="Text 32"/>
+          <p:cNvSpPr/>
+          <p:nvPr/>
+        </p:nvSpPr>
+        <p:spPr>
+          <a:xfrm>
+            <a:off x="10168890" y="3593592"/>
+            <a:ext cx="1099261" cy="868680"/>
+          </a:xfrm>
+          <a:prstGeom prst="rect">
+            <a:avLst/>
+          </a:prstGeom>
+          <a:noFill/>
+          <a:ln/>
+        </p:spPr>
+        <p:txBody>
+          <a:bodyPr wrap="square" lIns="0" tIns="0" rIns="0" bIns="0" rtlCol="0" anchor="t"/>
+          <a:lstStyle/>
+          <a:p>
+            <a:pPr indent="0" marL="0">
+              <a:lnSpc>
+                <a:spcPct val="96000"/>
+              </a:lnSpc>
+              <a:buNone/>
+            </a:pPr>
+            <a:r>
+              <a:rPr lang="en-US" sz="1300" b="1" dirty="0">
+                <a:solidFill>
+                  <a:srgbClr val="EEF2F6"/>
+                </a:solidFill>
+                <a:latin typeface="Cambria" pitchFamily="34" charset="0"/>
+                <a:ea typeface="Cambria" pitchFamily="34" charset="-122"/>
+                <a:cs typeface="Cambria" pitchFamily="34" charset="-120"/>
+              </a:rPr>
+              <a:t>API GW + S3</a:t>
+            </a:r>
+            <a:endParaRPr lang="en-US" sz="1300" dirty="0"/>
+          </a:p>
+        </p:txBody>
+      </p:sp>
+      <p:sp>
+        <p:nvSpPr>
+          <p:cNvPr id="35" name="Text 33"/>
+          <p:cNvSpPr/>
+          <p:nvPr/>
+        </p:nvSpPr>
+        <p:spPr>
+          <a:xfrm>
+            <a:off x="10168890" y="4453128"/>
+            <a:ext cx="1099261" cy="365760"/>
+          </a:xfrm>
+          <a:prstGeom prst="rect">
+            <a:avLst/>
+          </a:prstGeom>
+          <a:noFill/>
+          <a:ln/>
+        </p:spPr>
+        <p:txBody>
+          <a:bodyPr wrap="square" lIns="0" tIns="0" rIns="0" bIns="0" rtlCol="0" anchor="ctr"/>
+          <a:lstStyle/>
+          <a:p>
+            <a:pPr indent="0" marL="0">
+              <a:buNone/>
+            </a:pPr>
+            <a:r>
+              <a:rPr lang="en-US" sz="900" dirty="0">
+                <a:solidFill>
+                  <a:srgbClr val="8B98A6"/>
                 </a:solidFill>
                 <a:latin typeface="Calibri" pitchFamily="34" charset="0"/>
                 <a:ea typeface="Calibri" pitchFamily="34" charset="-122"/>
                 <a:cs typeface="Calibri" pitchFamily="34" charset="-120"/>
               </a:rPr>
-              <a:t>batched aggregates</a:t>
-            </a:r>
-            <a:endParaRPr lang="en-US" sz="950" dirty="0"/>
-          </a:p>
-        </p:txBody>
-      </p:sp>
-      <p:sp>
-        <p:nvSpPr>
-          <p:cNvPr id="17" name="Shape 15"/>
-          <p:cNvSpPr/>
-          <p:nvPr/>
-        </p:nvSpPr>
-        <p:spPr>
-          <a:xfrm>
-            <a:off x="6095848" y="3648456"/>
-            <a:ext cx="0" cy="219456"/>
-          </a:xfrm>
-          <a:prstGeom prst="line">
-            <a:avLst/>
-          </a:prstGeom>
-          <a:noFill/>
-          <a:ln w="25400">
-            <a:solidFill>
-              <a:srgbClr val="4FA5B3"/>
-            </a:solidFill>
-            <a:prstDash val="solid"/>
-            <a:tailEnd type="triangle"/>
-          </a:ln>
-        </p:spPr>
-      </p:sp>
-      <p:sp>
-        <p:nvSpPr>
-          <p:cNvPr id="18" name="Shape 16"/>
-          <p:cNvSpPr/>
-          <p:nvPr/>
-        </p:nvSpPr>
-        <p:spPr>
-          <a:xfrm>
-            <a:off x="3992728" y="3867912"/>
-            <a:ext cx="4206240" cy="658368"/>
-          </a:xfrm>
-          <a:prstGeom prst="roundRect">
-            <a:avLst>
-              <a:gd name="adj" fmla="val 11111"/>
-            </a:avLst>
-          </a:prstGeom>
-          <a:solidFill>
-            <a:srgbClr val="EEF6F7"/>
-          </a:solidFill>
-          <a:ln w="17780">
-            <a:solidFill>
-              <a:srgbClr val="0F6E7E"/>
-            </a:solidFill>
-            <a:prstDash val="solid"/>
-          </a:ln>
-        </p:spPr>
-      </p:sp>
-      <p:sp>
-        <p:nvSpPr>
-          <p:cNvPr id="19" name="Shape 17"/>
-          <p:cNvSpPr/>
-          <p:nvPr/>
-        </p:nvSpPr>
-        <p:spPr>
-          <a:xfrm>
-            <a:off x="4193896" y="4114800"/>
-            <a:ext cx="164592" cy="164592"/>
-          </a:xfrm>
-          <a:prstGeom prst="ellipse">
-            <a:avLst/>
-          </a:prstGeom>
-          <a:solidFill>
-            <a:srgbClr val="0F6E7E"/>
-          </a:solidFill>
-          <a:ln/>
-        </p:spPr>
-      </p:sp>
-      <p:sp>
-        <p:nvSpPr>
-          <p:cNvPr id="20" name="Text 18"/>
-          <p:cNvSpPr/>
-          <p:nvPr/>
-        </p:nvSpPr>
-        <p:spPr>
-          <a:xfrm>
-            <a:off x="4495648" y="3867912"/>
-            <a:ext cx="2194560" cy="658368"/>
-          </a:xfrm>
-          <a:prstGeom prst="rect">
-            <a:avLst/>
-          </a:prstGeom>
-          <a:noFill/>
-          <a:ln/>
-        </p:spPr>
-        <p:txBody>
-          <a:bodyPr wrap="square" lIns="0" tIns="0" rIns="0" bIns="0" rtlCol="0" anchor="ctr"/>
-          <a:lstStyle/>
-          <a:p>
-            <a:pPr indent="0" marL="0">
-              <a:buNone/>
-            </a:pPr>
-            <a:r>
-              <a:rPr lang="en-US" sz="1350" b="1" dirty="0">
-                <a:solidFill>
-                  <a:srgbClr val="12313A"/>
-                </a:solidFill>
-                <a:latin typeface="Calibri" pitchFamily="34" charset="0"/>
-                <a:ea typeface="Calibri" pitchFamily="34" charset="-122"/>
-                <a:cs typeface="Calibri" pitchFamily="34" charset="-120"/>
-              </a:rPr>
-              <a:t>AWS Lambda</a:t>
-            </a:r>
-            <a:endParaRPr lang="en-US" sz="1350" dirty="0"/>
-          </a:p>
-        </p:txBody>
-      </p:sp>
-      <p:sp>
-        <p:nvSpPr>
-          <p:cNvPr id="21" name="Text 19"/>
-          <p:cNvSpPr/>
-          <p:nvPr/>
-        </p:nvSpPr>
-        <p:spPr>
-          <a:xfrm>
-            <a:off x="6644488" y="3867912"/>
-            <a:ext cx="1463040" cy="658368"/>
-          </a:xfrm>
-          <a:prstGeom prst="rect">
-            <a:avLst/>
-          </a:prstGeom>
-          <a:noFill/>
-          <a:ln/>
-        </p:spPr>
-        <p:txBody>
-          <a:bodyPr wrap="square" lIns="0" tIns="0" rIns="0" bIns="0" rtlCol="0" anchor="ctr"/>
-          <a:lstStyle/>
-          <a:p>
-            <a:pPr algn="r" indent="0" marL="0">
-              <a:buNone/>
-            </a:pPr>
-            <a:r>
-              <a:rPr lang="en-US" sz="950" dirty="0">
-                <a:solidFill>
-                  <a:srgbClr val="5A7178"/>
-                </a:solidFill>
-                <a:latin typeface="Calibri" pitchFamily="34" charset="0"/>
-                <a:ea typeface="Calibri" pitchFamily="34" charset="-122"/>
-                <a:cs typeface="Calibri" pitchFamily="34" charset="-120"/>
-              </a:rPr>
-              <a:t>nodejs20 ingest</a:t>
-            </a:r>
-            <a:endParaRPr lang="en-US" sz="950" dirty="0"/>
-          </a:p>
-        </p:txBody>
-      </p:sp>
-      <p:sp>
-        <p:nvSpPr>
-          <p:cNvPr id="22" name="Shape 20"/>
-          <p:cNvSpPr/>
-          <p:nvPr/>
-        </p:nvSpPr>
-        <p:spPr>
-          <a:xfrm>
-            <a:off x="6095848" y="4526280"/>
-            <a:ext cx="0" cy="219456"/>
-          </a:xfrm>
-          <a:prstGeom prst="line">
-            <a:avLst/>
-          </a:prstGeom>
-          <a:noFill/>
-          <a:ln w="25400">
-            <a:solidFill>
-              <a:srgbClr val="4FA5B3"/>
-            </a:solidFill>
-            <a:prstDash val="solid"/>
-            <a:tailEnd type="triangle"/>
-          </a:ln>
-        </p:spPr>
-      </p:sp>
-      <p:sp>
-        <p:nvSpPr>
-          <p:cNvPr id="23" name="Shape 21"/>
-          <p:cNvSpPr/>
-          <p:nvPr/>
-        </p:nvSpPr>
-        <p:spPr>
-          <a:xfrm>
-            <a:off x="3992728" y="4745736"/>
-            <a:ext cx="4206240" cy="658368"/>
-          </a:xfrm>
-          <a:prstGeom prst="roundRect">
-            <a:avLst>
-              <a:gd name="adj" fmla="val 11111"/>
-            </a:avLst>
-          </a:prstGeom>
-          <a:solidFill>
-            <a:srgbClr val="EEF6F7"/>
-          </a:solidFill>
-          <a:ln w="17780">
-            <a:solidFill>
-              <a:srgbClr val="0F6E7E"/>
-            </a:solidFill>
-            <a:prstDash val="solid"/>
-          </a:ln>
-        </p:spPr>
-      </p:sp>
-      <p:sp>
-        <p:nvSpPr>
-          <p:cNvPr id="24" name="Shape 22"/>
-          <p:cNvSpPr/>
-          <p:nvPr/>
-        </p:nvSpPr>
-        <p:spPr>
-          <a:xfrm>
-            <a:off x="4193896" y="4992624"/>
-            <a:ext cx="164592" cy="164592"/>
-          </a:xfrm>
-          <a:prstGeom prst="ellipse">
-            <a:avLst/>
-          </a:prstGeom>
-          <a:solidFill>
-            <a:srgbClr val="0F6E7E"/>
-          </a:solidFill>
-          <a:ln/>
-        </p:spPr>
-      </p:sp>
-      <p:sp>
-        <p:nvSpPr>
-          <p:cNvPr id="25" name="Text 23"/>
-          <p:cNvSpPr/>
-          <p:nvPr/>
-        </p:nvSpPr>
-        <p:spPr>
-          <a:xfrm>
-            <a:off x="4495648" y="4745736"/>
-            <a:ext cx="2194560" cy="658368"/>
-          </a:xfrm>
-          <a:prstGeom prst="rect">
-            <a:avLst/>
-          </a:prstGeom>
-          <a:noFill/>
-          <a:ln/>
-        </p:spPr>
-        <p:txBody>
-          <a:bodyPr wrap="square" lIns="0" tIns="0" rIns="0" bIns="0" rtlCol="0" anchor="ctr"/>
-          <a:lstStyle/>
-          <a:p>
-            <a:pPr indent="0" marL="0">
-              <a:buNone/>
-            </a:pPr>
-            <a:r>
-              <a:rPr lang="en-US" sz="1350" b="1" dirty="0">
-                <a:solidFill>
-                  <a:srgbClr val="12313A"/>
-                </a:solidFill>
-                <a:latin typeface="Calibri" pitchFamily="34" charset="0"/>
-                <a:ea typeface="Calibri" pitchFamily="34" charset="-122"/>
-                <a:cs typeface="Calibri" pitchFamily="34" charset="-120"/>
-              </a:rPr>
-              <a:t>DynamoDB</a:t>
-            </a:r>
-            <a:endParaRPr lang="en-US" sz="1350" dirty="0"/>
-          </a:p>
-        </p:txBody>
-      </p:sp>
-      <p:sp>
-        <p:nvSpPr>
-          <p:cNvPr id="26" name="Text 24"/>
-          <p:cNvSpPr/>
-          <p:nvPr/>
-        </p:nvSpPr>
-        <p:spPr>
-          <a:xfrm>
-            <a:off x="6644488" y="4745736"/>
-            <a:ext cx="1463040" cy="658368"/>
-          </a:xfrm>
-          <a:prstGeom prst="rect">
-            <a:avLst/>
-          </a:prstGeom>
-          <a:noFill/>
-          <a:ln/>
-        </p:spPr>
-        <p:txBody>
-          <a:bodyPr wrap="square" lIns="0" tIns="0" rIns="0" bIns="0" rtlCol="0" anchor="ctr"/>
-          <a:lstStyle/>
-          <a:p>
-            <a:pPr algn="r" indent="0" marL="0">
-              <a:buNone/>
-            </a:pPr>
-            <a:r>
-              <a:rPr lang="en-US" sz="950" dirty="0">
-                <a:solidFill>
-                  <a:srgbClr val="5A7178"/>
-                </a:solidFill>
-                <a:latin typeface="Calibri" pitchFamily="34" charset="0"/>
-                <a:ea typeface="Calibri" pitchFamily="34" charset="-122"/>
-                <a:cs typeface="Calibri" pitchFamily="34" charset="-120"/>
-              </a:rPr>
-              <a:t>windowed records</a:t>
-            </a:r>
-            <a:endParaRPr lang="en-US" sz="950" dirty="0"/>
-          </a:p>
-        </p:txBody>
-      </p:sp>
-      <p:sp>
-        <p:nvSpPr>
-          <p:cNvPr id="27" name="Shape 25"/>
-          <p:cNvSpPr/>
-          <p:nvPr/>
-        </p:nvSpPr>
-        <p:spPr>
-          <a:xfrm>
-            <a:off x="6095848" y="5404104"/>
-            <a:ext cx="0" cy="219456"/>
-          </a:xfrm>
-          <a:prstGeom prst="line">
-            <a:avLst/>
-          </a:prstGeom>
-          <a:noFill/>
-          <a:ln w="25400">
-            <a:solidFill>
-              <a:srgbClr val="4FA5B3"/>
-            </a:solidFill>
-            <a:prstDash val="solid"/>
-            <a:tailEnd type="triangle"/>
-          </a:ln>
-        </p:spPr>
-      </p:sp>
-      <p:sp>
-        <p:nvSpPr>
-          <p:cNvPr id="28" name="Shape 26"/>
-          <p:cNvSpPr/>
-          <p:nvPr/>
-        </p:nvSpPr>
-        <p:spPr>
-          <a:xfrm>
-            <a:off x="3992728" y="5623560"/>
-            <a:ext cx="4206240" cy="658368"/>
-          </a:xfrm>
-          <a:prstGeom prst="roundRect">
-            <a:avLst>
-              <a:gd name="adj" fmla="val 11111"/>
-            </a:avLst>
-          </a:prstGeom>
-          <a:solidFill>
-            <a:srgbClr val="EEF6F7"/>
-          </a:solidFill>
-          <a:ln w="17780">
-            <a:solidFill>
-              <a:srgbClr val="2A8FA3"/>
-            </a:solidFill>
-            <a:prstDash val="solid"/>
-          </a:ln>
-        </p:spPr>
-      </p:sp>
-      <p:sp>
-        <p:nvSpPr>
-          <p:cNvPr id="29" name="Shape 27"/>
-          <p:cNvSpPr/>
-          <p:nvPr/>
-        </p:nvSpPr>
-        <p:spPr>
-          <a:xfrm>
-            <a:off x="4193896" y="5870448"/>
-            <a:ext cx="164592" cy="164592"/>
-          </a:xfrm>
-          <a:prstGeom prst="ellipse">
-            <a:avLst/>
-          </a:prstGeom>
-          <a:solidFill>
-            <a:srgbClr val="2A8FA3"/>
-          </a:solidFill>
-          <a:ln/>
-        </p:spPr>
-      </p:sp>
-      <p:sp>
-        <p:nvSpPr>
-          <p:cNvPr id="30" name="Text 28"/>
-          <p:cNvSpPr/>
-          <p:nvPr/>
-        </p:nvSpPr>
-        <p:spPr>
-          <a:xfrm>
-            <a:off x="4495648" y="5623560"/>
-            <a:ext cx="2194560" cy="658368"/>
-          </a:xfrm>
-          <a:prstGeom prst="rect">
-            <a:avLst/>
-          </a:prstGeom>
-          <a:noFill/>
-          <a:ln/>
-        </p:spPr>
-        <p:txBody>
-          <a:bodyPr wrap="square" lIns="0" tIns="0" rIns="0" bIns="0" rtlCol="0" anchor="ctr"/>
-          <a:lstStyle/>
-          <a:p>
-            <a:pPr indent="0" marL="0">
-              <a:buNone/>
-            </a:pPr>
-            <a:r>
-              <a:rPr lang="en-US" sz="1350" b="1" dirty="0">
-                <a:solidFill>
-                  <a:srgbClr val="12313A"/>
-                </a:solidFill>
-                <a:latin typeface="Calibri" pitchFamily="34" charset="0"/>
-                <a:ea typeface="Calibri" pitchFamily="34" charset="-122"/>
-                <a:cs typeface="Calibri" pitchFamily="34" charset="-120"/>
-              </a:rPr>
-              <a:t>API GW + S3</a:t>
-            </a:r>
-            <a:endParaRPr lang="en-US" sz="1350" dirty="0"/>
-          </a:p>
-        </p:txBody>
-      </p:sp>
-      <p:sp>
-        <p:nvSpPr>
-          <p:cNvPr id="31" name="Text 29"/>
-          <p:cNvSpPr/>
-          <p:nvPr/>
-        </p:nvSpPr>
-        <p:spPr>
-          <a:xfrm>
-            <a:off x="6644488" y="5623560"/>
-            <a:ext cx="1463040" cy="658368"/>
-          </a:xfrm>
-          <a:prstGeom prst="rect">
-            <a:avLst/>
-          </a:prstGeom>
-          <a:noFill/>
-          <a:ln/>
-        </p:spPr>
-        <p:txBody>
-          <a:bodyPr wrap="square" lIns="0" tIns="0" rIns="0" bIns="0" rtlCol="0" anchor="ctr"/>
-          <a:lstStyle/>
-          <a:p>
-            <a:pPr algn="r" indent="0" marL="0">
-              <a:buNone/>
-            </a:pPr>
-            <a:r>
-              <a:rPr lang="en-US" sz="950" dirty="0">
-                <a:solidFill>
-                  <a:srgbClr val="5A7178"/>
-                </a:solidFill>
-                <a:latin typeface="Calibri" pitchFamily="34" charset="0"/>
-                <a:ea typeface="Calibri" pitchFamily="34" charset="-122"/>
-                <a:cs typeface="Calibri" pitchFamily="34" charset="-120"/>
-              </a:rPr>
               <a:t>ward dashboard</a:t>
             </a:r>
-            <a:endParaRPr lang="en-US" sz="950" dirty="0"/>
-          </a:p>
-        </p:txBody>
-      </p:sp>
-      <p:sp>
-        <p:nvSpPr>
-          <p:cNvPr id="32" name="Text 30"/>
-          <p:cNvSpPr/>
-          <p:nvPr/>
-        </p:nvSpPr>
-        <p:spPr>
-          <a:xfrm>
-            <a:off x="2438248" y="1234440"/>
-            <a:ext cx="1371600" cy="365760"/>
-          </a:xfrm>
-          <a:prstGeom prst="rect">
-            <a:avLst/>
-          </a:prstGeom>
-          <a:noFill/>
-          <a:ln/>
-        </p:spPr>
-        <p:txBody>
-          <a:bodyPr wrap="square" rtlCol="0" anchor="ctr"/>
-          <a:lstStyle/>
-          <a:p>
-            <a:pPr algn="r" indent="0" marL="0">
-              <a:buNone/>
-            </a:pPr>
-            <a:r>
-              <a:rPr lang="en-US" sz="1100" b="1" spc="200" kern="0" dirty="0">
-                <a:solidFill>
-                  <a:srgbClr val="4FA5B3"/>
-                </a:solidFill>
-                <a:latin typeface="Calibri" pitchFamily="34" charset="0"/>
-                <a:ea typeface="Calibri" pitchFamily="34" charset="-122"/>
-                <a:cs typeface="Calibri" pitchFamily="34" charset="-120"/>
-              </a:rPr>
-              <a:t>EDGE</a:t>
-            </a:r>
-            <a:endParaRPr lang="en-US" sz="1100" dirty="0"/>
-          </a:p>
-        </p:txBody>
-      </p:sp>
-      <p:sp>
-        <p:nvSpPr>
-          <p:cNvPr id="33" name="Text 31"/>
-          <p:cNvSpPr/>
-          <p:nvPr/>
-        </p:nvSpPr>
-        <p:spPr>
-          <a:xfrm>
-            <a:off x="2438248" y="2990088"/>
-            <a:ext cx="1371600" cy="365760"/>
-          </a:xfrm>
-          <a:prstGeom prst="rect">
-            <a:avLst/>
-          </a:prstGeom>
-          <a:noFill/>
-          <a:ln/>
-        </p:spPr>
-        <p:txBody>
-          <a:bodyPr wrap="square" rtlCol="0" anchor="ctr"/>
-          <a:lstStyle/>
-          <a:p>
-            <a:pPr algn="r" indent="0" marL="0">
-              <a:buNone/>
-            </a:pPr>
-            <a:r>
-              <a:rPr lang="en-US" sz="1100" b="1" spc="200" kern="0" dirty="0">
-                <a:solidFill>
-                  <a:srgbClr val="0F6E7E"/>
-                </a:solidFill>
-                <a:latin typeface="Calibri" pitchFamily="34" charset="0"/>
-                <a:ea typeface="Calibri" pitchFamily="34" charset="-122"/>
-                <a:cs typeface="Calibri" pitchFamily="34" charset="-120"/>
-              </a:rPr>
-              <a:t>CLOUD</a:t>
-            </a:r>
-            <a:endParaRPr lang="en-US" sz="1100" dirty="0"/>
-          </a:p>
-        </p:txBody>
-      </p:sp>
-      <p:sp>
-        <p:nvSpPr>
-          <p:cNvPr id="34" name="Text 32"/>
-          <p:cNvSpPr/>
-          <p:nvPr/>
-        </p:nvSpPr>
-        <p:spPr>
-          <a:xfrm>
-            <a:off x="8656168" y="2743200"/>
-            <a:ext cx="3291840" cy="2194560"/>
-          </a:xfrm>
-          <a:prstGeom prst="rect">
-            <a:avLst/>
-          </a:prstGeom>
-          <a:noFill/>
-          <a:ln/>
-        </p:spPr>
-        <p:txBody>
-          <a:bodyPr wrap="square" rtlCol="0" anchor="ctr"/>
-          <a:lstStyle/>
-          <a:p>
-            <a:pPr indent="0" marL="0">
-              <a:buNone/>
-            </a:pPr>
-            <a:r>
-              <a:rPr lang="en-US" sz="1500" i="1" dirty="0">
-                <a:solidFill>
-                  <a:srgbClr val="0F6E7E"/>
-                </a:solidFill>
-                <a:latin typeface="Calibri" pitchFamily="34" charset="0"/>
-                <a:ea typeface="Calibri" pitchFamily="34" charset="-122"/>
-                <a:cs typeface="Calibri" pitchFamily="34" charset="-120"/>
-              </a:rPr>
-              <a:t>Alert decisions happen at the bedside gateway; the cloud receives compact aggregates, not raw vital streams.</a:t>
-            </a:r>
-            <a:endParaRPr lang="en-US" sz="1500" dirty="0"/>
+            <a:endParaRPr lang="en-US" sz="900" dirty="0"/>
           </a:p>
         </p:txBody>
       </p:sp>
@@ -2499,7 +2490,7 @@
     <p:bg>
       <p:bgPr>
         <a:solidFill>
-          <a:srgbClr val="FFFFFF"/>
+          <a:srgbClr val="22333B"/>
         </a:solidFill>
       </p:bgPr>
     </p:bg>
@@ -2519,14 +2510,171 @@
       </p:grpSpPr>
       <p:sp>
         <p:nvSpPr>
-          <p:cNvPr id="2" name="Text 0"/>
-          <p:cNvSpPr/>
-          <p:nvPr/>
-        </p:nvSpPr>
-        <p:spPr>
-          <a:xfrm>
-            <a:off x="640080" y="457200"/>
-            <a:ext cx="7315200" cy="640080"/>
+          <p:cNvPr id="2" name="Shape 0"/>
+          <p:cNvSpPr/>
+          <p:nvPr/>
+        </p:nvSpPr>
+        <p:spPr>
+          <a:xfrm flipH="1" rot="10800000">
+            <a:off x="9905695" y="4572000"/>
+            <a:ext cx="2286000" cy="2286000"/>
+          </a:xfrm>
+          <a:prstGeom prst="rtTriangle">
+            <a:avLst/>
+          </a:prstGeom>
+          <a:solidFill>
+            <a:srgbClr val="0F7A8C"/>
+          </a:solidFill>
+          <a:ln/>
+        </p:spPr>
+      </p:sp>
+      <p:sp>
+        <p:nvSpPr>
+          <p:cNvPr id="3" name="Shape 1"/>
+          <p:cNvSpPr/>
+          <p:nvPr/>
+        </p:nvSpPr>
+        <p:spPr>
+          <a:xfrm flipH="1" rot="10800000">
+            <a:off x="10820095" y="5486400"/>
+            <a:ext cx="1371600" cy="1371600"/>
+          </a:xfrm>
+          <a:prstGeom prst="rtTriangle">
+            <a:avLst/>
+          </a:prstGeom>
+          <a:solidFill>
+            <a:srgbClr val="005264"/>
+          </a:solidFill>
+          <a:ln/>
+        </p:spPr>
+      </p:sp>
+      <p:sp>
+        <p:nvSpPr>
+          <p:cNvPr id="4" name="Text 2"/>
+          <p:cNvSpPr/>
+          <p:nvPr/>
+        </p:nvSpPr>
+        <p:spPr>
+          <a:xfrm>
+            <a:off x="777240" y="731520"/>
+            <a:ext cx="914400" cy="640080"/>
+          </a:xfrm>
+          <a:prstGeom prst="rect">
+            <a:avLst/>
+          </a:prstGeom>
+          <a:noFill/>
+          <a:ln/>
+        </p:spPr>
+        <p:txBody>
+          <a:bodyPr wrap="square" lIns="0" tIns="0" rIns="0" bIns="0" rtlCol="0" anchor="ctr"/>
+          <a:lstStyle/>
+          <a:p>
+            <a:pPr indent="0" marL="0">
+              <a:buNone/>
+            </a:pPr>
+            <a:r>
+              <a:rPr lang="en-US" sz="3000" b="1" dirty="0">
+                <a:solidFill>
+                  <a:srgbClr val="0F7A8C"/>
+                </a:solidFill>
+                <a:latin typeface="Cambria" pitchFamily="34" charset="0"/>
+                <a:ea typeface="Cambria" pitchFamily="34" charset="-122"/>
+                <a:cs typeface="Cambria" pitchFamily="34" charset="-120"/>
+              </a:rPr>
+              <a:t>02</a:t>
+            </a:r>
+            <a:endParaRPr lang="en-US" sz="3000" dirty="0"/>
+          </a:p>
+        </p:txBody>
+      </p:sp>
+      <p:sp>
+        <p:nvSpPr>
+          <p:cNvPr id="5" name="Text 3"/>
+          <p:cNvSpPr/>
+          <p:nvPr/>
+        </p:nvSpPr>
+        <p:spPr>
+          <a:xfrm>
+            <a:off x="1645920" y="905256"/>
+            <a:ext cx="9768535" cy="274320"/>
+          </a:xfrm>
+          <a:prstGeom prst="rect">
+            <a:avLst/>
+          </a:prstGeom>
+          <a:noFill/>
+          <a:ln/>
+        </p:spPr>
+        <p:txBody>
+          <a:bodyPr wrap="square" lIns="0" tIns="0" rIns="0" bIns="0" rtlCol="0" anchor="ctr"/>
+          <a:lstStyle/>
+          <a:p>
+            <a:pPr indent="0" marL="0">
+              <a:buNone/>
+            </a:pPr>
+            <a:r>
+              <a:rPr lang="en-US" sz="1100" b="1" spc="200" kern="0" dirty="0">
+                <a:solidFill>
+                  <a:srgbClr val="8B98A6"/>
+                </a:solidFill>
+                <a:latin typeface="Calibri" pitchFamily="34" charset="0"/>
+                <a:ea typeface="Calibri" pitchFamily="34" charset="-122"/>
+                <a:cs typeface="Calibri" pitchFamily="34" charset="-120"/>
+              </a:rPr>
+              <a:t>LIVE DEMO</a:t>
+            </a:r>
+            <a:endParaRPr lang="en-US" sz="1100" dirty="0"/>
+          </a:p>
+        </p:txBody>
+      </p:sp>
+      <p:sp>
+        <p:nvSpPr>
+          <p:cNvPr id="6" name="Text 4"/>
+          <p:cNvSpPr/>
+          <p:nvPr/>
+        </p:nvSpPr>
+        <p:spPr>
+          <a:xfrm>
+            <a:off x="777240" y="1380744"/>
+            <a:ext cx="10637215" cy="640080"/>
+          </a:xfrm>
+          <a:prstGeom prst="rect">
+            <a:avLst/>
+          </a:prstGeom>
+          <a:noFill/>
+          <a:ln/>
+        </p:spPr>
+        <p:txBody>
+          <a:bodyPr wrap="square" lIns="0" tIns="0" rIns="0" bIns="0" rtlCol="0" anchor="ctr"/>
+          <a:lstStyle/>
+          <a:p>
+            <a:pPr indent="0" marL="0">
+              <a:buNone/>
+            </a:pPr>
+            <a:r>
+              <a:rPr lang="en-US" sz="2300" b="1" dirty="0">
+                <a:solidFill>
+                  <a:srgbClr val="EEF2F6"/>
+                </a:solidFill>
+                <a:latin typeface="Cambria" pitchFamily="34" charset="0"/>
+                <a:ea typeface="Cambria" pitchFamily="34" charset="-122"/>
+                <a:cs typeface="Cambria" pitchFamily="34" charset="-120"/>
+              </a:rPr>
+              <a:t>See it running on AWS</a:t>
+            </a:r>
+            <a:endParaRPr lang="en-US" sz="2300" dirty="0"/>
+          </a:p>
+        </p:txBody>
+      </p:sp>
+      <p:sp>
+        <p:nvSpPr>
+          <p:cNvPr id="7" name="Text 5"/>
+          <p:cNvSpPr/>
+          <p:nvPr/>
+        </p:nvSpPr>
+        <p:spPr>
+          <a:xfrm>
+            <a:off x="777240" y="1901952"/>
+            <a:ext cx="10637215" cy="274320"/>
           </a:xfrm>
           <a:prstGeom prst="rect">
             <a:avLst/>
@@ -2542,48 +2690,9 @@
               <a:buNone/>
             </a:pPr>
             <a:r>
-              <a:rPr lang="en-US" sz="3000" b="1" dirty="0">
-                <a:solidFill>
-                  <a:srgbClr val="12313A"/>
-                </a:solidFill>
-                <a:latin typeface="Century Schoolbook" pitchFamily="34" charset="0"/>
-                <a:ea typeface="Century Schoolbook" pitchFamily="34" charset="-122"/>
-                <a:cs typeface="Century Schoolbook" pitchFamily="34" charset="-120"/>
-              </a:rPr>
-              <a:t>Live Demo</a:t>
-            </a:r>
-            <a:endParaRPr lang="en-US" sz="3000" dirty="0"/>
-          </a:p>
-        </p:txBody>
-      </p:sp>
-      <p:sp>
-        <p:nvSpPr>
-          <p:cNvPr id="3" name="Text 1"/>
-          <p:cNvSpPr/>
-          <p:nvPr/>
-        </p:nvSpPr>
-        <p:spPr>
-          <a:xfrm>
-            <a:off x="658368" y="1143000"/>
-            <a:ext cx="10972800" cy="365760"/>
-          </a:xfrm>
-          <a:prstGeom prst="rect">
-            <a:avLst/>
-          </a:prstGeom>
-          <a:noFill/>
-          <a:ln/>
-        </p:spPr>
-        <p:txBody>
-          <a:bodyPr wrap="square" rtlCol="0" anchor="ctr"/>
-          <a:lstStyle/>
-          <a:p>
-            <a:pPr indent="0" marL="0">
-              <a:buNone/>
-            </a:pPr>
-            <a:r>
-              <a:rPr lang="en-US" sz="1400" dirty="0">
-                <a:solidFill>
-                  <a:srgbClr val="2A8FA3"/>
+              <a:rPr lang="en-US" sz="1100" dirty="0">
+                <a:solidFill>
+                  <a:srgbClr val="0F7A8C"/>
                 </a:solidFill>
                 <a:latin typeface="Consolas" pitchFamily="34" charset="0"/>
                 <a:ea typeface="Consolas" pitchFamily="34" charset="-122"/>
@@ -2591,32 +2700,32 @@
               </a:rPr>
               <a:t>fpv-frontend-457516959142.s3.us-east-1.amazonaws.com</a:t>
             </a:r>
-            <a:endParaRPr lang="en-US" sz="1400" dirty="0"/>
-          </a:p>
-        </p:txBody>
-      </p:sp>
-      <p:sp>
-        <p:nvSpPr>
-          <p:cNvPr id="4" name="Shape 2"/>
-          <p:cNvSpPr/>
-          <p:nvPr/>
-        </p:nvSpPr>
-        <p:spPr>
-          <a:xfrm>
-            <a:off x="640080" y="1874520"/>
-            <a:ext cx="3502152" cy="3977640"/>
+            <a:endParaRPr lang="en-US" sz="1100" dirty="0"/>
+          </a:p>
+        </p:txBody>
+      </p:sp>
+      <p:sp>
+        <p:nvSpPr>
+          <p:cNvPr id="8" name="Shape 6"/>
+          <p:cNvSpPr/>
+          <p:nvPr/>
+        </p:nvSpPr>
+        <p:spPr>
+          <a:xfrm>
+            <a:off x="777240" y="2514600"/>
+            <a:ext cx="3301898" cy="3566160"/>
           </a:xfrm>
           <a:prstGeom prst="roundRect">
             <a:avLst>
-              <a:gd name="adj" fmla="val 2611"/>
+              <a:gd name="adj" fmla="val 1108"/>
             </a:avLst>
           </a:prstGeom>
           <a:solidFill>
-            <a:srgbClr val="EEF6F7"/>
-          </a:solidFill>
-          <a:ln w="15240">
+            <a:srgbClr val="2A3F47"/>
+          </a:solidFill>
+          <a:ln w="12700">
             <a:solidFill>
-              <a:srgbClr val="2A8FA3"/>
+              <a:srgbClr val="3E535B"/>
             </a:solidFill>
             <a:prstDash val="solid"/>
           </a:ln>
@@ -2624,34 +2733,14 @@
       </p:sp>
       <p:sp>
         <p:nvSpPr>
-          <p:cNvPr id="5" name="Shape 3"/>
-          <p:cNvSpPr/>
-          <p:nvPr/>
-        </p:nvSpPr>
-        <p:spPr>
-          <a:xfrm>
-            <a:off x="914400" y="2148840"/>
-            <a:ext cx="603504" cy="603504"/>
-          </a:xfrm>
-          <a:prstGeom prst="ellipse">
-            <a:avLst/>
-          </a:prstGeom>
-          <a:solidFill>
-            <a:srgbClr val="0F6E7E"/>
-          </a:solidFill>
-          <a:ln/>
-        </p:spPr>
-      </p:sp>
-      <p:sp>
-        <p:nvSpPr>
-          <p:cNvPr id="6" name="Text 4"/>
-          <p:cNvSpPr/>
-          <p:nvPr/>
-        </p:nvSpPr>
-        <p:spPr>
-          <a:xfrm>
-            <a:off x="914400" y="2148840"/>
-            <a:ext cx="603504" cy="603504"/>
+          <p:cNvPr id="9" name="Text 7"/>
+          <p:cNvSpPr/>
+          <p:nvPr/>
+        </p:nvSpPr>
+        <p:spPr>
+          <a:xfrm>
+            <a:off x="1051560" y="2752344"/>
+            <a:ext cx="1828800" cy="777240"/>
           </a:xfrm>
           <a:prstGeom prst="rect">
             <a:avLst/>
@@ -2663,34 +2752,76 @@
           <a:bodyPr wrap="square" lIns="0" tIns="0" rIns="0" bIns="0" rtlCol="0" anchor="ctr"/>
           <a:lstStyle/>
           <a:p>
-            <a:pPr algn="ctr" indent="0" marL="0">
-              <a:buNone/>
-            </a:pPr>
-            <a:r>
-              <a:rPr lang="en-US" sz="2200" b="1" dirty="0">
-                <a:solidFill>
-                  <a:srgbClr val="FFFFFF"/>
-                </a:solidFill>
-                <a:latin typeface="Century Schoolbook" pitchFamily="34" charset="0"/>
-                <a:ea typeface="Century Schoolbook" pitchFamily="34" charset="-122"/>
-                <a:cs typeface="Century Schoolbook" pitchFamily="34" charset="-120"/>
-              </a:rPr>
-              <a:t>1</a:t>
-            </a:r>
-            <a:endParaRPr lang="en-US" sz="2200" dirty="0"/>
-          </a:p>
-        </p:txBody>
-      </p:sp>
-      <p:sp>
-        <p:nvSpPr>
-          <p:cNvPr id="7" name="Text 5"/>
-          <p:cNvSpPr/>
-          <p:nvPr/>
-        </p:nvSpPr>
-        <p:spPr>
-          <a:xfrm>
-            <a:off x="914400" y="2898648"/>
-            <a:ext cx="2953512" cy="777240"/>
+            <a:pPr indent="0" marL="0">
+              <a:buNone/>
+            </a:pPr>
+            <a:r>
+              <a:rPr lang="en-US" sz="3800" b="1" dirty="0">
+                <a:solidFill>
+                  <a:srgbClr val="0F7A8C"/>
+                </a:solidFill>
+                <a:latin typeface="Cambria" pitchFamily="34" charset="0"/>
+                <a:ea typeface="Cambria" pitchFamily="34" charset="-122"/>
+                <a:cs typeface="Cambria" pitchFamily="34" charset="-120"/>
+              </a:rPr>
+              <a:t>01</a:t>
+            </a:r>
+            <a:endParaRPr lang="en-US" sz="3800" dirty="0"/>
+          </a:p>
+        </p:txBody>
+      </p:sp>
+      <p:sp>
+        <p:nvSpPr>
+          <p:cNvPr id="10" name="Text 8"/>
+          <p:cNvSpPr/>
+          <p:nvPr/>
+        </p:nvSpPr>
+        <p:spPr>
+          <a:xfrm>
+            <a:off x="1069848" y="3566160"/>
+            <a:ext cx="2753258" cy="868680"/>
+          </a:xfrm>
+          <a:prstGeom prst="rect">
+            <a:avLst/>
+          </a:prstGeom>
+          <a:noFill/>
+          <a:ln/>
+        </p:spPr>
+        <p:txBody>
+          <a:bodyPr wrap="square" lIns="0" tIns="0" rIns="0" bIns="0" rtlCol="0" anchor="t"/>
+          <a:lstStyle/>
+          <a:p>
+            <a:pPr indent="0" marL="0">
+              <a:lnSpc>
+                <a:spcPct val="100000"/>
+              </a:lnSpc>
+              <a:buNone/>
+            </a:pPr>
+            <a:r>
+              <a:rPr lang="en-US" sz="1550" b="1" dirty="0">
+                <a:solidFill>
+                  <a:srgbClr val="EEF2F6"/>
+                </a:solidFill>
+                <a:latin typeface="Cambria" pitchFamily="34" charset="0"/>
+                <a:ea typeface="Cambria" pitchFamily="34" charset="-122"/>
+                <a:cs typeface="Cambria" pitchFamily="34" charset="-120"/>
+              </a:rPr>
+              <a:t>Two patients, five vitals live</a:t>
+            </a:r>
+            <a:endParaRPr lang="en-US" sz="1550" dirty="0"/>
+          </a:p>
+        </p:txBody>
+      </p:sp>
+      <p:sp>
+        <p:nvSpPr>
+          <p:cNvPr id="11" name="Text 9"/>
+          <p:cNvSpPr/>
+          <p:nvPr/>
+        </p:nvSpPr>
+        <p:spPr>
+          <a:xfrm>
+            <a:off x="1069848" y="4434840"/>
+            <a:ext cx="2753258" cy="1463040"/>
           </a:xfrm>
           <a:prstGeom prst="rect">
             <a:avLst/>
@@ -2703,33 +2834,63 @@
           <a:lstStyle/>
           <a:p>
             <a:pPr indent="0" marL="0">
-              <a:buNone/>
-            </a:pPr>
-            <a:r>
-              <a:rPr lang="en-US" sz="1600" b="1" dirty="0">
-                <a:solidFill>
-                  <a:srgbClr val="12313A"/>
+              <a:lnSpc>
+                <a:spcPct val="120000"/>
+              </a:lnSpc>
+              <a:buNone/>
+            </a:pPr>
+            <a:r>
+              <a:rPr lang="en-US" sz="1200" dirty="0">
+                <a:solidFill>
+                  <a:srgbClr val="8B98A6"/>
                 </a:solidFill>
                 <a:latin typeface="Calibri" pitchFamily="34" charset="0"/>
                 <a:ea typeface="Calibri" pitchFamily="34" charset="-122"/>
                 <a:cs typeface="Calibri" pitchFamily="34" charset="-120"/>
               </a:rPr>
-              <a:t>Two patients, five vitals live</a:t>
-            </a:r>
-            <a:endParaRPr lang="en-US" sz="1600" dirty="0"/>
-          </a:p>
-        </p:txBody>
-      </p:sp>
-      <p:sp>
-        <p:nvSpPr>
-          <p:cNvPr id="8" name="Text 6"/>
-          <p:cNvSpPr/>
-          <p:nvPr/>
-        </p:nvSpPr>
-        <p:spPr>
-          <a:xfrm>
-            <a:off x="914400" y="3657600"/>
-            <a:ext cx="2953512" cy="2011680"/>
+              <a:t>Heart rate, SpO2, respiration, temperature and blood pressure streaming for both beds, each checked against its clinical limit as it lands.</a:t>
+            </a:r>
+            <a:endParaRPr lang="en-US" sz="1200" dirty="0"/>
+          </a:p>
+        </p:txBody>
+      </p:sp>
+      <p:sp>
+        <p:nvSpPr>
+          <p:cNvPr id="12" name="Shape 10"/>
+          <p:cNvSpPr/>
+          <p:nvPr/>
+        </p:nvSpPr>
+        <p:spPr>
+          <a:xfrm>
+            <a:off x="4444898" y="2514600"/>
+            <a:ext cx="3301898" cy="3566160"/>
+          </a:xfrm>
+          <a:prstGeom prst="roundRect">
+            <a:avLst>
+              <a:gd name="adj" fmla="val 1108"/>
+            </a:avLst>
+          </a:prstGeom>
+          <a:solidFill>
+            <a:srgbClr val="2A3F47"/>
+          </a:solidFill>
+          <a:ln w="12700">
+            <a:solidFill>
+              <a:srgbClr val="3E535B"/>
+            </a:solidFill>
+            <a:prstDash val="solid"/>
+          </a:ln>
+        </p:spPr>
+      </p:sp>
+      <p:sp>
+        <p:nvSpPr>
+          <p:cNvPr id="13" name="Text 11"/>
+          <p:cNvSpPr/>
+          <p:nvPr/>
+        </p:nvSpPr>
+        <p:spPr>
+          <a:xfrm>
+            <a:off x="4719218" y="2752344"/>
+            <a:ext cx="1828800" cy="777240"/>
           </a:xfrm>
           <a:prstGeom prst="rect">
             <a:avLst/>
@@ -2742,48 +2903,129 @@
           <a:lstStyle/>
           <a:p>
             <a:pPr indent="0" marL="0">
+              <a:buNone/>
+            </a:pPr>
+            <a:r>
+              <a:rPr lang="en-US" sz="3800" b="1" dirty="0">
+                <a:solidFill>
+                  <a:srgbClr val="0F7A8C"/>
+                </a:solidFill>
+                <a:latin typeface="Cambria" pitchFamily="34" charset="0"/>
+                <a:ea typeface="Cambria" pitchFamily="34" charset="-122"/>
+                <a:cs typeface="Cambria" pitchFamily="34" charset="-120"/>
+              </a:rPr>
+              <a:t>02</a:t>
+            </a:r>
+            <a:endParaRPr lang="en-US" sz="3800" dirty="0"/>
+          </a:p>
+        </p:txBody>
+      </p:sp>
+      <p:sp>
+        <p:nvSpPr>
+          <p:cNvPr id="14" name="Text 12"/>
+          <p:cNvSpPr/>
+          <p:nvPr/>
+        </p:nvSpPr>
+        <p:spPr>
+          <a:xfrm>
+            <a:off x="4737506" y="3566160"/>
+            <a:ext cx="2753258" cy="868680"/>
+          </a:xfrm>
+          <a:prstGeom prst="rect">
+            <a:avLst/>
+          </a:prstGeom>
+          <a:noFill/>
+          <a:ln/>
+        </p:spPr>
+        <p:txBody>
+          <a:bodyPr wrap="square" lIns="0" tIns="0" rIns="0" bIns="0" rtlCol="0" anchor="t"/>
+          <a:lstStyle/>
+          <a:p>
+            <a:pPr indent="0" marL="0">
               <a:lnSpc>
-                <a:spcPct val="106000"/>
+                <a:spcPct val="100000"/>
               </a:lnSpc>
               <a:buNone/>
             </a:pPr>
             <a:r>
-              <a:rPr lang="en-US" sz="1250" dirty="0">
-                <a:solidFill>
-                  <a:srgbClr val="5A7178"/>
+              <a:rPr lang="en-US" sz="1550" b="1" dirty="0">
+                <a:solidFill>
+                  <a:srgbClr val="EEF2F6"/>
+                </a:solidFill>
+                <a:latin typeface="Cambria" pitchFamily="34" charset="0"/>
+                <a:ea typeface="Cambria" pitchFamily="34" charset="-122"/>
+                <a:cs typeface="Cambria" pitchFamily="34" charset="-120"/>
+              </a:rPr>
+              <a:t>A hypoxia alert on real data</a:t>
+            </a:r>
+            <a:endParaRPr lang="en-US" sz="1550" dirty="0"/>
+          </a:p>
+        </p:txBody>
+      </p:sp>
+      <p:sp>
+        <p:nvSpPr>
+          <p:cNvPr id="15" name="Text 13"/>
+          <p:cNvSpPr/>
+          <p:nvPr/>
+        </p:nvSpPr>
+        <p:spPr>
+          <a:xfrm>
+            <a:off x="4737506" y="4434840"/>
+            <a:ext cx="2753258" cy="1463040"/>
+          </a:xfrm>
+          <a:prstGeom prst="rect">
+            <a:avLst/>
+          </a:prstGeom>
+          <a:noFill/>
+          <a:ln/>
+        </p:spPr>
+        <p:txBody>
+          <a:bodyPr wrap="square" lIns="0" tIns="0" rIns="0" bIns="0" rtlCol="0" anchor="ctr"/>
+          <a:lstStyle/>
+          <a:p>
+            <a:pPr indent="0" marL="0">
+              <a:lnSpc>
+                <a:spcPct val="120000"/>
+              </a:lnSpc>
+              <a:buNone/>
+            </a:pPr>
+            <a:r>
+              <a:rPr lang="en-US" sz="1200" dirty="0">
+                <a:solidFill>
+                  <a:srgbClr val="8B98A6"/>
                 </a:solidFill>
                 <a:latin typeface="Calibri" pitchFamily="34" charset="0"/>
                 <a:ea typeface="Calibri" pitchFamily="34" charset="-122"/>
                 <a:cs typeface="Calibri" pitchFamily="34" charset="-120"/>
               </a:rPr>
-              <a:t>Heart rate, SpO2, respiration, temperature and blood pressure streaming for both beds, each checked against its clinical limit as it lands.</a:t>
-            </a:r>
-            <a:endParaRPr lang="en-US" sz="1250" dirty="0"/>
-          </a:p>
-        </p:txBody>
-      </p:sp>
-      <p:sp>
-        <p:nvSpPr>
-          <p:cNvPr id="9" name="Shape 7"/>
-          <p:cNvSpPr/>
-          <p:nvPr/>
-        </p:nvSpPr>
-        <p:spPr>
-          <a:xfrm>
-            <a:off x="4416552" y="1874520"/>
-            <a:ext cx="3502152" cy="3977640"/>
+              <a:t>The banner raises as Patient-1's SpO2 crosses the 92% trigger — captured live at 89.7% — not a scripted demo value.</a:t>
+            </a:r>
+            <a:endParaRPr lang="en-US" sz="1200" dirty="0"/>
+          </a:p>
+        </p:txBody>
+      </p:sp>
+      <p:sp>
+        <p:nvSpPr>
+          <p:cNvPr id="16" name="Shape 14"/>
+          <p:cNvSpPr/>
+          <p:nvPr/>
+        </p:nvSpPr>
+        <p:spPr>
+          <a:xfrm>
+            <a:off x="8112557" y="2514600"/>
+            <a:ext cx="3301898" cy="3566160"/>
           </a:xfrm>
           <a:prstGeom prst="roundRect">
             <a:avLst>
-              <a:gd name="adj" fmla="val 2611"/>
+              <a:gd name="adj" fmla="val 1108"/>
             </a:avLst>
           </a:prstGeom>
           <a:solidFill>
-            <a:srgbClr val="EEF6F7"/>
-          </a:solidFill>
-          <a:ln w="15240">
+            <a:srgbClr val="2A3F47"/>
+          </a:solidFill>
+          <a:ln w="12700">
             <a:solidFill>
-              <a:srgbClr val="2A8FA3"/>
+              <a:srgbClr val="3E535B"/>
             </a:solidFill>
             <a:prstDash val="solid"/>
           </a:ln>
@@ -2791,34 +3033,14 @@
       </p:sp>
       <p:sp>
         <p:nvSpPr>
-          <p:cNvPr id="10" name="Shape 8"/>
-          <p:cNvSpPr/>
-          <p:nvPr/>
-        </p:nvSpPr>
-        <p:spPr>
-          <a:xfrm>
-            <a:off x="4690872" y="2148840"/>
-            <a:ext cx="603504" cy="603504"/>
-          </a:xfrm>
-          <a:prstGeom prst="ellipse">
-            <a:avLst/>
-          </a:prstGeom>
-          <a:solidFill>
-            <a:srgbClr val="0F6E7E"/>
-          </a:solidFill>
-          <a:ln/>
-        </p:spPr>
-      </p:sp>
-      <p:sp>
-        <p:nvSpPr>
-          <p:cNvPr id="11" name="Text 9"/>
-          <p:cNvSpPr/>
-          <p:nvPr/>
-        </p:nvSpPr>
-        <p:spPr>
-          <a:xfrm>
-            <a:off x="4690872" y="2148840"/>
-            <a:ext cx="603504" cy="603504"/>
+          <p:cNvPr id="17" name="Text 15"/>
+          <p:cNvSpPr/>
+          <p:nvPr/>
+        </p:nvSpPr>
+        <p:spPr>
+          <a:xfrm>
+            <a:off x="8386877" y="2752344"/>
+            <a:ext cx="1828800" cy="777240"/>
           </a:xfrm>
           <a:prstGeom prst="rect">
             <a:avLst/>
@@ -2830,34 +3052,76 @@
           <a:bodyPr wrap="square" lIns="0" tIns="0" rIns="0" bIns="0" rtlCol="0" anchor="ctr"/>
           <a:lstStyle/>
           <a:p>
-            <a:pPr algn="ctr" indent="0" marL="0">
-              <a:buNone/>
-            </a:pPr>
-            <a:r>
-              <a:rPr lang="en-US" sz="2200" b="1" dirty="0">
-                <a:solidFill>
-                  <a:srgbClr val="FFFFFF"/>
-                </a:solidFill>
-                <a:latin typeface="Century Schoolbook" pitchFamily="34" charset="0"/>
-                <a:ea typeface="Century Schoolbook" pitchFamily="34" charset="-122"/>
-                <a:cs typeface="Century Schoolbook" pitchFamily="34" charset="-120"/>
-              </a:rPr>
-              <a:t>2</a:t>
-            </a:r>
-            <a:endParaRPr lang="en-US" sz="2200" dirty="0"/>
-          </a:p>
-        </p:txBody>
-      </p:sp>
-      <p:sp>
-        <p:nvSpPr>
-          <p:cNvPr id="12" name="Text 10"/>
-          <p:cNvSpPr/>
-          <p:nvPr/>
-        </p:nvSpPr>
-        <p:spPr>
-          <a:xfrm>
-            <a:off x="4690872" y="2898648"/>
-            <a:ext cx="2953512" cy="777240"/>
+            <a:pPr indent="0" marL="0">
+              <a:buNone/>
+            </a:pPr>
+            <a:r>
+              <a:rPr lang="en-US" sz="3800" b="1" dirty="0">
+                <a:solidFill>
+                  <a:srgbClr val="0F7A8C"/>
+                </a:solidFill>
+                <a:latin typeface="Cambria" pitchFamily="34" charset="0"/>
+                <a:ea typeface="Cambria" pitchFamily="34" charset="-122"/>
+                <a:cs typeface="Cambria" pitchFamily="34" charset="-120"/>
+              </a:rPr>
+              <a:t>03</a:t>
+            </a:r>
+            <a:endParaRPr lang="en-US" sz="3800" dirty="0"/>
+          </a:p>
+        </p:txBody>
+      </p:sp>
+      <p:sp>
+        <p:nvSpPr>
+          <p:cNvPr id="18" name="Text 16"/>
+          <p:cNvSpPr/>
+          <p:nvPr/>
+        </p:nvSpPr>
+        <p:spPr>
+          <a:xfrm>
+            <a:off x="8405165" y="3566160"/>
+            <a:ext cx="2753258" cy="868680"/>
+          </a:xfrm>
+          <a:prstGeom prst="rect">
+            <a:avLst/>
+          </a:prstGeom>
+          <a:noFill/>
+          <a:ln/>
+        </p:spPr>
+        <p:txBody>
+          <a:bodyPr wrap="square" lIns="0" tIns="0" rIns="0" bIns="0" rtlCol="0" anchor="t"/>
+          <a:lstStyle/>
+          <a:p>
+            <a:pPr indent="0" marL="0">
+              <a:lnSpc>
+                <a:spcPct val="100000"/>
+              </a:lnSpc>
+              <a:buNone/>
+            </a:pPr>
+            <a:r>
+              <a:rPr lang="en-US" sz="1550" b="1" dirty="0">
+                <a:solidFill>
+                  <a:srgbClr val="EEF2F6"/>
+                </a:solidFill>
+                <a:latin typeface="Cambria" pitchFamily="34" charset="0"/>
+                <a:ea typeface="Cambria" pitchFamily="34" charset="-122"/>
+                <a:cs typeface="Cambria" pitchFamily="34" charset="-120"/>
+              </a:rPr>
+              <a:t>The pipeline is genuinely live</a:t>
+            </a:r>
+            <a:endParaRPr lang="en-US" sz="1550" dirty="0"/>
+          </a:p>
+        </p:txBody>
+      </p:sp>
+      <p:sp>
+        <p:nvSpPr>
+          <p:cNvPr id="19" name="Text 17"/>
+          <p:cNvSpPr/>
+          <p:nvPr/>
+        </p:nvSpPr>
+        <p:spPr>
+          <a:xfrm>
+            <a:off x="8405165" y="4434840"/>
+            <a:ext cx="2753258" cy="1463040"/>
           </a:xfrm>
           <a:prstGeom prst="rect">
             <a:avLst/>
@@ -2870,229 +3134,23 @@
           <a:lstStyle/>
           <a:p>
             <a:pPr indent="0" marL="0">
-              <a:buNone/>
-            </a:pPr>
-            <a:r>
-              <a:rPr lang="en-US" sz="1600" b="1" dirty="0">
-                <a:solidFill>
-                  <a:srgbClr val="12313A"/>
+              <a:lnSpc>
+                <a:spcPct val="120000"/>
+              </a:lnSpc>
+              <a:buNone/>
+            </a:pPr>
+            <a:r>
+              <a:rPr lang="en-US" sz="1200" dirty="0">
+                <a:solidFill>
+                  <a:srgbClr val="8B98A6"/>
                 </a:solidFill>
                 <a:latin typeface="Calibri" pitchFamily="34" charset="0"/>
                 <a:ea typeface="Calibri" pitchFamily="34" charset="-122"/>
                 <a:cs typeface="Calibri" pitchFamily="34" charset="-120"/>
               </a:rPr>
-              <a:t>A hypoxia alert on real data</a:t>
-            </a:r>
-            <a:endParaRPr lang="en-US" sz="1600" dirty="0"/>
-          </a:p>
-        </p:txBody>
-      </p:sp>
-      <p:sp>
-        <p:nvSpPr>
-          <p:cNvPr id="13" name="Text 11"/>
-          <p:cNvSpPr/>
-          <p:nvPr/>
-        </p:nvSpPr>
-        <p:spPr>
-          <a:xfrm>
-            <a:off x="4690872" y="3657600"/>
-            <a:ext cx="2953512" cy="2011680"/>
-          </a:xfrm>
-          <a:prstGeom prst="rect">
-            <a:avLst/>
-          </a:prstGeom>
-          <a:noFill/>
-          <a:ln/>
-        </p:spPr>
-        <p:txBody>
-          <a:bodyPr wrap="square" lIns="0" tIns="0" rIns="0" bIns="0" rtlCol="0" anchor="ctr"/>
-          <a:lstStyle/>
-          <a:p>
-            <a:pPr indent="0" marL="0">
-              <a:lnSpc>
-                <a:spcPct val="106000"/>
-              </a:lnSpc>
-              <a:buNone/>
-            </a:pPr>
-            <a:r>
-              <a:rPr lang="en-US" sz="1250" dirty="0">
-                <a:solidFill>
-                  <a:srgbClr val="5A7178"/>
-                </a:solidFill>
-                <a:latin typeface="Calibri" pitchFamily="34" charset="0"/>
-                <a:ea typeface="Calibri" pitchFamily="34" charset="-122"/>
-                <a:cs typeface="Calibri" pitchFamily="34" charset="-120"/>
-              </a:rPr>
-              <a:t>The banner raises as Patient-1's SpO2 crosses the 92% trigger — captured live at 89.7% — not a scripted demo value.</a:t>
-            </a:r>
-            <a:endParaRPr lang="en-US" sz="1250" dirty="0"/>
-          </a:p>
-        </p:txBody>
-      </p:sp>
-      <p:sp>
-        <p:nvSpPr>
-          <p:cNvPr id="14" name="Shape 12"/>
-          <p:cNvSpPr/>
-          <p:nvPr/>
-        </p:nvSpPr>
-        <p:spPr>
-          <a:xfrm>
-            <a:off x="8193024" y="1874520"/>
-            <a:ext cx="3502152" cy="3977640"/>
-          </a:xfrm>
-          <a:prstGeom prst="roundRect">
-            <a:avLst>
-              <a:gd name="adj" fmla="val 2611"/>
-            </a:avLst>
-          </a:prstGeom>
-          <a:solidFill>
-            <a:srgbClr val="EEF6F7"/>
-          </a:solidFill>
-          <a:ln w="15240">
-            <a:solidFill>
-              <a:srgbClr val="2A8FA3"/>
-            </a:solidFill>
-            <a:prstDash val="solid"/>
-          </a:ln>
-        </p:spPr>
-      </p:sp>
-      <p:sp>
-        <p:nvSpPr>
-          <p:cNvPr id="15" name="Shape 13"/>
-          <p:cNvSpPr/>
-          <p:nvPr/>
-        </p:nvSpPr>
-        <p:spPr>
-          <a:xfrm>
-            <a:off x="8467344" y="2148840"/>
-            <a:ext cx="603504" cy="603504"/>
-          </a:xfrm>
-          <a:prstGeom prst="ellipse">
-            <a:avLst/>
-          </a:prstGeom>
-          <a:solidFill>
-            <a:srgbClr val="0F6E7E"/>
-          </a:solidFill>
-          <a:ln/>
-        </p:spPr>
-      </p:sp>
-      <p:sp>
-        <p:nvSpPr>
-          <p:cNvPr id="16" name="Text 14"/>
-          <p:cNvSpPr/>
-          <p:nvPr/>
-        </p:nvSpPr>
-        <p:spPr>
-          <a:xfrm>
-            <a:off x="8467344" y="2148840"/>
-            <a:ext cx="603504" cy="603504"/>
-          </a:xfrm>
-          <a:prstGeom prst="rect">
-            <a:avLst/>
-          </a:prstGeom>
-          <a:noFill/>
-          <a:ln/>
-        </p:spPr>
-        <p:txBody>
-          <a:bodyPr wrap="square" lIns="0" tIns="0" rIns="0" bIns="0" rtlCol="0" anchor="ctr"/>
-          <a:lstStyle/>
-          <a:p>
-            <a:pPr algn="ctr" indent="0" marL="0">
-              <a:buNone/>
-            </a:pPr>
-            <a:r>
-              <a:rPr lang="en-US" sz="2200" b="1" dirty="0">
-                <a:solidFill>
-                  <a:srgbClr val="FFFFFF"/>
-                </a:solidFill>
-                <a:latin typeface="Century Schoolbook" pitchFamily="34" charset="0"/>
-                <a:ea typeface="Century Schoolbook" pitchFamily="34" charset="-122"/>
-                <a:cs typeface="Century Schoolbook" pitchFamily="34" charset="-120"/>
-              </a:rPr>
-              <a:t>3</a:t>
-            </a:r>
-            <a:endParaRPr lang="en-US" sz="2200" dirty="0"/>
-          </a:p>
-        </p:txBody>
-      </p:sp>
-      <p:sp>
-        <p:nvSpPr>
-          <p:cNvPr id="17" name="Text 15"/>
-          <p:cNvSpPr/>
-          <p:nvPr/>
-        </p:nvSpPr>
-        <p:spPr>
-          <a:xfrm>
-            <a:off x="8467344" y="2898648"/>
-            <a:ext cx="2953512" cy="777240"/>
-          </a:xfrm>
-          <a:prstGeom prst="rect">
-            <a:avLst/>
-          </a:prstGeom>
-          <a:noFill/>
-          <a:ln/>
-        </p:spPr>
-        <p:txBody>
-          <a:bodyPr wrap="square" lIns="0" tIns="0" rIns="0" bIns="0" rtlCol="0" anchor="ctr"/>
-          <a:lstStyle/>
-          <a:p>
-            <a:pPr indent="0" marL="0">
-              <a:buNone/>
-            </a:pPr>
-            <a:r>
-              <a:rPr lang="en-US" sz="1600" b="1" dirty="0">
-                <a:solidFill>
-                  <a:srgbClr val="12313A"/>
-                </a:solidFill>
-                <a:latin typeface="Calibri" pitchFamily="34" charset="0"/>
-                <a:ea typeface="Calibri" pitchFamily="34" charset="-122"/>
-                <a:cs typeface="Calibri" pitchFamily="34" charset="-120"/>
-              </a:rPr>
-              <a:t>The pipeline is genuinely live</a:t>
-            </a:r>
-            <a:endParaRPr lang="en-US" sz="1600" dirty="0"/>
-          </a:p>
-        </p:txBody>
-      </p:sp>
-      <p:sp>
-        <p:nvSpPr>
-          <p:cNvPr id="18" name="Text 16"/>
-          <p:cNvSpPr/>
-          <p:nvPr/>
-        </p:nvSpPr>
-        <p:spPr>
-          <a:xfrm>
-            <a:off x="8467344" y="3657600"/>
-            <a:ext cx="2953512" cy="2011680"/>
-          </a:xfrm>
-          <a:prstGeom prst="rect">
-            <a:avLst/>
-          </a:prstGeom>
-          <a:noFill/>
-          <a:ln/>
-        </p:spPr>
-        <p:txBody>
-          <a:bodyPr wrap="square" lIns="0" tIns="0" rIns="0" bIns="0" rtlCol="0" anchor="ctr"/>
-          <a:lstStyle/>
-          <a:p>
-            <a:pPr indent="0" marL="0">
-              <a:lnSpc>
-                <a:spcPct val="106000"/>
-              </a:lnSpc>
-              <a:buNone/>
-            </a:pPr>
-            <a:r>
-              <a:rPr lang="en-US" sz="1250" dirty="0">
-                <a:solidFill>
-                  <a:srgbClr val="5A7178"/>
-                </a:solidFill>
-                <a:latin typeface="Calibri" pitchFamily="34" charset="0"/>
-                <a:ea typeface="Calibri" pitchFamily="34" charset="-122"/>
-                <a:cs typeface="Calibri" pitchFamily="34" charset="-120"/>
-              </a:rPr>
               <a:t>The stored-record count climbs between refreshes and the freshest reading stays a couple of seconds old, so nothing here is cached.</a:t>
             </a:r>
-            <a:endParaRPr lang="en-US" sz="1250" dirty="0"/>
+            <a:endParaRPr lang="en-US" sz="1200" dirty="0"/>
           </a:p>
         </p:txBody>
       </p:sp>
@@ -3110,7 +3168,7 @@
     <p:bg>
       <p:bgPr>
         <a:solidFill>
-          <a:srgbClr val="FFFFFF"/>
+          <a:srgbClr val="22333B"/>
         </a:solidFill>
       </p:bgPr>
     </p:bg>
@@ -3130,42 +3188,23 @@
       </p:grpSpPr>
       <p:sp>
         <p:nvSpPr>
-          <p:cNvPr id="2" name="Text 0"/>
-          <p:cNvSpPr/>
-          <p:nvPr/>
-        </p:nvSpPr>
-        <p:spPr>
-          <a:xfrm>
-            <a:off x="640080" y="502920"/>
-            <a:ext cx="10972800" cy="822960"/>
-          </a:xfrm>
-          <a:prstGeom prst="rect">
-            <a:avLst/>
-          </a:prstGeom>
-          <a:noFill/>
-          <a:ln/>
-        </p:spPr>
-        <p:txBody>
-          <a:bodyPr wrap="square" rtlCol="0" anchor="t"/>
-          <a:lstStyle/>
-          <a:p>
-            <a:pPr indent="0" marL="0">
-              <a:buNone/>
-            </a:pPr>
-            <a:r>
-              <a:rPr lang="en-US" sz="2800" b="1" dirty="0">
-                <a:solidFill>
-                  <a:srgbClr val="12313A"/>
-                </a:solidFill>
-                <a:latin typeface="Century Schoolbook" pitchFamily="34" charset="0"/>
-                <a:ea typeface="Century Schoolbook" pitchFamily="34" charset="-122"/>
-                <a:cs typeface="Century Schoolbook" pitchFamily="34" charset="-120"/>
-              </a:rPr>
-              <a:t>Hardest Part — a bug no local test could catch</a:t>
-            </a:r>
-            <a:endParaRPr lang="en-US" sz="2800" dirty="0"/>
-          </a:p>
-        </p:txBody>
+          <p:cNvPr id="2" name="Shape 0"/>
+          <p:cNvSpPr/>
+          <p:nvPr/>
+        </p:nvSpPr>
+        <p:spPr>
+          <a:xfrm flipH="1" rot="10800000">
+            <a:off x="9905695" y="4572000"/>
+            <a:ext cx="2286000" cy="2286000"/>
+          </a:xfrm>
+          <a:prstGeom prst="rtTriangle">
+            <a:avLst/>
+          </a:prstGeom>
+          <a:solidFill>
+            <a:srgbClr val="0F7A8C"/>
+          </a:solidFill>
+          <a:ln/>
+        </p:spPr>
       </p:sp>
       <p:sp>
         <p:nvSpPr>
@@ -3174,21 +3213,158 @@
           <p:nvPr/>
         </p:nvSpPr>
         <p:spPr>
-          <a:xfrm>
-            <a:off x="731520" y="1920240"/>
-            <a:ext cx="10698480" cy="1965960"/>
+          <a:xfrm flipH="1" rot="10800000">
+            <a:off x="10820095" y="5486400"/>
+            <a:ext cx="1371600" cy="1371600"/>
+          </a:xfrm>
+          <a:prstGeom prst="rtTriangle">
+            <a:avLst/>
+          </a:prstGeom>
+          <a:solidFill>
+            <a:srgbClr val="005264"/>
+          </a:solidFill>
+          <a:ln/>
+        </p:spPr>
+      </p:sp>
+      <p:sp>
+        <p:nvSpPr>
+          <p:cNvPr id="4" name="Text 2"/>
+          <p:cNvSpPr/>
+          <p:nvPr/>
+        </p:nvSpPr>
+        <p:spPr>
+          <a:xfrm>
+            <a:off x="777240" y="731520"/>
+            <a:ext cx="914400" cy="640080"/>
+          </a:xfrm>
+          <a:prstGeom prst="rect">
+            <a:avLst/>
+          </a:prstGeom>
+          <a:noFill/>
+          <a:ln/>
+        </p:spPr>
+        <p:txBody>
+          <a:bodyPr wrap="square" lIns="0" tIns="0" rIns="0" bIns="0" rtlCol="0" anchor="ctr"/>
+          <a:lstStyle/>
+          <a:p>
+            <a:pPr indent="0" marL="0">
+              <a:buNone/>
+            </a:pPr>
+            <a:r>
+              <a:rPr lang="en-US" sz="3000" b="1" dirty="0">
+                <a:solidFill>
+                  <a:srgbClr val="0F7A8C"/>
+                </a:solidFill>
+                <a:latin typeface="Cambria" pitchFamily="34" charset="0"/>
+                <a:ea typeface="Cambria" pitchFamily="34" charset="-122"/>
+                <a:cs typeface="Cambria" pitchFamily="34" charset="-120"/>
+              </a:rPr>
+              <a:t>03</a:t>
+            </a:r>
+            <a:endParaRPr lang="en-US" sz="3000" dirty="0"/>
+          </a:p>
+        </p:txBody>
+      </p:sp>
+      <p:sp>
+        <p:nvSpPr>
+          <p:cNvPr id="5" name="Text 3"/>
+          <p:cNvSpPr/>
+          <p:nvPr/>
+        </p:nvSpPr>
+        <p:spPr>
+          <a:xfrm>
+            <a:off x="1645920" y="905256"/>
+            <a:ext cx="9768535" cy="274320"/>
+          </a:xfrm>
+          <a:prstGeom prst="rect">
+            <a:avLst/>
+          </a:prstGeom>
+          <a:noFill/>
+          <a:ln/>
+        </p:spPr>
+        <p:txBody>
+          <a:bodyPr wrap="square" lIns="0" tIns="0" rIns="0" bIns="0" rtlCol="0" anchor="ctr"/>
+          <a:lstStyle/>
+          <a:p>
+            <a:pPr indent="0" marL="0">
+              <a:buNone/>
+            </a:pPr>
+            <a:r>
+              <a:rPr lang="en-US" sz="1100" b="1" spc="200" kern="0" dirty="0">
+                <a:solidFill>
+                  <a:srgbClr val="8B98A6"/>
+                </a:solidFill>
+                <a:latin typeface="Calibri" pitchFamily="34" charset="0"/>
+                <a:ea typeface="Calibri" pitchFamily="34" charset="-122"/>
+                <a:cs typeface="Calibri" pitchFamily="34" charset="-120"/>
+              </a:rPr>
+              <a:t>CHALLENGE</a:t>
+            </a:r>
+            <a:endParaRPr lang="en-US" sz="1100" dirty="0"/>
+          </a:p>
+        </p:txBody>
+      </p:sp>
+      <p:sp>
+        <p:nvSpPr>
+          <p:cNvPr id="6" name="Text 4"/>
+          <p:cNvSpPr/>
+          <p:nvPr/>
+        </p:nvSpPr>
+        <p:spPr>
+          <a:xfrm>
+            <a:off x="777240" y="1380744"/>
+            <a:ext cx="10637215" cy="640080"/>
+          </a:xfrm>
+          <a:prstGeom prst="rect">
+            <a:avLst/>
+          </a:prstGeom>
+          <a:noFill/>
+          <a:ln/>
+        </p:spPr>
+        <p:txBody>
+          <a:bodyPr wrap="square" lIns="0" tIns="0" rIns="0" bIns="0" rtlCol="0" anchor="ctr"/>
+          <a:lstStyle/>
+          <a:p>
+            <a:pPr indent="0" marL="0">
+              <a:buNone/>
+            </a:pPr>
+            <a:r>
+              <a:rPr lang="en-US" sz="2300" b="1" dirty="0">
+                <a:solidFill>
+                  <a:srgbClr val="EEF2F6"/>
+                </a:solidFill>
+                <a:latin typeface="Cambria" pitchFamily="34" charset="0"/>
+                <a:ea typeface="Cambria" pitchFamily="34" charset="-122"/>
+                <a:cs typeface="Cambria" pitchFamily="34" charset="-120"/>
+              </a:rPr>
+              <a:t>a runtime argument in disguise</a:t>
+            </a:r>
+            <a:endParaRPr lang="en-US" sz="2300" dirty="0"/>
+          </a:p>
+        </p:txBody>
+      </p:sp>
+      <p:sp>
+        <p:nvSpPr>
+          <p:cNvPr id="7" name="Shape 5"/>
+          <p:cNvSpPr/>
+          <p:nvPr/>
+        </p:nvSpPr>
+        <p:spPr>
+          <a:xfrm>
+            <a:off x="777240" y="2423160"/>
+            <a:ext cx="5090008" cy="3657600"/>
           </a:xfrm>
           <a:prstGeom prst="roundRect">
             <a:avLst>
-              <a:gd name="adj" fmla="val 4651"/>
+              <a:gd name="adj" fmla="val 1000"/>
             </a:avLst>
           </a:prstGeom>
           <a:solidFill>
-            <a:srgbClr val="EEF6F7"/>
-          </a:solidFill>
-          <a:ln w="19050">
+            <a:srgbClr val="2A3F47"/>
+          </a:solidFill>
+          <a:ln w="12700">
             <a:solidFill>
-              <a:srgbClr val="E5615E"/>
+              <a:srgbClr val="3E535B"/>
             </a:solidFill>
             <a:prstDash val="solid"/>
           </a:ln>
@@ -3196,14 +3372,14 @@
       </p:sp>
       <p:sp>
         <p:nvSpPr>
-          <p:cNvPr id="4" name="Text 2"/>
-          <p:cNvSpPr/>
-          <p:nvPr/>
-        </p:nvSpPr>
-        <p:spPr>
-          <a:xfrm>
-            <a:off x="1005840" y="2103120"/>
-            <a:ext cx="3657600" cy="457200"/>
+          <p:cNvPr id="8" name="Text 6"/>
+          <p:cNvSpPr/>
+          <p:nvPr/>
+        </p:nvSpPr>
+        <p:spPr>
+          <a:xfrm>
+            <a:off x="1097280" y="2697480"/>
+            <a:ext cx="4449928" cy="320040"/>
           </a:xfrm>
           <a:prstGeom prst="rect">
             <a:avLst/>
@@ -3219,84 +3395,38 @@
               <a:buNone/>
             </a:pPr>
             <a:r>
-              <a:rPr lang="en-US" sz="1900" b="1" dirty="0">
-                <a:solidFill>
-                  <a:srgbClr val="E5615E"/>
-                </a:solidFill>
-                <a:latin typeface="Century Schoolbook" pitchFamily="34" charset="0"/>
-                <a:ea typeface="Century Schoolbook" pitchFamily="34" charset="-122"/>
-                <a:cs typeface="Century Schoolbook" pitchFamily="34" charset="-120"/>
-              </a:rPr>
-              <a:t>Problem</a:t>
-            </a:r>
-            <a:endParaRPr lang="en-US" sz="1900" dirty="0"/>
-          </a:p>
-        </p:txBody>
-      </p:sp>
-      <p:sp>
-        <p:nvSpPr>
-          <p:cNvPr id="5" name="Text 3"/>
-          <p:cNvSpPr/>
-          <p:nvPr/>
-        </p:nvSpPr>
-        <p:spPr>
-          <a:xfrm>
-            <a:off x="1005840" y="2578608"/>
-            <a:ext cx="9966960" cy="1188720"/>
-          </a:xfrm>
-          <a:prstGeom prst="rect">
-            <a:avLst/>
-          </a:prstGeom>
-          <a:noFill/>
-          <a:ln/>
-        </p:spPr>
-        <p:txBody>
-          <a:bodyPr wrap="square" lIns="0" tIns="0" rIns="0" bIns="0" rtlCol="0" anchor="ctr"/>
-          <a:lstStyle/>
-          <a:p>
-            <a:pPr indent="0" marL="0">
-              <a:lnSpc>
-                <a:spcPct val="105000"/>
-              </a:lnSpc>
-              <a:buNone/>
-            </a:pPr>
-            <a:r>
-              <a:rPr lang="en-US" sz="1300" dirty="0">
-                <a:solidFill>
-                  <a:srgbClr val="12313A"/>
+              <a:rPr lang="en-US" sz="1200" b="1" spc="200" kern="0" dirty="0">
+                <a:solidFill>
+                  <a:srgbClr val="D1584E"/>
                 </a:solidFill>
                 <a:latin typeface="Calibri" pitchFamily="34" charset="0"/>
                 <a:ea typeface="Calibri" pitchFamily="34" charset="-122"/>
                 <a:cs typeface="Calibri" pitchFamily="34" charset="-120"/>
               </a:rPr>
-              <a:t>The fog gateway's queue publisher shipped with the emulator's fake access keys hard-coded into every connection. Locally everything worked — the emulator accepts any credentials, so all 41 tests and the end-to-end check stayed green — but on real AWS every send would be rejected the moment it deployed.</a:t>
-            </a:r>
-            <a:endParaRPr lang="en-US" sz="1300" dirty="0"/>
-          </a:p>
-        </p:txBody>
-      </p:sp>
-      <p:sp>
-        <p:nvSpPr>
-          <p:cNvPr id="6" name="Shape 4"/>
-          <p:cNvSpPr/>
-          <p:nvPr/>
-        </p:nvSpPr>
-        <p:spPr>
-          <a:xfrm>
-            <a:off x="731520" y="4041648"/>
-            <a:ext cx="10698480" cy="1965960"/>
-          </a:xfrm>
-          <a:prstGeom prst="roundRect">
-            <a:avLst>
-              <a:gd name="adj" fmla="val 4651"/>
-            </a:avLst>
-          </a:prstGeom>
-          <a:solidFill>
-            <a:srgbClr val="EEF6F7"/>
-          </a:solidFill>
+              <a:t>PROBLEM</a:t>
+            </a:r>
+            <a:endParaRPr lang="en-US" sz="1200" dirty="0"/>
+          </a:p>
+        </p:txBody>
+      </p:sp>
+      <p:sp>
+        <p:nvSpPr>
+          <p:cNvPr id="9" name="Shape 7"/>
+          <p:cNvSpPr/>
+          <p:nvPr/>
+        </p:nvSpPr>
+        <p:spPr>
+          <a:xfrm>
+            <a:off x="1097280" y="3081528"/>
+            <a:ext cx="4449928" cy="0"/>
+          </a:xfrm>
+          <a:prstGeom prst="line">
+            <a:avLst/>
+          </a:prstGeom>
+          <a:noFill/>
           <a:ln w="19050">
             <a:solidFill>
-              <a:srgbClr val="2A8FA3"/>
+              <a:srgbClr val="D1584E"/>
             </a:solidFill>
             <a:prstDash val="solid"/>
           </a:ln>
@@ -3304,82 +3434,174 @@
       </p:sp>
       <p:sp>
         <p:nvSpPr>
-          <p:cNvPr id="7" name="Text 5"/>
-          <p:cNvSpPr/>
-          <p:nvPr/>
-        </p:nvSpPr>
-        <p:spPr>
-          <a:xfrm>
-            <a:off x="1005840" y="4224528"/>
-            <a:ext cx="3657600" cy="457200"/>
-          </a:xfrm>
-          <a:prstGeom prst="rect">
-            <a:avLst/>
-          </a:prstGeom>
-          <a:noFill/>
-          <a:ln/>
-        </p:spPr>
-        <p:txBody>
-          <a:bodyPr wrap="square" lIns="0" tIns="0" rIns="0" bIns="0" rtlCol="0" anchor="ctr"/>
-          <a:lstStyle/>
-          <a:p>
-            <a:pPr indent="0" marL="0">
-              <a:buNone/>
-            </a:pPr>
-            <a:r>
-              <a:rPr lang="en-US" sz="1900" b="1" dirty="0">
-                <a:solidFill>
-                  <a:srgbClr val="2A8FA3"/>
-                </a:solidFill>
-                <a:latin typeface="Century Schoolbook" pitchFamily="34" charset="0"/>
-                <a:ea typeface="Century Schoolbook" pitchFamily="34" charset="-122"/>
-                <a:cs typeface="Century Schoolbook" pitchFamily="34" charset="-120"/>
-              </a:rPr>
-              <a:t>Solution</a:t>
-            </a:r>
-            <a:endParaRPr lang="en-US" sz="1900" dirty="0"/>
-          </a:p>
-        </p:txBody>
-      </p:sp>
-      <p:sp>
-        <p:nvSpPr>
-          <p:cNvPr id="8" name="Text 6"/>
-          <p:cNvSpPr/>
-          <p:nvPr/>
-        </p:nvSpPr>
-        <p:spPr>
-          <a:xfrm>
-            <a:off x="1005840" y="4700016"/>
-            <a:ext cx="9966960" cy="1188720"/>
-          </a:xfrm>
-          <a:prstGeom prst="rect">
-            <a:avLst/>
-          </a:prstGeom>
-          <a:noFill/>
-          <a:ln/>
-        </p:spPr>
-        <p:txBody>
-          <a:bodyPr wrap="square" lIns="0" tIns="0" rIns="0" bIns="0" rtlCol="0" anchor="ctr"/>
+          <p:cNvPr id="10" name="Text 8"/>
+          <p:cNvSpPr/>
+          <p:nvPr/>
+        </p:nvSpPr>
+        <p:spPr>
+          <a:xfrm>
+            <a:off x="1097280" y="3246120"/>
+            <a:ext cx="4449928" cy="2651760"/>
+          </a:xfrm>
+          <a:prstGeom prst="rect">
+            <a:avLst/>
+          </a:prstGeom>
+          <a:noFill/>
+          <a:ln/>
+        </p:spPr>
+        <p:txBody>
+          <a:bodyPr wrap="square" lIns="0" tIns="0" rIns="0" bIns="0" rtlCol="0" anchor="t"/>
           <a:lstStyle/>
           <a:p>
             <a:pPr indent="0" marL="0">
               <a:lnSpc>
-                <a:spcPct val="105000"/>
+                <a:spcPct val="128000"/>
               </a:lnSpc>
               <a:buNone/>
             </a:pPr>
             <a:r>
-              <a:rPr lang="en-US" sz="1300" dirty="0">
-                <a:solidFill>
-                  <a:srgbClr val="12313A"/>
+              <a:rPr lang="en-US" sz="1350" dirty="0">
+                <a:solidFill>
+                  <a:srgbClr val="EEF2F6"/>
                 </a:solidFill>
                 <a:latin typeface="Calibri" pitchFamily="34" charset="0"/>
                 <a:ea typeface="Calibri" pitchFamily="34" charset="-122"/>
                 <a:cs typeface="Calibri" pitchFamily="34" charset="-120"/>
               </a:rPr>
-              <a:t>Fake keys are now attached only when an emulator endpoint is configured; on real AWS the SDK falls back to its own identity chain. A cloud-readiness audit caught two more emulator-only assumptions the same way, and new regression tests lock all three fixes in.</a:t>
-            </a:r>
-            <a:endParaRPr lang="en-US" sz="1300" dirty="0"/>
+              <a:t>The dashboard handler takes an optional argument holding ready-made cloud clients so the unit tests can inject fakes. But the serverless runtime passes its own completion callback among the handler's arguments, in the same position, so the handler could mistake the runtime's callback for injected clients and query it as if it were the data store.</a:t>
+            </a:r>
+            <a:endParaRPr lang="en-US" sz="1350" dirty="0"/>
+          </a:p>
+        </p:txBody>
+      </p:sp>
+      <p:sp>
+        <p:nvSpPr>
+          <p:cNvPr id="11" name="Shape 9"/>
+          <p:cNvSpPr/>
+          <p:nvPr/>
+        </p:nvSpPr>
+        <p:spPr>
+          <a:xfrm>
+            <a:off x="6324448" y="2423160"/>
+            <a:ext cx="5090008" cy="3657600"/>
+          </a:xfrm>
+          <a:prstGeom prst="roundRect">
+            <a:avLst>
+              <a:gd name="adj" fmla="val 1000"/>
+            </a:avLst>
+          </a:prstGeom>
+          <a:solidFill>
+            <a:srgbClr val="2A3F47"/>
+          </a:solidFill>
+          <a:ln w="12700">
+            <a:solidFill>
+              <a:srgbClr val="3E535B"/>
+            </a:solidFill>
+            <a:prstDash val="solid"/>
+          </a:ln>
+        </p:spPr>
+      </p:sp>
+      <p:sp>
+        <p:nvSpPr>
+          <p:cNvPr id="12" name="Text 10"/>
+          <p:cNvSpPr/>
+          <p:nvPr/>
+        </p:nvSpPr>
+        <p:spPr>
+          <a:xfrm>
+            <a:off x="6644488" y="2697480"/>
+            <a:ext cx="4449928" cy="320040"/>
+          </a:xfrm>
+          <a:prstGeom prst="rect">
+            <a:avLst/>
+          </a:prstGeom>
+          <a:noFill/>
+          <a:ln/>
+        </p:spPr>
+        <p:txBody>
+          <a:bodyPr wrap="square" lIns="0" tIns="0" rIns="0" bIns="0" rtlCol="0" anchor="ctr"/>
+          <a:lstStyle/>
+          <a:p>
+            <a:pPr indent="0" marL="0">
+              <a:buNone/>
+            </a:pPr>
+            <a:r>
+              <a:rPr lang="en-US" sz="1200" b="1" spc="200" kern="0" dirty="0">
+                <a:solidFill>
+                  <a:srgbClr val="3FAE82"/>
+                </a:solidFill>
+                <a:latin typeface="Calibri" pitchFamily="34" charset="0"/>
+                <a:ea typeface="Calibri" pitchFamily="34" charset="-122"/>
+                <a:cs typeface="Calibri" pitchFamily="34" charset="-120"/>
+              </a:rPr>
+              <a:t>SOLUTION</a:t>
+            </a:r>
+            <a:endParaRPr lang="en-US" sz="1200" dirty="0"/>
+          </a:p>
+        </p:txBody>
+      </p:sp>
+      <p:sp>
+        <p:nvSpPr>
+          <p:cNvPr id="13" name="Shape 11"/>
+          <p:cNvSpPr/>
+          <p:nvPr/>
+        </p:nvSpPr>
+        <p:spPr>
+          <a:xfrm>
+            <a:off x="6644488" y="3081528"/>
+            <a:ext cx="4449928" cy="0"/>
+          </a:xfrm>
+          <a:prstGeom prst="line">
+            <a:avLst/>
+          </a:prstGeom>
+          <a:noFill/>
+          <a:ln w="19050">
+            <a:solidFill>
+              <a:srgbClr val="3FAE82"/>
+            </a:solidFill>
+            <a:prstDash val="solid"/>
+          </a:ln>
+        </p:spPr>
+      </p:sp>
+      <p:sp>
+        <p:nvSpPr>
+          <p:cNvPr id="14" name="Text 12"/>
+          <p:cNvSpPr/>
+          <p:nvPr/>
+        </p:nvSpPr>
+        <p:spPr>
+          <a:xfrm>
+            <a:off x="6644488" y="3246120"/>
+            <a:ext cx="4449928" cy="2651760"/>
+          </a:xfrm>
+          <a:prstGeom prst="rect">
+            <a:avLst/>
+          </a:prstGeom>
+          <a:noFill/>
+          <a:ln/>
+        </p:spPr>
+        <p:txBody>
+          <a:bodyPr wrap="square" lIns="0" tIns="0" rIns="0" bIns="0" rtlCol="0" anchor="t"/>
+          <a:lstStyle/>
+          <a:p>
+            <a:pPr indent="0" marL="0">
+              <a:lnSpc>
+                <a:spcPct val="128000"/>
+              </a:lnSpc>
+              <a:buNone/>
+            </a:pPr>
+            <a:r>
+              <a:rPr lang="en-US" sz="1350" dirty="0">
+                <a:solidFill>
+                  <a:srgbClr val="EEF2F6"/>
+                </a:solidFill>
+                <a:latin typeface="Calibri" pitchFamily="34" charset="0"/>
+                <a:ea typeface="Calibri" pitchFamily="34" charset="-122"/>
+                <a:cs typeface="Calibri" pitchFamily="34" charset="-120"/>
+              </a:rPr>
+              <a:t>The handler tells the two apart by the argument's shape rather than its mere presence: it treats the argument as injected clients only when it genuinely carries a store client, and otherwise builds its own. The fake path the tests use and the self-building path production needs are now unambiguous, and the runtime callback can never be read as a client.</a:t>
+            </a:r>
+            <a:endParaRPr lang="en-US" sz="1350" dirty="0"/>
           </a:p>
         </p:txBody>
       </p:sp>
